--- a/exports/pptx/lessons/middle-module-08-yoga/day-02-eight-limbs.pptx
+++ b/exports/pptx/lessons/middle-module-08-yoga/day-02-eight-limbs.pptx
@@ -19,9 +19,15 @@
     <p:sldId id="267" r:id="rId13"/>
     <p:sldId id="268" r:id="rId14"/>
     <p:sldId id="269" r:id="rId15"/>
+    <p:sldId id="270" r:id="rId16"/>
+    <p:sldId id="271" r:id="rId17"/>
+    <p:sldId id="272" r:id="rId18"/>
+    <p:sldId id="273" r:id="rId19"/>
+    <p:sldId id="274" r:id="rId20"/>
+    <p:sldId id="275" r:id="rId21"/>
   </p:sldIdLst>
   <p:notesMasterIdLst>
-    <p:notesMasterId r:id="rId16"/>
+    <p:notesMasterId r:id="rId22"/>
   </p:notesMasterIdLst>
   <p:sldSz cx="9144000" cy="5143500"/>
   <p:notesSz cx="5143500" cy="9144000"/>
@@ -997,6 +1003,446 @@
 </p:notes>
 </file>
 
+<file path=ppt/notesSlides/notesSlide15.xml><?xml version="1.0" encoding="utf-8"?>
+<p:notes xmlns:a="http://schemas.openxmlformats.org/drawingml/2006/main" xmlns:r="http://schemas.openxmlformats.org/officeDocument/2006/relationships" xmlns:p="http://schemas.openxmlformats.org/presentationml/2006/main">
+  <p:cSld>
+    <p:spTree>
+      <p:nvGrpSpPr>
+        <p:cNvPr id="1" name=""/>
+        <p:cNvGrpSpPr/>
+        <p:nvPr/>
+      </p:nvGrpSpPr>
+      <p:grpSpPr>
+        <a:xfrm>
+          <a:off x="0" y="0"/>
+          <a:ext cx="0" cy="0"/>
+          <a:chOff x="0" y="0"/>
+          <a:chExt cx="0" cy="0"/>
+        </a:xfrm>
+      </p:grpSpPr>
+      <p:sp>
+        <p:nvSpPr>
+          <p:cNvPr id="2" name="Slide Image Placeholder 1"/>
+          <p:cNvSpPr>
+            <a:spLocks noGrp="1" noRot="1" noChangeAspect="1"/>
+          </p:cNvSpPr>
+          <p:nvPr>
+            <p:ph type="sldImg"/>
+          </p:nvPr>
+        </p:nvSpPr>
+        <p:spPr/>
+      </p:sp>
+      <p:sp>
+        <p:nvSpPr>
+          <p:cNvPr id="3" name="Notes Placeholder 2"/>
+          <p:cNvSpPr>
+            <a:spLocks noGrp="1"/>
+          </p:cNvSpPr>
+          <p:nvPr>
+            <p:ph type="body" idx="1"/>
+          </p:nvPr>
+        </p:nvSpPr>
+        <p:spPr/>
+        <p:txBody>
+          <a:bodyPr/>
+          <a:lstStyle/>
+          <a:p>
+            <a:r>
+              <a:rPr lang="en-US" dirty="0"/>
+              <a:t/>
+            </a:r>
+            <a:endParaRPr lang="en-US" dirty="0"/>
+          </a:p>
+        </p:txBody>
+      </p:sp>
+      <p:sp>
+        <p:nvSpPr>
+          <p:cNvPr id="4" name="Slide Number Placeholder 3"/>
+          <p:cNvSpPr>
+            <a:spLocks noGrp="1"/>
+          </p:cNvSpPr>
+          <p:nvPr>
+            <p:ph type="sldNum" sz="quarter" idx="10"/>
+          </p:nvPr>
+        </p:nvSpPr>
+        <p:spPr/>
+        <p:txBody>
+          <a:bodyPr/>
+          <a:lstStyle/>
+          <a:p>
+            <a:fld id="{F7021451-1387-4CA6-816F-3879F97B5CBC}" type="slidenum">
+              <a:rPr lang="en-US"/>
+              <a:t>15</a:t>
+            </a:fld>
+            <a:endParaRPr lang="en-US"/>
+          </a:p>
+        </p:txBody>
+      </p:sp>
+    </p:spTree>
+    <p:extLst>
+      <p:ext uri="{BB962C8B-B14F-4D97-AF65-F5344CB8AC3E}">
+        <p14:creationId xmlns:p14="http://schemas.microsoft.com/office/powerpoint/2010/main" val="1024086991"/>
+      </p:ext>
+    </p:extLst>
+  </p:cSld>
+  <p:clrMapOvr>
+    <a:masterClrMapping/>
+  </p:clrMapOvr>
+</p:notes>
+</file>
+
+<file path=ppt/notesSlides/notesSlide16.xml><?xml version="1.0" encoding="utf-8"?>
+<p:notes xmlns:a="http://schemas.openxmlformats.org/drawingml/2006/main" xmlns:r="http://schemas.openxmlformats.org/officeDocument/2006/relationships" xmlns:p="http://schemas.openxmlformats.org/presentationml/2006/main">
+  <p:cSld>
+    <p:spTree>
+      <p:nvGrpSpPr>
+        <p:cNvPr id="1" name=""/>
+        <p:cNvGrpSpPr/>
+        <p:nvPr/>
+      </p:nvGrpSpPr>
+      <p:grpSpPr>
+        <a:xfrm>
+          <a:off x="0" y="0"/>
+          <a:ext cx="0" cy="0"/>
+          <a:chOff x="0" y="0"/>
+          <a:chExt cx="0" cy="0"/>
+        </a:xfrm>
+      </p:grpSpPr>
+      <p:sp>
+        <p:nvSpPr>
+          <p:cNvPr id="2" name="Slide Image Placeholder 1"/>
+          <p:cNvSpPr>
+            <a:spLocks noGrp="1" noRot="1" noChangeAspect="1"/>
+          </p:cNvSpPr>
+          <p:nvPr>
+            <p:ph type="sldImg"/>
+          </p:nvPr>
+        </p:nvSpPr>
+        <p:spPr/>
+      </p:sp>
+      <p:sp>
+        <p:nvSpPr>
+          <p:cNvPr id="3" name="Notes Placeholder 2"/>
+          <p:cNvSpPr>
+            <a:spLocks noGrp="1"/>
+          </p:cNvSpPr>
+          <p:nvPr>
+            <p:ph type="body" idx="1"/>
+          </p:nvPr>
+        </p:nvSpPr>
+        <p:spPr/>
+        <p:txBody>
+          <a:bodyPr/>
+          <a:lstStyle/>
+          <a:p>
+            <a:r>
+              <a:rPr lang="en-US" dirty="0"/>
+              <a:t/>
+            </a:r>
+            <a:endParaRPr lang="en-US" dirty="0"/>
+          </a:p>
+        </p:txBody>
+      </p:sp>
+      <p:sp>
+        <p:nvSpPr>
+          <p:cNvPr id="4" name="Slide Number Placeholder 3"/>
+          <p:cNvSpPr>
+            <a:spLocks noGrp="1"/>
+          </p:cNvSpPr>
+          <p:nvPr>
+            <p:ph type="sldNum" sz="quarter" idx="10"/>
+          </p:nvPr>
+        </p:nvSpPr>
+        <p:spPr/>
+        <p:txBody>
+          <a:bodyPr/>
+          <a:lstStyle/>
+          <a:p>
+            <a:fld id="{F7021451-1387-4CA6-816F-3879F97B5CBC}" type="slidenum">
+              <a:rPr lang="en-US"/>
+              <a:t>16</a:t>
+            </a:fld>
+            <a:endParaRPr lang="en-US"/>
+          </a:p>
+        </p:txBody>
+      </p:sp>
+    </p:spTree>
+    <p:extLst>
+      <p:ext uri="{BB962C8B-B14F-4D97-AF65-F5344CB8AC3E}">
+        <p14:creationId xmlns:p14="http://schemas.microsoft.com/office/powerpoint/2010/main" val="1024086991"/>
+      </p:ext>
+    </p:extLst>
+  </p:cSld>
+  <p:clrMapOvr>
+    <a:masterClrMapping/>
+  </p:clrMapOvr>
+</p:notes>
+</file>
+
+<file path=ppt/notesSlides/notesSlide17.xml><?xml version="1.0" encoding="utf-8"?>
+<p:notes xmlns:a="http://schemas.openxmlformats.org/drawingml/2006/main" xmlns:r="http://schemas.openxmlformats.org/officeDocument/2006/relationships" xmlns:p="http://schemas.openxmlformats.org/presentationml/2006/main">
+  <p:cSld>
+    <p:spTree>
+      <p:nvGrpSpPr>
+        <p:cNvPr id="1" name=""/>
+        <p:cNvGrpSpPr/>
+        <p:nvPr/>
+      </p:nvGrpSpPr>
+      <p:grpSpPr>
+        <a:xfrm>
+          <a:off x="0" y="0"/>
+          <a:ext cx="0" cy="0"/>
+          <a:chOff x="0" y="0"/>
+          <a:chExt cx="0" cy="0"/>
+        </a:xfrm>
+      </p:grpSpPr>
+      <p:sp>
+        <p:nvSpPr>
+          <p:cNvPr id="2" name="Slide Image Placeholder 1"/>
+          <p:cNvSpPr>
+            <a:spLocks noGrp="1" noRot="1" noChangeAspect="1"/>
+          </p:cNvSpPr>
+          <p:nvPr>
+            <p:ph type="sldImg"/>
+          </p:nvPr>
+        </p:nvSpPr>
+        <p:spPr/>
+      </p:sp>
+      <p:sp>
+        <p:nvSpPr>
+          <p:cNvPr id="3" name="Notes Placeholder 2"/>
+          <p:cNvSpPr>
+            <a:spLocks noGrp="1"/>
+          </p:cNvSpPr>
+          <p:nvPr>
+            <p:ph type="body" idx="1"/>
+          </p:nvPr>
+        </p:nvSpPr>
+        <p:spPr/>
+        <p:txBody>
+          <a:bodyPr/>
+          <a:lstStyle/>
+          <a:p>
+            <a:r>
+              <a:rPr lang="en-US" dirty="0"/>
+              <a:t/>
+            </a:r>
+            <a:endParaRPr lang="en-US" dirty="0"/>
+          </a:p>
+        </p:txBody>
+      </p:sp>
+      <p:sp>
+        <p:nvSpPr>
+          <p:cNvPr id="4" name="Slide Number Placeholder 3"/>
+          <p:cNvSpPr>
+            <a:spLocks noGrp="1"/>
+          </p:cNvSpPr>
+          <p:nvPr>
+            <p:ph type="sldNum" sz="quarter" idx="10"/>
+          </p:nvPr>
+        </p:nvSpPr>
+        <p:spPr/>
+        <p:txBody>
+          <a:bodyPr/>
+          <a:lstStyle/>
+          <a:p>
+            <a:fld id="{F7021451-1387-4CA6-816F-3879F97B5CBC}" type="slidenum">
+              <a:rPr lang="en-US"/>
+              <a:t>17</a:t>
+            </a:fld>
+            <a:endParaRPr lang="en-US"/>
+          </a:p>
+        </p:txBody>
+      </p:sp>
+    </p:spTree>
+    <p:extLst>
+      <p:ext uri="{BB962C8B-B14F-4D97-AF65-F5344CB8AC3E}">
+        <p14:creationId xmlns:p14="http://schemas.microsoft.com/office/powerpoint/2010/main" val="1024086991"/>
+      </p:ext>
+    </p:extLst>
+  </p:cSld>
+  <p:clrMapOvr>
+    <a:masterClrMapping/>
+  </p:clrMapOvr>
+</p:notes>
+</file>
+
+<file path=ppt/notesSlides/notesSlide18.xml><?xml version="1.0" encoding="utf-8"?>
+<p:notes xmlns:a="http://schemas.openxmlformats.org/drawingml/2006/main" xmlns:r="http://schemas.openxmlformats.org/officeDocument/2006/relationships" xmlns:p="http://schemas.openxmlformats.org/presentationml/2006/main">
+  <p:cSld>
+    <p:spTree>
+      <p:nvGrpSpPr>
+        <p:cNvPr id="1" name=""/>
+        <p:cNvGrpSpPr/>
+        <p:nvPr/>
+      </p:nvGrpSpPr>
+      <p:grpSpPr>
+        <a:xfrm>
+          <a:off x="0" y="0"/>
+          <a:ext cx="0" cy="0"/>
+          <a:chOff x="0" y="0"/>
+          <a:chExt cx="0" cy="0"/>
+        </a:xfrm>
+      </p:grpSpPr>
+      <p:sp>
+        <p:nvSpPr>
+          <p:cNvPr id="2" name="Slide Image Placeholder 1"/>
+          <p:cNvSpPr>
+            <a:spLocks noGrp="1" noRot="1" noChangeAspect="1"/>
+          </p:cNvSpPr>
+          <p:nvPr>
+            <p:ph type="sldImg"/>
+          </p:nvPr>
+        </p:nvSpPr>
+        <p:spPr/>
+      </p:sp>
+      <p:sp>
+        <p:nvSpPr>
+          <p:cNvPr id="3" name="Notes Placeholder 2"/>
+          <p:cNvSpPr>
+            <a:spLocks noGrp="1"/>
+          </p:cNvSpPr>
+          <p:nvPr>
+            <p:ph type="body" idx="1"/>
+          </p:nvPr>
+        </p:nvSpPr>
+        <p:spPr/>
+        <p:txBody>
+          <a:bodyPr/>
+          <a:lstStyle/>
+          <a:p>
+            <a:r>
+              <a:rPr lang="en-US" dirty="0"/>
+              <a:t/>
+            </a:r>
+            <a:endParaRPr lang="en-US" dirty="0"/>
+          </a:p>
+        </p:txBody>
+      </p:sp>
+      <p:sp>
+        <p:nvSpPr>
+          <p:cNvPr id="4" name="Slide Number Placeholder 3"/>
+          <p:cNvSpPr>
+            <a:spLocks noGrp="1"/>
+          </p:cNvSpPr>
+          <p:nvPr>
+            <p:ph type="sldNum" sz="quarter" idx="10"/>
+          </p:nvPr>
+        </p:nvSpPr>
+        <p:spPr/>
+        <p:txBody>
+          <a:bodyPr/>
+          <a:lstStyle/>
+          <a:p>
+            <a:fld id="{F7021451-1387-4CA6-816F-3879F97B5CBC}" type="slidenum">
+              <a:rPr lang="en-US"/>
+              <a:t>18</a:t>
+            </a:fld>
+            <a:endParaRPr lang="en-US"/>
+          </a:p>
+        </p:txBody>
+      </p:sp>
+    </p:spTree>
+    <p:extLst>
+      <p:ext uri="{BB962C8B-B14F-4D97-AF65-F5344CB8AC3E}">
+        <p14:creationId xmlns:p14="http://schemas.microsoft.com/office/powerpoint/2010/main" val="1024086991"/>
+      </p:ext>
+    </p:extLst>
+  </p:cSld>
+  <p:clrMapOvr>
+    <a:masterClrMapping/>
+  </p:clrMapOvr>
+</p:notes>
+</file>
+
+<file path=ppt/notesSlides/notesSlide19.xml><?xml version="1.0" encoding="utf-8"?>
+<p:notes xmlns:a="http://schemas.openxmlformats.org/drawingml/2006/main" xmlns:r="http://schemas.openxmlformats.org/officeDocument/2006/relationships" xmlns:p="http://schemas.openxmlformats.org/presentationml/2006/main">
+  <p:cSld>
+    <p:spTree>
+      <p:nvGrpSpPr>
+        <p:cNvPr id="1" name=""/>
+        <p:cNvGrpSpPr/>
+        <p:nvPr/>
+      </p:nvGrpSpPr>
+      <p:grpSpPr>
+        <a:xfrm>
+          <a:off x="0" y="0"/>
+          <a:ext cx="0" cy="0"/>
+          <a:chOff x="0" y="0"/>
+          <a:chExt cx="0" cy="0"/>
+        </a:xfrm>
+      </p:grpSpPr>
+      <p:sp>
+        <p:nvSpPr>
+          <p:cNvPr id="2" name="Slide Image Placeholder 1"/>
+          <p:cNvSpPr>
+            <a:spLocks noGrp="1" noRot="1" noChangeAspect="1"/>
+          </p:cNvSpPr>
+          <p:nvPr>
+            <p:ph type="sldImg"/>
+          </p:nvPr>
+        </p:nvSpPr>
+        <p:spPr/>
+      </p:sp>
+      <p:sp>
+        <p:nvSpPr>
+          <p:cNvPr id="3" name="Notes Placeholder 2"/>
+          <p:cNvSpPr>
+            <a:spLocks noGrp="1"/>
+          </p:cNvSpPr>
+          <p:nvPr>
+            <p:ph type="body" idx="1"/>
+          </p:nvPr>
+        </p:nvSpPr>
+        <p:spPr/>
+        <p:txBody>
+          <a:bodyPr/>
+          <a:lstStyle/>
+          <a:p>
+            <a:r>
+              <a:rPr lang="en-US" dirty="0"/>
+              <a:t/>
+            </a:r>
+            <a:endParaRPr lang="en-US" dirty="0"/>
+          </a:p>
+        </p:txBody>
+      </p:sp>
+      <p:sp>
+        <p:nvSpPr>
+          <p:cNvPr id="4" name="Slide Number Placeholder 3"/>
+          <p:cNvSpPr>
+            <a:spLocks noGrp="1"/>
+          </p:cNvSpPr>
+          <p:nvPr>
+            <p:ph type="sldNum" sz="quarter" idx="10"/>
+          </p:nvPr>
+        </p:nvSpPr>
+        <p:spPr/>
+        <p:txBody>
+          <a:bodyPr/>
+          <a:lstStyle/>
+          <a:p>
+            <a:fld id="{F7021451-1387-4CA6-816F-3879F97B5CBC}" type="slidenum">
+              <a:rPr lang="en-US"/>
+              <a:t>19</a:t>
+            </a:fld>
+            <a:endParaRPr lang="en-US"/>
+          </a:p>
+        </p:txBody>
+      </p:sp>
+    </p:spTree>
+    <p:extLst>
+      <p:ext uri="{BB962C8B-B14F-4D97-AF65-F5344CB8AC3E}">
+        <p14:creationId xmlns:p14="http://schemas.microsoft.com/office/powerpoint/2010/main" val="1024086991"/>
+      </p:ext>
+    </p:extLst>
+  </p:cSld>
+  <p:clrMapOvr>
+    <a:masterClrMapping/>
+  </p:clrMapOvr>
+</p:notes>
+</file>
+
 <file path=ppt/notesSlides/notesSlide2.xml><?xml version="1.0" encoding="utf-8"?>
 <p:notes xmlns:a="http://schemas.openxmlformats.org/drawingml/2006/main" xmlns:r="http://schemas.openxmlformats.org/officeDocument/2006/relationships" xmlns:p="http://schemas.openxmlformats.org/presentationml/2006/main">
   <p:cSld>
@@ -1067,6 +1513,94 @@
             <a:fld id="{F7021451-1387-4CA6-816F-3879F97B5CBC}" type="slidenum">
               <a:rPr lang="en-US"/>
               <a:t>2</a:t>
+            </a:fld>
+            <a:endParaRPr lang="en-US"/>
+          </a:p>
+        </p:txBody>
+      </p:sp>
+    </p:spTree>
+    <p:extLst>
+      <p:ext uri="{BB962C8B-B14F-4D97-AF65-F5344CB8AC3E}">
+        <p14:creationId xmlns:p14="http://schemas.microsoft.com/office/powerpoint/2010/main" val="1024086991"/>
+      </p:ext>
+    </p:extLst>
+  </p:cSld>
+  <p:clrMapOvr>
+    <a:masterClrMapping/>
+  </p:clrMapOvr>
+</p:notes>
+</file>
+
+<file path=ppt/notesSlides/notesSlide20.xml><?xml version="1.0" encoding="utf-8"?>
+<p:notes xmlns:a="http://schemas.openxmlformats.org/drawingml/2006/main" xmlns:r="http://schemas.openxmlformats.org/officeDocument/2006/relationships" xmlns:p="http://schemas.openxmlformats.org/presentationml/2006/main">
+  <p:cSld>
+    <p:spTree>
+      <p:nvGrpSpPr>
+        <p:cNvPr id="1" name=""/>
+        <p:cNvGrpSpPr/>
+        <p:nvPr/>
+      </p:nvGrpSpPr>
+      <p:grpSpPr>
+        <a:xfrm>
+          <a:off x="0" y="0"/>
+          <a:ext cx="0" cy="0"/>
+          <a:chOff x="0" y="0"/>
+          <a:chExt cx="0" cy="0"/>
+        </a:xfrm>
+      </p:grpSpPr>
+      <p:sp>
+        <p:nvSpPr>
+          <p:cNvPr id="2" name="Slide Image Placeholder 1"/>
+          <p:cNvSpPr>
+            <a:spLocks noGrp="1" noRot="1" noChangeAspect="1"/>
+          </p:cNvSpPr>
+          <p:nvPr>
+            <p:ph type="sldImg"/>
+          </p:nvPr>
+        </p:nvSpPr>
+        <p:spPr/>
+      </p:sp>
+      <p:sp>
+        <p:nvSpPr>
+          <p:cNvPr id="3" name="Notes Placeholder 2"/>
+          <p:cNvSpPr>
+            <a:spLocks noGrp="1"/>
+          </p:cNvSpPr>
+          <p:nvPr>
+            <p:ph type="body" idx="1"/>
+          </p:nvPr>
+        </p:nvSpPr>
+        <p:spPr/>
+        <p:txBody>
+          <a:bodyPr/>
+          <a:lstStyle/>
+          <a:p>
+            <a:r>
+              <a:rPr lang="en-US" dirty="0"/>
+              <a:t/>
+            </a:r>
+            <a:endParaRPr lang="en-US" dirty="0"/>
+          </a:p>
+        </p:txBody>
+      </p:sp>
+      <p:sp>
+        <p:nvSpPr>
+          <p:cNvPr id="4" name="Slide Number Placeholder 3"/>
+          <p:cNvSpPr>
+            <a:spLocks noGrp="1"/>
+          </p:cNvSpPr>
+          <p:nvPr>
+            <p:ph type="sldNum" sz="quarter" idx="10"/>
+          </p:nvPr>
+        </p:nvSpPr>
+        <p:spPr/>
+        <p:txBody>
+          <a:bodyPr/>
+          <a:lstStyle/>
+          <a:p>
+            <a:fld id="{F7021451-1387-4CA6-816F-3879F97B5CBC}" type="slidenum">
+              <a:rPr lang="en-US"/>
+              <a:t>20</a:t>
             </a:fld>
             <a:endParaRPr lang="en-US"/>
           </a:p>
@@ -2278,102 +2812,6 @@
         </p:nvSpPr>
         <p:spPr>
           <a:xfrm>
-            <a:off x="406301" y="1223963"/>
-            <a:ext cx="8498026" cy="274290"/>
-          </a:xfrm>
-          <a:prstGeom prst="rect">
-            <a:avLst/>
-          </a:prstGeom>
-          <a:noFill/>
-          <a:ln/>
-        </p:spPr>
-        <p:txBody>
-          <a:bodyPr wrap="square" lIns="0" tIns="0" rIns="0" bIns="0" rtlCol="0" anchor="t"/>
-          <a:lstStyle/>
-          <a:p>
-            <a:pPr algn="l" indent="0" marL="0">
-              <a:lnSpc>
-                <a:spcPts val="2160"/>
-              </a:lnSpc>
-              <a:spcBef>
-                <a:spcPts val="600"/>
-              </a:spcBef>
-              <a:spcAft>
-                <a:spcPts val="800"/>
-              </a:spcAft>
-              <a:buNone/>
-            </a:pPr>
-            <a:r>
-              <a:rPr lang="en-US" sz="1800" b="1" dirty="0">
-                <a:solidFill>
-                  <a:srgbClr val="FE4447"/>
-                </a:solidFill>
-                <a:latin typeface="Georgia" pitchFamily="34" charset="0"/>
-                <a:ea typeface="Georgia" pitchFamily="34" charset="-122"/>
-                <a:cs typeface="Georgia" pitchFamily="34" charset="-120"/>
-              </a:rPr>
-              <a:t>Learning objective</a:t>
-            </a:r>
-            <a:endParaRPr lang="en-US" sz="1800" dirty="0"/>
-          </a:p>
-        </p:txBody>
-      </p:sp>
-      <p:sp>
-        <p:nvSpPr>
-          <p:cNvPr id="6" name="Text 4"/>
-          <p:cNvSpPr/>
-          <p:nvPr/>
-        </p:nvSpPr>
-        <p:spPr>
-          <a:xfrm>
-            <a:off x="406301" y="1637854"/>
-            <a:ext cx="8498026" cy="426541"/>
-          </a:xfrm>
-          <a:prstGeom prst="rect">
-            <a:avLst/>
-          </a:prstGeom>
-          <a:noFill/>
-          <a:ln/>
-        </p:spPr>
-        <p:txBody>
-          <a:bodyPr wrap="square" lIns="0" tIns="0" rIns="0" bIns="0" rtlCol="0" anchor="t"/>
-          <a:lstStyle/>
-          <a:p>
-            <a:pPr algn="l" indent="0" marL="0">
-              <a:lnSpc>
-                <a:spcPts val="1680"/>
-              </a:lnSpc>
-              <a:spcBef>
-                <a:spcPts val="300"/>
-              </a:spcBef>
-              <a:spcAft>
-                <a:spcPts val="300"/>
-              </a:spcAft>
-              <a:buNone/>
-            </a:pPr>
-            <a:r>
-              <a:rPr lang="en-US" sz="1200" dirty="0">
-                <a:solidFill>
-                  <a:srgbClr val="1C2833"/>
-                </a:solidFill>
-                <a:latin typeface="Arial" pitchFamily="34" charset="0"/>
-                <a:ea typeface="Arial" pitchFamily="34" charset="-122"/>
-                <a:cs typeface="Arial" pitchFamily="34" charset="-120"/>
-              </a:rPr>
-              <a:t>By the end of this lesson, students will name all eight limbs of Patañjali's yoga in order and identify which limbs are physical, which are mental, and which are about ethical conduct.</a:t>
-            </a:r>
-            <a:endParaRPr lang="en-US" sz="1200" dirty="0"/>
-          </a:p>
-        </p:txBody>
-      </p:sp>
-      <p:sp>
-        <p:nvSpPr>
-          <p:cNvPr id="7" name="Text 5"/>
-          <p:cNvSpPr/>
-          <p:nvPr/>
-        </p:nvSpPr>
-        <p:spPr>
-          <a:xfrm>
             <a:off x="406301" y="4434929"/>
             <a:ext cx="8498026" cy="213271"/>
           </a:xfrm>
@@ -2518,7 +2956,7 @@
                 <a:ea typeface="Georgia" pitchFamily="34" charset="-122"/>
                 <a:cs typeface="Georgia" pitchFamily="34" charset="-120"/>
               </a:rPr>
-              <a:t>Student-facing content</a:t>
+              <a:t>Core (15 min) — The eight limbs (cont.)</a:t>
             </a:r>
             <a:endParaRPr lang="en-US" sz="1800" dirty="0"/>
           </a:p>
@@ -2533,7 +2971,7 @@
         <p:spPr>
           <a:xfrm>
             <a:off x="406301" y="883593"/>
-            <a:ext cx="8331398" cy="2112169"/>
+            <a:ext cx="8331398" cy="842963"/>
           </a:xfrm>
           <a:prstGeom prst="rect">
             <a:avLst/>
@@ -2563,7 +3001,7 @@
         <p:spPr>
           <a:xfrm>
             <a:off x="434876" y="883593"/>
-            <a:ext cx="0" cy="2112169"/>
+            <a:ext cx="0" cy="842963"/>
           </a:xfrm>
           <a:prstGeom prst="line">
             <a:avLst/>
@@ -2586,6 +3024,107 @@
         <p:spPr>
           <a:xfrm>
             <a:off x="692051" y="1074093"/>
+            <a:ext cx="7973389" cy="461963"/>
+          </a:xfrm>
+          <a:prstGeom prst="rect">
+            <a:avLst/>
+          </a:prstGeom>
+          <a:noFill/>
+          <a:ln/>
+        </p:spPr>
+        <p:txBody>
+          <a:bodyPr wrap="square" lIns="0" tIns="0" rIns="0" bIns="0" rtlCol="0" anchor="t"/>
+          <a:lstStyle/>
+          <a:p>
+            <a:pPr algn="l" indent="0" marL="0">
+              <a:lnSpc>
+                <a:spcPts val="1820"/>
+              </a:lnSpc>
+              <a:spcBef>
+                <a:spcPts val="300"/>
+              </a:spcBef>
+              <a:spcAft>
+                <a:spcPts val="300"/>
+              </a:spcAft>
+              <a:buNone/>
+            </a:pPr>
+            <a:r>
+              <a:rPr lang="en-US" sz="1300" i="1" dirty="0">
+                <a:solidFill>
+                  <a:srgbClr val="1C2833"/>
+                </a:solidFill>
+                <a:latin typeface="Georgia" pitchFamily="34" charset="0"/>
+                <a:ea typeface="Georgia" pitchFamily="34" charset="-122"/>
+                <a:cs typeface="Georgia" pitchFamily="34" charset="-120"/>
+              </a:rPr>
+              <a:t>"Yoga is practised in eight different stages: yama, niyama, āsana, prāṇāyāma, pratyāhāra, dhāraṇā, dhyāna, and samādhi." — Śrīmad-Bhāgavatam, Canto 3 (purport)</a:t>
+            </a:r>
+            <a:endParaRPr lang="en-US" sz="1300" dirty="0"/>
+          </a:p>
+        </p:txBody>
+      </p:sp>
+      <p:sp>
+        <p:nvSpPr>
+          <p:cNvPr id="7" name="Text 5"/>
+          <p:cNvSpPr/>
+          <p:nvPr/>
+        </p:nvSpPr>
+        <p:spPr>
+          <a:xfrm>
+            <a:off x="406301" y="1828056"/>
+            <a:ext cx="8331398" cy="611981"/>
+          </a:xfrm>
+          <a:prstGeom prst="rect">
+            <a:avLst/>
+          </a:prstGeom>
+          <a:solidFill>
+            <a:srgbClr val="F4F8F9"/>
+          </a:solidFill>
+          <a:ln/>
+        </p:spPr>
+        <p:txBody>
+          <a:bodyPr wrap="square" rtlCol="0" anchor="ctr"/>
+          <a:lstStyle/>
+          <a:p>
+            <a:pPr indent="0" marL="0">
+              <a:buNone/>
+            </a:pPr>
+            <a:endParaRPr lang="en-US" dirty="0"/>
+          </a:p>
+        </p:txBody>
+      </p:sp>
+      <p:sp>
+        <p:nvSpPr>
+          <p:cNvPr id="8" name="Shape 6"/>
+          <p:cNvSpPr/>
+          <p:nvPr/>
+        </p:nvSpPr>
+        <p:spPr>
+          <a:xfrm>
+            <a:off x="434876" y="1828056"/>
+            <a:ext cx="0" cy="611981"/>
+          </a:xfrm>
+          <a:prstGeom prst="line">
+            <a:avLst/>
+          </a:prstGeom>
+          <a:noFill/>
+          <a:ln w="57150">
+            <a:solidFill>
+              <a:srgbClr val="FE4447"/>
+            </a:solidFill>
+            <a:prstDash val="solid"/>
+          </a:ln>
+        </p:spPr>
+      </p:sp>
+      <p:sp>
+        <p:nvSpPr>
+          <p:cNvPr id="9" name="Text 7"/>
+          <p:cNvSpPr/>
+          <p:nvPr/>
+        </p:nvSpPr>
+        <p:spPr>
+          <a:xfrm>
+            <a:off x="692051" y="2018556"/>
             <a:ext cx="7973389" cy="230981"/>
           </a:xfrm>
           <a:prstGeom prst="rect">
@@ -2611,7 +3150,7 @@
               <a:buNone/>
             </a:pPr>
             <a:r>
-              <a:rPr lang="en-US" sz="1300" b="1" i="1" dirty="0">
+              <a:rPr lang="en-US" sz="1300" dirty="0">
                 <a:solidFill>
                   <a:srgbClr val="1C2833"/>
                 </a:solidFill>
@@ -2619,7 +3158,7 @@
                 <a:ea typeface="Georgia" pitchFamily="34" charset="-122"/>
                 <a:cs typeface="Georgia" pitchFamily="34" charset="-120"/>
               </a:rPr>
-              <a:t>The Eight Limbs of Yoga</a:t>
+              <a:t>"The Bhagavad-gītā addresses all eight limbs of rāja-yoga." — </a:t>
             </a:r>
             <a:pPr algn="l" indent="0" marL="0">
               <a:lnSpc>
@@ -2634,7 +3173,7 @@
               <a:buNone/>
             </a:pPr>
             <a:r>
-              <a:rPr lang="en-US" sz="1300" dirty="0">
+              <a:rPr lang="en-US" sz="1300" i="1" dirty="0">
                 <a:solidFill>
                   <a:srgbClr val="1C2833"/>
                 </a:solidFill>
@@ -2642,7 +3181,7 @@
                 <a:ea typeface="Georgia" pitchFamily="34" charset="-122"/>
                 <a:cs typeface="Georgia" pitchFamily="34" charset="-120"/>
               </a:rPr>
-              <a:t> (Patañjali's </a:t>
+              <a:t>Veda, Secrets from the East</a:t>
             </a:r>
             <a:pPr algn="l" indent="0" marL="0">
               <a:lnSpc>
@@ -2657,7 +3196,7 @@
               <a:buNone/>
             </a:pPr>
             <a:r>
-              <a:rPr lang="en-US" sz="1300" i="1" dirty="0">
+              <a:rPr lang="en-US" sz="1300" dirty="0">
                 <a:solidFill>
                   <a:srgbClr val="1C2833"/>
                 </a:solidFill>
@@ -2665,588 +3204,7 @@
                 <a:ea typeface="Georgia" pitchFamily="34" charset="-122"/>
                 <a:cs typeface="Georgia" pitchFamily="34" charset="-120"/>
               </a:rPr>
-              <a:t>aṣṭāṅga</a:t>
-            </a:r>
-            <a:pPr algn="l" indent="0" marL="0">
-              <a:lnSpc>
-                <a:spcPts val="1820"/>
-              </a:lnSpc>
-              <a:spcBef>
-                <a:spcPts val="300"/>
-              </a:spcBef>
-              <a:spcAft>
-                <a:spcPts val="300"/>
-              </a:spcAft>
-              <a:buNone/>
-            </a:pPr>
-            <a:r>
-              <a:rPr lang="en-US" sz="1300" dirty="0">
-                <a:solidFill>
-                  <a:srgbClr val="1C2833"/>
-                </a:solidFill>
-                <a:latin typeface="Georgia" pitchFamily="34" charset="0"/>
-                <a:ea typeface="Georgia" pitchFamily="34" charset="-122"/>
-                <a:cs typeface="Georgia" pitchFamily="34" charset="-120"/>
-              </a:rPr>
-              <a:t>)</a:t>
-            </a:r>
-            <a:endParaRPr lang="en-US" sz="1300" dirty="0"/>
-          </a:p>
-        </p:txBody>
-      </p:sp>
-      <p:sp>
-        <p:nvSpPr>
-          <p:cNvPr id="7" name="Text 5"/>
-          <p:cNvSpPr/>
-          <p:nvPr/>
-        </p:nvSpPr>
-        <p:spPr>
-          <a:xfrm>
-            <a:off x="692051" y="1343174"/>
-            <a:ext cx="7973389" cy="923925"/>
-          </a:xfrm>
-          <a:prstGeom prst="rect">
-            <a:avLst/>
-          </a:prstGeom>
-          <a:noFill/>
-          <a:ln/>
-        </p:spPr>
-        <p:txBody>
-          <a:bodyPr wrap="square" lIns="0" tIns="0" rIns="0" bIns="0" rtlCol="0" anchor="t"/>
-          <a:lstStyle/>
-          <a:p>
-            <a:pPr algn="l" indent="0" marL="0">
-              <a:lnSpc>
-                <a:spcPts val="1820"/>
-              </a:lnSpc>
-              <a:spcBef>
-                <a:spcPts val="300"/>
-              </a:spcBef>
-              <a:spcAft>
-                <a:spcPts val="300"/>
-              </a:spcAft>
-              <a:buNone/>
-            </a:pPr>
-            <a:r>
-              <a:rPr lang="en-US" sz="1300" dirty="0">
-                <a:solidFill>
-                  <a:srgbClr val="1C2833"/>
-                </a:solidFill>
-                <a:latin typeface="Georgia" pitchFamily="34" charset="0"/>
-                <a:ea typeface="Georgia" pitchFamily="34" charset="-122"/>
-                <a:cs typeface="Georgia" pitchFamily="34" charset="-120"/>
-              </a:rPr>
-              <a:t>| # | Sanskrit | Meaning | |---|----------|---------| | 1 | </a:t>
-            </a:r>
-            <a:pPr algn="l" indent="0" marL="0">
-              <a:lnSpc>
-                <a:spcPts val="1820"/>
-              </a:lnSpc>
-              <a:spcBef>
-                <a:spcPts val="300"/>
-              </a:spcBef>
-              <a:spcAft>
-                <a:spcPts val="300"/>
-              </a:spcAft>
-              <a:buNone/>
-            </a:pPr>
-            <a:r>
-              <a:rPr lang="en-US" sz="1300" i="1" dirty="0">
-                <a:solidFill>
-                  <a:srgbClr val="1C2833"/>
-                </a:solidFill>
-                <a:latin typeface="Georgia" pitchFamily="34" charset="0"/>
-                <a:ea typeface="Georgia" pitchFamily="34" charset="-122"/>
-                <a:cs typeface="Georgia" pitchFamily="34" charset="-120"/>
-              </a:rPr>
-              <a:t>yama</a:t>
-            </a:r>
-            <a:pPr algn="l" indent="0" marL="0">
-              <a:lnSpc>
-                <a:spcPts val="1820"/>
-              </a:lnSpc>
-              <a:spcBef>
-                <a:spcPts val="300"/>
-              </a:spcBef>
-              <a:spcAft>
-                <a:spcPts val="300"/>
-              </a:spcAft>
-              <a:buNone/>
-            </a:pPr>
-            <a:r>
-              <a:rPr lang="en-US" sz="1300" dirty="0">
-                <a:solidFill>
-                  <a:srgbClr val="1C2833"/>
-                </a:solidFill>
-                <a:latin typeface="Georgia" pitchFamily="34" charset="0"/>
-                <a:ea typeface="Georgia" pitchFamily="34" charset="-122"/>
-                <a:cs typeface="Georgia" pitchFamily="34" charset="-120"/>
-              </a:rPr>
-              <a:t> | restraints (don'ts) | | 2 | </a:t>
-            </a:r>
-            <a:pPr algn="l" indent="0" marL="0">
-              <a:lnSpc>
-                <a:spcPts val="1820"/>
-              </a:lnSpc>
-              <a:spcBef>
-                <a:spcPts val="300"/>
-              </a:spcBef>
-              <a:spcAft>
-                <a:spcPts val="300"/>
-              </a:spcAft>
-              <a:buNone/>
-            </a:pPr>
-            <a:r>
-              <a:rPr lang="en-US" sz="1300" i="1" dirty="0">
-                <a:solidFill>
-                  <a:srgbClr val="1C2833"/>
-                </a:solidFill>
-                <a:latin typeface="Georgia" pitchFamily="34" charset="0"/>
-                <a:ea typeface="Georgia" pitchFamily="34" charset="-122"/>
-                <a:cs typeface="Georgia" pitchFamily="34" charset="-120"/>
-              </a:rPr>
-              <a:t>niyama</a:t>
-            </a:r>
-            <a:pPr algn="l" indent="0" marL="0">
-              <a:lnSpc>
-                <a:spcPts val="1820"/>
-              </a:lnSpc>
-              <a:spcBef>
-                <a:spcPts val="300"/>
-              </a:spcBef>
-              <a:spcAft>
-                <a:spcPts val="300"/>
-              </a:spcAft>
-              <a:buNone/>
-            </a:pPr>
-            <a:r>
-              <a:rPr lang="en-US" sz="1300" dirty="0">
-                <a:solidFill>
-                  <a:srgbClr val="1C2833"/>
-                </a:solidFill>
-                <a:latin typeface="Georgia" pitchFamily="34" charset="0"/>
-                <a:ea typeface="Georgia" pitchFamily="34" charset="-122"/>
-                <a:cs typeface="Georgia" pitchFamily="34" charset="-120"/>
-              </a:rPr>
-              <a:t> | observances (dos) | | 3 | </a:t>
-            </a:r>
-            <a:pPr algn="l" indent="0" marL="0">
-              <a:lnSpc>
-                <a:spcPts val="1820"/>
-              </a:lnSpc>
-              <a:spcBef>
-                <a:spcPts val="300"/>
-              </a:spcBef>
-              <a:spcAft>
-                <a:spcPts val="300"/>
-              </a:spcAft>
-              <a:buNone/>
-            </a:pPr>
-            <a:r>
-              <a:rPr lang="en-US" sz="1300" i="1" dirty="0">
-                <a:solidFill>
-                  <a:srgbClr val="1C2833"/>
-                </a:solidFill>
-                <a:latin typeface="Georgia" pitchFamily="34" charset="0"/>
-                <a:ea typeface="Georgia" pitchFamily="34" charset="-122"/>
-                <a:cs typeface="Georgia" pitchFamily="34" charset="-120"/>
-              </a:rPr>
-              <a:t>āsana</a:t>
-            </a:r>
-            <a:pPr algn="l" indent="0" marL="0">
-              <a:lnSpc>
-                <a:spcPts val="1820"/>
-              </a:lnSpc>
-              <a:spcBef>
-                <a:spcPts val="300"/>
-              </a:spcBef>
-              <a:spcAft>
-                <a:spcPts val="300"/>
-              </a:spcAft>
-              <a:buNone/>
-            </a:pPr>
-            <a:r>
-              <a:rPr lang="en-US" sz="1300" dirty="0">
-                <a:solidFill>
-                  <a:srgbClr val="1C2833"/>
-                </a:solidFill>
-                <a:latin typeface="Georgia" pitchFamily="34" charset="0"/>
-                <a:ea typeface="Georgia" pitchFamily="34" charset="-122"/>
-                <a:cs typeface="Georgia" pitchFamily="34" charset="-120"/>
-              </a:rPr>
-              <a:t> | posture | | 4 | </a:t>
-            </a:r>
-            <a:pPr algn="l" indent="0" marL="0">
-              <a:lnSpc>
-                <a:spcPts val="1820"/>
-              </a:lnSpc>
-              <a:spcBef>
-                <a:spcPts val="300"/>
-              </a:spcBef>
-              <a:spcAft>
-                <a:spcPts val="300"/>
-              </a:spcAft>
-              <a:buNone/>
-            </a:pPr>
-            <a:r>
-              <a:rPr lang="en-US" sz="1300" i="1" dirty="0">
-                <a:solidFill>
-                  <a:srgbClr val="1C2833"/>
-                </a:solidFill>
-                <a:latin typeface="Georgia" pitchFamily="34" charset="0"/>
-                <a:ea typeface="Georgia" pitchFamily="34" charset="-122"/>
-                <a:cs typeface="Georgia" pitchFamily="34" charset="-120"/>
-              </a:rPr>
-              <a:t>prāṇāyāma</a:t>
-            </a:r>
-            <a:pPr algn="l" indent="0" marL="0">
-              <a:lnSpc>
-                <a:spcPts val="1820"/>
-              </a:lnSpc>
-              <a:spcBef>
-                <a:spcPts val="300"/>
-              </a:spcBef>
-              <a:spcAft>
-                <a:spcPts val="300"/>
-              </a:spcAft>
-              <a:buNone/>
-            </a:pPr>
-            <a:r>
-              <a:rPr lang="en-US" sz="1300" dirty="0">
-                <a:solidFill>
-                  <a:srgbClr val="1C2833"/>
-                </a:solidFill>
-                <a:latin typeface="Georgia" pitchFamily="34" charset="0"/>
-                <a:ea typeface="Georgia" pitchFamily="34" charset="-122"/>
-                <a:cs typeface="Georgia" pitchFamily="34" charset="-120"/>
-              </a:rPr>
-              <a:t> | breath regulation | | 5 | </a:t>
-            </a:r>
-            <a:pPr algn="l" indent="0" marL="0">
-              <a:lnSpc>
-                <a:spcPts val="1820"/>
-              </a:lnSpc>
-              <a:spcBef>
-                <a:spcPts val="300"/>
-              </a:spcBef>
-              <a:spcAft>
-                <a:spcPts val="300"/>
-              </a:spcAft>
-              <a:buNone/>
-            </a:pPr>
-            <a:r>
-              <a:rPr lang="en-US" sz="1300" i="1" dirty="0">
-                <a:solidFill>
-                  <a:srgbClr val="1C2833"/>
-                </a:solidFill>
-                <a:latin typeface="Georgia" pitchFamily="34" charset="0"/>
-                <a:ea typeface="Georgia" pitchFamily="34" charset="-122"/>
-                <a:cs typeface="Georgia" pitchFamily="34" charset="-120"/>
-              </a:rPr>
-              <a:t>pratyāhāra</a:t>
-            </a:r>
-            <a:pPr algn="l" indent="0" marL="0">
-              <a:lnSpc>
-                <a:spcPts val="1820"/>
-              </a:lnSpc>
-              <a:spcBef>
-                <a:spcPts val="300"/>
-              </a:spcBef>
-              <a:spcAft>
-                <a:spcPts val="300"/>
-              </a:spcAft>
-              <a:buNone/>
-            </a:pPr>
-            <a:r>
-              <a:rPr lang="en-US" sz="1300" dirty="0">
-                <a:solidFill>
-                  <a:srgbClr val="1C2833"/>
-                </a:solidFill>
-                <a:latin typeface="Georgia" pitchFamily="34" charset="0"/>
-                <a:ea typeface="Georgia" pitchFamily="34" charset="-122"/>
-                <a:cs typeface="Georgia" pitchFamily="34" charset="-120"/>
-              </a:rPr>
-              <a:t> | sense-withdrawal | | 6 | </a:t>
-            </a:r>
-            <a:pPr algn="l" indent="0" marL="0">
-              <a:lnSpc>
-                <a:spcPts val="1820"/>
-              </a:lnSpc>
-              <a:spcBef>
-                <a:spcPts val="300"/>
-              </a:spcBef>
-              <a:spcAft>
-                <a:spcPts val="300"/>
-              </a:spcAft>
-              <a:buNone/>
-            </a:pPr>
-            <a:r>
-              <a:rPr lang="en-US" sz="1300" i="1" dirty="0">
-                <a:solidFill>
-                  <a:srgbClr val="1C2833"/>
-                </a:solidFill>
-                <a:latin typeface="Georgia" pitchFamily="34" charset="0"/>
-                <a:ea typeface="Georgia" pitchFamily="34" charset="-122"/>
-                <a:cs typeface="Georgia" pitchFamily="34" charset="-120"/>
-              </a:rPr>
-              <a:t>dhāraṇā</a:t>
-            </a:r>
-            <a:pPr algn="l" indent="0" marL="0">
-              <a:lnSpc>
-                <a:spcPts val="1820"/>
-              </a:lnSpc>
-              <a:spcBef>
-                <a:spcPts val="300"/>
-              </a:spcBef>
-              <a:spcAft>
-                <a:spcPts val="300"/>
-              </a:spcAft>
-              <a:buNone/>
-            </a:pPr>
-            <a:r>
-              <a:rPr lang="en-US" sz="1300" dirty="0">
-                <a:solidFill>
-                  <a:srgbClr val="1C2833"/>
-                </a:solidFill>
-                <a:latin typeface="Georgia" pitchFamily="34" charset="0"/>
-                <a:ea typeface="Georgia" pitchFamily="34" charset="-122"/>
-                <a:cs typeface="Georgia" pitchFamily="34" charset="-120"/>
-              </a:rPr>
-              <a:t> | focused attention | | 7 | </a:t>
-            </a:r>
-            <a:pPr algn="l" indent="0" marL="0">
-              <a:lnSpc>
-                <a:spcPts val="1820"/>
-              </a:lnSpc>
-              <a:spcBef>
-                <a:spcPts val="300"/>
-              </a:spcBef>
-              <a:spcAft>
-                <a:spcPts val="300"/>
-              </a:spcAft>
-              <a:buNone/>
-            </a:pPr>
-            <a:r>
-              <a:rPr lang="en-US" sz="1300" i="1" dirty="0">
-                <a:solidFill>
-                  <a:srgbClr val="1C2833"/>
-                </a:solidFill>
-                <a:latin typeface="Georgia" pitchFamily="34" charset="0"/>
-                <a:ea typeface="Georgia" pitchFamily="34" charset="-122"/>
-                <a:cs typeface="Georgia" pitchFamily="34" charset="-120"/>
-              </a:rPr>
-              <a:t>dhyāna</a:t>
-            </a:r>
-            <a:pPr algn="l" indent="0" marL="0">
-              <a:lnSpc>
-                <a:spcPts val="1820"/>
-              </a:lnSpc>
-              <a:spcBef>
-                <a:spcPts val="300"/>
-              </a:spcBef>
-              <a:spcAft>
-                <a:spcPts val="300"/>
-              </a:spcAft>
-              <a:buNone/>
-            </a:pPr>
-            <a:r>
-              <a:rPr lang="en-US" sz="1300" dirty="0">
-                <a:solidFill>
-                  <a:srgbClr val="1C2833"/>
-                </a:solidFill>
-                <a:latin typeface="Georgia" pitchFamily="34" charset="0"/>
-                <a:ea typeface="Georgia" pitchFamily="34" charset="-122"/>
-                <a:cs typeface="Georgia" pitchFamily="34" charset="-120"/>
-              </a:rPr>
-              <a:t> | sustained meditation | | 8 | </a:t>
-            </a:r>
-            <a:pPr algn="l" indent="0" marL="0">
-              <a:lnSpc>
-                <a:spcPts val="1820"/>
-              </a:lnSpc>
-              <a:spcBef>
-                <a:spcPts val="300"/>
-              </a:spcBef>
-              <a:spcAft>
-                <a:spcPts val="300"/>
-              </a:spcAft>
-              <a:buNone/>
-            </a:pPr>
-            <a:r>
-              <a:rPr lang="en-US" sz="1300" i="1" dirty="0">
-                <a:solidFill>
-                  <a:srgbClr val="1C2833"/>
-                </a:solidFill>
-                <a:latin typeface="Georgia" pitchFamily="34" charset="0"/>
-                <a:ea typeface="Georgia" pitchFamily="34" charset="-122"/>
-                <a:cs typeface="Georgia" pitchFamily="34" charset="-120"/>
-              </a:rPr>
-              <a:t>samādhi</a:t>
-            </a:r>
-            <a:pPr algn="l" indent="0" marL="0">
-              <a:lnSpc>
-                <a:spcPts val="1820"/>
-              </a:lnSpc>
-              <a:spcBef>
-                <a:spcPts val="300"/>
-              </a:spcBef>
-              <a:spcAft>
-                <a:spcPts val="300"/>
-              </a:spcAft>
-              <a:buNone/>
-            </a:pPr>
-            <a:r>
-              <a:rPr lang="en-US" sz="1300" dirty="0">
-                <a:solidFill>
-                  <a:srgbClr val="1C2833"/>
-                </a:solidFill>
-                <a:latin typeface="Georgia" pitchFamily="34" charset="0"/>
-                <a:ea typeface="Georgia" pitchFamily="34" charset="-122"/>
-                <a:cs typeface="Georgia" pitchFamily="34" charset="-120"/>
-              </a:rPr>
-              <a:t> | absorption |</a:t>
-            </a:r>
-            <a:endParaRPr lang="en-US" sz="1300" dirty="0"/>
-          </a:p>
-        </p:txBody>
-      </p:sp>
-      <p:sp>
-        <p:nvSpPr>
-          <p:cNvPr id="8" name="Text 6"/>
-          <p:cNvSpPr/>
-          <p:nvPr/>
-        </p:nvSpPr>
-        <p:spPr>
-          <a:xfrm>
-            <a:off x="692051" y="2305199"/>
-            <a:ext cx="7973389" cy="230981"/>
-          </a:xfrm>
-          <a:prstGeom prst="rect">
-            <a:avLst/>
-          </a:prstGeom>
-          <a:noFill/>
-          <a:ln/>
-        </p:spPr>
-        <p:txBody>
-          <a:bodyPr wrap="square" lIns="0" tIns="0" rIns="0" bIns="0" rtlCol="0" anchor="t"/>
-          <a:lstStyle/>
-          <a:p>
-            <a:pPr algn="l" indent="0" marL="0">
-              <a:lnSpc>
-                <a:spcPts val="1820"/>
-              </a:lnSpc>
-              <a:spcBef>
-                <a:spcPts val="300"/>
-              </a:spcBef>
-              <a:spcAft>
-                <a:spcPts val="300"/>
-              </a:spcAft>
-              <a:buNone/>
-            </a:pPr>
-            <a:r>
-              <a:rPr lang="en-US" sz="1300" i="1" dirty="0">
-                <a:solidFill>
-                  <a:srgbClr val="1C2833"/>
-                </a:solidFill>
-                <a:latin typeface="Georgia" pitchFamily="34" charset="0"/>
-                <a:ea typeface="Georgia" pitchFamily="34" charset="-122"/>
-                <a:cs typeface="Georgia" pitchFamily="34" charset="-120"/>
-              </a:rPr>
-              <a:t>Limbs 1–2: conduct. 3–4: body. 5–8: mind.</a:t>
-            </a:r>
-            <a:endParaRPr lang="en-US" sz="1300" dirty="0"/>
-          </a:p>
-        </p:txBody>
-      </p:sp>
-      <p:sp>
-        <p:nvSpPr>
-          <p:cNvPr id="9" name="Text 7"/>
-          <p:cNvSpPr/>
-          <p:nvPr/>
-        </p:nvSpPr>
-        <p:spPr>
-          <a:xfrm>
-            <a:off x="692051" y="2574280"/>
-            <a:ext cx="7973389" cy="230981"/>
-          </a:xfrm>
-          <a:prstGeom prst="rect">
-            <a:avLst/>
-          </a:prstGeom>
-          <a:noFill/>
-          <a:ln/>
-        </p:spPr>
-        <p:txBody>
-          <a:bodyPr wrap="square" lIns="0" tIns="0" rIns="0" bIns="0" rtlCol="0" anchor="t"/>
-          <a:lstStyle/>
-          <a:p>
-            <a:pPr algn="l" indent="0" marL="0">
-              <a:lnSpc>
-                <a:spcPts val="1820"/>
-              </a:lnSpc>
-              <a:spcBef>
-                <a:spcPts val="300"/>
-              </a:spcBef>
-              <a:spcAft>
-                <a:spcPts val="300"/>
-              </a:spcAft>
-              <a:buNone/>
-            </a:pPr>
-            <a:r>
-              <a:rPr lang="en-US" sz="1300" dirty="0">
-                <a:solidFill>
-                  <a:srgbClr val="1C2833"/>
-                </a:solidFill>
-                <a:latin typeface="Georgia" pitchFamily="34" charset="0"/>
-                <a:ea typeface="Georgia" pitchFamily="34" charset="-122"/>
-                <a:cs typeface="Georgia" pitchFamily="34" charset="-120"/>
-              </a:rPr>
-              <a:t>Today's pose: </a:t>
-            </a:r>
-            <a:pPr algn="l" indent="0" marL="0">
-              <a:lnSpc>
-                <a:spcPts val="1820"/>
-              </a:lnSpc>
-              <a:spcBef>
-                <a:spcPts val="300"/>
-              </a:spcBef>
-              <a:spcAft>
-                <a:spcPts val="300"/>
-              </a:spcAft>
-              <a:buNone/>
-            </a:pPr>
-            <a:r>
-              <a:rPr lang="en-US" sz="1300" b="1" i="1" dirty="0">
-                <a:solidFill>
-                  <a:srgbClr val="1C2833"/>
-                </a:solidFill>
-                <a:latin typeface="Georgia" pitchFamily="34" charset="0"/>
-                <a:ea typeface="Georgia" pitchFamily="34" charset="-122"/>
-                <a:cs typeface="Georgia" pitchFamily="34" charset="-120"/>
-              </a:rPr>
-              <a:t>vṛkṣāsana</a:t>
-            </a:r>
-            <a:pPr algn="l" indent="0" marL="0">
-              <a:lnSpc>
-                <a:spcPts val="1820"/>
-              </a:lnSpc>
-              <a:spcBef>
-                <a:spcPts val="300"/>
-              </a:spcBef>
-              <a:spcAft>
-                <a:spcPts val="300"/>
-              </a:spcAft>
-              <a:buNone/>
-            </a:pPr>
-            <a:r>
-              <a:rPr lang="en-US" sz="1300" dirty="0">
-                <a:solidFill>
-                  <a:srgbClr val="1C2833"/>
-                </a:solidFill>
-                <a:latin typeface="Georgia" pitchFamily="34" charset="0"/>
-                <a:ea typeface="Georgia" pitchFamily="34" charset="-122"/>
-                <a:cs typeface="Georgia" pitchFamily="34" charset="-120"/>
-              </a:rPr>
-              <a:t> (tree). Stand on one leg. Balance. Wobble is allowed.</a:t>
+              <a:t> (Prabhupāda)</a:t>
             </a:r>
             <a:endParaRPr lang="en-US" sz="1300" dirty="0"/>
           </a:p>
@@ -3404,7 +3362,7 @@
                 <a:ea typeface="Georgia" pitchFamily="34" charset="-122"/>
                 <a:cs typeface="Georgia" pitchFamily="34" charset="-120"/>
               </a:rPr>
-              <a:t>Homework</a:t>
+              <a:t>Core (15 min) — The eight limbs (cont.)</a:t>
             </a:r>
             <a:endParaRPr lang="en-US" sz="1800" dirty="0"/>
           </a:p>
@@ -3418,8 +3376,8 @@
         </p:nvSpPr>
         <p:spPr>
           <a:xfrm>
-            <a:off x="406301" y="870942"/>
-            <a:ext cx="8498026" cy="426541"/>
+            <a:off x="634901" y="883593"/>
+            <a:ext cx="8102798" cy="281880"/>
           </a:xfrm>
           <a:prstGeom prst="rect">
             <a:avLst/>
@@ -3431,17 +3389,61 @@
           <a:bodyPr wrap="square" lIns="0" tIns="0" rIns="0" bIns="0" rtlCol="0" anchor="t"/>
           <a:lstStyle/>
           <a:p>
-            <a:pPr algn="l" indent="0" marL="0">
-              <a:lnSpc>
-                <a:spcPts val="1680"/>
-              </a:lnSpc>
-              <a:spcBef>
-                <a:spcPts val="300"/>
-              </a:spcBef>
-              <a:spcAft>
-                <a:spcPts val="300"/>
-              </a:spcAft>
-              <a:buNone/>
+            <a:pPr algn="l" marL="342900" indent="-342900">
+              <a:lnSpc>
+                <a:spcPts val="1620"/>
+              </a:lnSpc>
+              <a:spcAft>
+                <a:spcPts val="300"/>
+              </a:spcAft>
+              <a:buSzPct val="100000"/>
+              <a:buChar char="•"/>
+            </a:pPr>
+            <a:r>
+              <a:rPr lang="en-US" sz="1200" b="1" dirty="0">
+                <a:solidFill>
+                  <a:srgbClr val="1C2833"/>
+                </a:solidFill>
+                <a:latin typeface="Arial" pitchFamily="34" charset="0"/>
+                <a:ea typeface="Arial" pitchFamily="34" charset="-122"/>
+                <a:cs typeface="Arial" pitchFamily="34" charset="-120"/>
+              </a:rPr>
+              <a:t>Patterns to notice (write on board):</a:t>
+            </a:r>
+            <a:endParaRPr lang="en-US" sz="1200" dirty="0"/>
+          </a:p>
+        </p:txBody>
+      </p:sp>
+      <p:sp>
+        <p:nvSpPr>
+          <p:cNvPr id="5" name="Text 3"/>
+          <p:cNvSpPr/>
+          <p:nvPr/>
+        </p:nvSpPr>
+        <p:spPr>
+          <a:xfrm>
+            <a:off x="634901" y="1266974"/>
+            <a:ext cx="8102798" cy="769441"/>
+          </a:xfrm>
+          <a:prstGeom prst="rect">
+            <a:avLst/>
+          </a:prstGeom>
+          <a:noFill/>
+          <a:ln/>
+        </p:spPr>
+        <p:txBody>
+          <a:bodyPr wrap="square" lIns="0" tIns="0" rIns="0" bIns="0" rtlCol="0" anchor="t"/>
+          <a:lstStyle/>
+          <a:p>
+            <a:pPr algn="l" marL="342900" indent="-342900">
+              <a:lnSpc>
+                <a:spcPts val="1620"/>
+              </a:lnSpc>
+              <a:spcAft>
+                <a:spcPts val="300"/>
+              </a:spcAft>
+              <a:buSzPct val="100000"/>
+              <a:buChar char="•"/>
             </a:pPr>
             <a:r>
               <a:rPr lang="en-US" sz="1200" dirty="0">
@@ -3452,15 +3454,183 @@
                 <a:ea typeface="Arial" pitchFamily="34" charset="-122"/>
                 <a:cs typeface="Arial" pitchFamily="34" charset="-120"/>
               </a:rPr>
-              <a:t>– Memorise the 8 limbs in order. Bring to next class — pop quiz. – Practice tāḍāsana + vṛkṣāsana for 5 min before breakfast.</a:t>
+              <a:t>Limbs 1–2 are about </a:t>
+            </a:r>
+            <a:pPr algn="l" indent="0" marL="0">
+              <a:lnSpc>
+                <a:spcPts val="1620"/>
+              </a:lnSpc>
+              <a:spcAft>
+                <a:spcPts val="300"/>
+              </a:spcAft>
+              <a:buNone/>
+            </a:pPr>
+            <a:r>
+              <a:rPr lang="en-US" sz="1200" b="1" dirty="0">
+                <a:solidFill>
+                  <a:srgbClr val="1C2833"/>
+                </a:solidFill>
+                <a:latin typeface="Arial" pitchFamily="34" charset="0"/>
+                <a:ea typeface="Arial" pitchFamily="34" charset="-122"/>
+                <a:cs typeface="Arial" pitchFamily="34" charset="-120"/>
+              </a:rPr>
+              <a:t>conduct</a:t>
+            </a:r>
+            <a:pPr algn="l" indent="0" marL="0">
+              <a:lnSpc>
+                <a:spcPts val="1620"/>
+              </a:lnSpc>
+              <a:spcAft>
+                <a:spcPts val="300"/>
+              </a:spcAft>
+              <a:buNone/>
+            </a:pPr>
+            <a:r>
+              <a:rPr lang="en-US" sz="1200" dirty="0">
+                <a:solidFill>
+                  <a:srgbClr val="1C2833"/>
+                </a:solidFill>
+                <a:latin typeface="Arial" pitchFamily="34" charset="0"/>
+                <a:ea typeface="Arial" pitchFamily="34" charset="-122"/>
+                <a:cs typeface="Arial" pitchFamily="34" charset="-120"/>
+              </a:rPr>
+              <a:t> (how you live).</a:t>
             </a:r>
             <a:endParaRPr lang="en-US" sz="1200" dirty="0"/>
           </a:p>
-        </p:txBody>
-      </p:sp>
-      <p:sp>
-        <p:nvSpPr>
-          <p:cNvPr id="5" name="Text 3"/>
+          <a:p>
+            <a:pPr algn="l" marL="342900" indent="-342900">
+              <a:lnSpc>
+                <a:spcPts val="1620"/>
+              </a:lnSpc>
+              <a:spcAft>
+                <a:spcPts val="300"/>
+              </a:spcAft>
+              <a:buSzPct val="100000"/>
+              <a:buChar char="•"/>
+            </a:pPr>
+            <a:r>
+              <a:rPr lang="en-US" sz="1200" dirty="0">
+                <a:solidFill>
+                  <a:srgbClr val="1C2833"/>
+                </a:solidFill>
+                <a:latin typeface="Arial" pitchFamily="34" charset="0"/>
+                <a:ea typeface="Arial" pitchFamily="34" charset="-122"/>
+                <a:cs typeface="Arial" pitchFamily="34" charset="-120"/>
+              </a:rPr>
+              <a:t>Limbs 3–4 are about </a:t>
+            </a:r>
+            <a:pPr algn="l" indent="0" marL="0">
+              <a:lnSpc>
+                <a:spcPts val="1620"/>
+              </a:lnSpc>
+              <a:spcAft>
+                <a:spcPts val="300"/>
+              </a:spcAft>
+              <a:buNone/>
+            </a:pPr>
+            <a:r>
+              <a:rPr lang="en-US" sz="1200" b="1" dirty="0">
+                <a:solidFill>
+                  <a:srgbClr val="1C2833"/>
+                </a:solidFill>
+                <a:latin typeface="Arial" pitchFamily="34" charset="0"/>
+                <a:ea typeface="Arial" pitchFamily="34" charset="-122"/>
+                <a:cs typeface="Arial" pitchFamily="34" charset="-120"/>
+              </a:rPr>
+              <a:t>the body</a:t>
+            </a:r>
+            <a:pPr algn="l" indent="0" marL="0">
+              <a:lnSpc>
+                <a:spcPts val="1620"/>
+              </a:lnSpc>
+              <a:spcAft>
+                <a:spcPts val="300"/>
+              </a:spcAft>
+              <a:buNone/>
+            </a:pPr>
+            <a:r>
+              <a:rPr lang="en-US" sz="1200" dirty="0">
+                <a:solidFill>
+                  <a:srgbClr val="1C2833"/>
+                </a:solidFill>
+                <a:latin typeface="Arial" pitchFamily="34" charset="0"/>
+                <a:ea typeface="Arial" pitchFamily="34" charset="-122"/>
+                <a:cs typeface="Arial" pitchFamily="34" charset="-120"/>
+              </a:rPr>
+              <a:t> (what we practise this module).</a:t>
+            </a:r>
+            <a:endParaRPr lang="en-US" sz="1200" dirty="0"/>
+          </a:p>
+          <a:p>
+            <a:pPr algn="l" marL="342900" indent="-342900">
+              <a:lnSpc>
+                <a:spcPts val="1620"/>
+              </a:lnSpc>
+              <a:spcAft>
+                <a:spcPts val="300"/>
+              </a:spcAft>
+              <a:buSzPct val="100000"/>
+              <a:buChar char="•"/>
+            </a:pPr>
+            <a:r>
+              <a:rPr lang="en-US" sz="1200" dirty="0">
+                <a:solidFill>
+                  <a:srgbClr val="1C2833"/>
+                </a:solidFill>
+                <a:latin typeface="Arial" pitchFamily="34" charset="0"/>
+                <a:ea typeface="Arial" pitchFamily="34" charset="-122"/>
+                <a:cs typeface="Arial" pitchFamily="34" charset="-120"/>
+              </a:rPr>
+              <a:t>Limbs 5–8 are about </a:t>
+            </a:r>
+            <a:pPr algn="l" indent="0" marL="0">
+              <a:lnSpc>
+                <a:spcPts val="1620"/>
+              </a:lnSpc>
+              <a:spcAft>
+                <a:spcPts val="300"/>
+              </a:spcAft>
+              <a:buNone/>
+            </a:pPr>
+            <a:r>
+              <a:rPr lang="en-US" sz="1200" b="1" dirty="0">
+                <a:solidFill>
+                  <a:srgbClr val="1C2833"/>
+                </a:solidFill>
+                <a:latin typeface="Arial" pitchFamily="34" charset="0"/>
+                <a:ea typeface="Arial" pitchFamily="34" charset="-122"/>
+                <a:cs typeface="Arial" pitchFamily="34" charset="-120"/>
+              </a:rPr>
+              <a:t>the mind</a:t>
+            </a:r>
+            <a:pPr algn="l" indent="0" marL="0">
+              <a:lnSpc>
+                <a:spcPts val="1620"/>
+              </a:lnSpc>
+              <a:spcAft>
+                <a:spcPts val="300"/>
+              </a:spcAft>
+              <a:buNone/>
+            </a:pPr>
+            <a:r>
+              <a:rPr lang="en-US" sz="1200" dirty="0">
+                <a:solidFill>
+                  <a:srgbClr val="1C2833"/>
+                </a:solidFill>
+                <a:latin typeface="Arial" pitchFamily="34" charset="0"/>
+                <a:ea typeface="Arial" pitchFamily="34" charset="-122"/>
+                <a:cs typeface="Arial" pitchFamily="34" charset="-120"/>
+              </a:rPr>
+              <a:t>.</a:t>
+            </a:r>
+            <a:endParaRPr lang="en-US" sz="1200" dirty="0"/>
+          </a:p>
+        </p:txBody>
+      </p:sp>
+      <p:sp>
+        <p:nvSpPr>
+          <p:cNvPr id="6" name="Text 4"/>
           <p:cNvSpPr/>
           <p:nvPr/>
         </p:nvSpPr>
@@ -3610,7 +3780,7 @@
                 <a:ea typeface="Georgia" pitchFamily="34" charset="-122"/>
                 <a:cs typeface="Georgia" pitchFamily="34" charset="-120"/>
               </a:rPr>
-              <a:t>Differentiation</a:t>
+              <a:t>Core (15 min) — The eight limbs (cont.)</a:t>
             </a:r>
             <a:endParaRPr lang="en-US" sz="1800" dirty="0"/>
           </a:p>
@@ -3625,6 +3795,52 @@
         <p:spPr>
           <a:xfrm>
             <a:off x="634901" y="883593"/>
+            <a:ext cx="8102798" cy="281880"/>
+          </a:xfrm>
+          <a:prstGeom prst="rect">
+            <a:avLst/>
+          </a:prstGeom>
+          <a:noFill/>
+          <a:ln/>
+        </p:spPr>
+        <p:txBody>
+          <a:bodyPr wrap="square" lIns="0" tIns="0" rIns="0" bIns="0" rtlCol="0" anchor="t"/>
+          <a:lstStyle/>
+          <a:p>
+            <a:pPr algn="l" marL="342900" indent="-342900">
+              <a:lnSpc>
+                <a:spcPts val="1620"/>
+              </a:lnSpc>
+              <a:spcAft>
+                <a:spcPts val="300"/>
+              </a:spcAft>
+              <a:buSzPct val="100000"/>
+              <a:buChar char="•"/>
+            </a:pPr>
+            <a:r>
+              <a:rPr lang="en-US" sz="1200" i="1" dirty="0">
+                <a:solidFill>
+                  <a:srgbClr val="1C2833"/>
+                </a:solidFill>
+                <a:latin typeface="Arial" pitchFamily="34" charset="0"/>
+                <a:ea typeface="Arial" pitchFamily="34" charset="-122"/>
+                <a:cs typeface="Arial" pitchFamily="34" charset="-120"/>
+              </a:rPr>
+              <a:t>"Why does Patañjali put 'living ethically' BEFORE 'posture'? Why not start with the easy physical stuff?"</a:t>
+            </a:r>
+            <a:endParaRPr lang="en-US" sz="1200" dirty="0"/>
+          </a:p>
+        </p:txBody>
+      </p:sp>
+      <p:sp>
+        <p:nvSpPr>
+          <p:cNvPr id="5" name="Text 3"/>
+          <p:cNvSpPr/>
+          <p:nvPr/>
+        </p:nvSpPr>
+        <p:spPr>
+          <a:xfrm>
+            <a:off x="634901" y="1266974"/>
             <a:ext cx="8102798" cy="731341"/>
           </a:xfrm>
           <a:prstGeom prst="rect">
@@ -3648,26 +3864,6 @@
               <a:buChar char="•"/>
             </a:pPr>
             <a:r>
-              <a:rPr lang="en-US" sz="1200" b="1" dirty="0">
-                <a:solidFill>
-                  <a:srgbClr val="1C2833"/>
-                </a:solidFill>
-                <a:latin typeface="Arial" pitchFamily="34" charset="0"/>
-                <a:ea typeface="Arial" pitchFamily="34" charset="-122"/>
-                <a:cs typeface="Arial" pitchFamily="34" charset="-120"/>
-              </a:rPr>
-              <a:t>Tier up:</a:t>
-            </a:r>
-            <a:pPr algn="l" indent="0" marL="0">
-              <a:lnSpc>
-                <a:spcPts val="1620"/>
-              </a:lnSpc>
-              <a:spcAft>
-                <a:spcPts val="300"/>
-              </a:spcAft>
-              <a:buNone/>
-            </a:pPr>
-            <a:r>
               <a:rPr lang="en-US" sz="1200" dirty="0">
                 <a:solidFill>
                   <a:srgbClr val="1C2833"/>
@@ -3676,87 +3872,7 @@
                 <a:ea typeface="Arial" pitchFamily="34" charset="-122"/>
                 <a:cs typeface="Arial" pitchFamily="34" charset="-120"/>
               </a:rPr>
-              <a:t> Add the meanings of </a:t>
-            </a:r>
-            <a:pPr algn="l" indent="0" marL="0">
-              <a:lnSpc>
-                <a:spcPts val="1620"/>
-              </a:lnSpc>
-              <a:spcAft>
-                <a:spcPts val="300"/>
-              </a:spcAft>
-              <a:buNone/>
-            </a:pPr>
-            <a:r>
-              <a:rPr lang="en-US" sz="1200" i="1" dirty="0">
-                <a:solidFill>
-                  <a:srgbClr val="1C2833"/>
-                </a:solidFill>
-                <a:latin typeface="Arial" pitchFamily="34" charset="0"/>
-                <a:ea typeface="Arial" pitchFamily="34" charset="-122"/>
-                <a:cs typeface="Arial" pitchFamily="34" charset="-120"/>
-              </a:rPr>
-              <a:t>yama</a:t>
-            </a:r>
-            <a:pPr algn="l" indent="0" marL="0">
-              <a:lnSpc>
-                <a:spcPts val="1620"/>
-              </a:lnSpc>
-              <a:spcAft>
-                <a:spcPts val="300"/>
-              </a:spcAft>
-              <a:buNone/>
-            </a:pPr>
-            <a:r>
-              <a:rPr lang="en-US" sz="1200" dirty="0">
-                <a:solidFill>
-                  <a:srgbClr val="1C2833"/>
-                </a:solidFill>
-                <a:latin typeface="Arial" pitchFamily="34" charset="0"/>
-                <a:ea typeface="Arial" pitchFamily="34" charset="-122"/>
-                <a:cs typeface="Arial" pitchFamily="34" charset="-120"/>
-              </a:rPr>
-              <a:t> and </a:t>
-            </a:r>
-            <a:pPr algn="l" indent="0" marL="0">
-              <a:lnSpc>
-                <a:spcPts val="1620"/>
-              </a:lnSpc>
-              <a:spcAft>
-                <a:spcPts val="300"/>
-              </a:spcAft>
-              <a:buNone/>
-            </a:pPr>
-            <a:r>
-              <a:rPr lang="en-US" sz="1200" i="1" dirty="0">
-                <a:solidFill>
-                  <a:srgbClr val="1C2833"/>
-                </a:solidFill>
-                <a:latin typeface="Arial" pitchFamily="34" charset="0"/>
-                <a:ea typeface="Arial" pitchFamily="34" charset="-122"/>
-                <a:cs typeface="Arial" pitchFamily="34" charset="-120"/>
-              </a:rPr>
-              <a:t>niyama</a:t>
-            </a:r>
-            <a:pPr algn="l" indent="0" marL="0">
-              <a:lnSpc>
-                <a:spcPts val="1620"/>
-              </a:lnSpc>
-              <a:spcAft>
-                <a:spcPts val="300"/>
-              </a:spcAft>
-              <a:buNone/>
-            </a:pPr>
-            <a:r>
-              <a:rPr lang="en-US" sz="1200" dirty="0">
-                <a:solidFill>
-                  <a:srgbClr val="1C2833"/>
-                </a:solidFill>
-                <a:latin typeface="Arial" pitchFamily="34" charset="0"/>
-                <a:ea typeface="Arial" pitchFamily="34" charset="-122"/>
-                <a:cs typeface="Arial" pitchFamily="34" charset="-120"/>
-              </a:rPr>
-              <a:t> with at least 2 examples each (ahiṁsā, satya, śauca, santoṣa, etc.).</a:t>
+              <a:t>Take 2 student answers.</a:t>
             </a:r>
             <a:endParaRPr lang="en-US" sz="1200" dirty="0"/>
           </a:p>
@@ -3772,26 +3888,6 @@
               <a:buChar char="•"/>
             </a:pPr>
             <a:r>
-              <a:rPr lang="en-US" sz="1200" b="1" dirty="0">
-                <a:solidFill>
-                  <a:srgbClr val="1C2833"/>
-                </a:solidFill>
-                <a:latin typeface="Arial" pitchFamily="34" charset="0"/>
-                <a:ea typeface="Arial" pitchFamily="34" charset="-122"/>
-                <a:cs typeface="Arial" pitchFamily="34" charset="-120"/>
-              </a:rPr>
-              <a:t>Tier down:</a:t>
-            </a:r>
-            <a:pPr algn="l" indent="0" marL="0">
-              <a:lnSpc>
-                <a:spcPts val="1620"/>
-              </a:lnSpc>
-              <a:spcAft>
-                <a:spcPts val="300"/>
-              </a:spcAft>
-              <a:buNone/>
-            </a:pPr>
-            <a:r>
               <a:rPr lang="en-US" sz="1200" dirty="0">
                 <a:solidFill>
                   <a:srgbClr val="1C2833"/>
@@ -3800,7 +3896,7 @@
                 <a:ea typeface="Arial" pitchFamily="34" charset="-122"/>
                 <a:cs typeface="Arial" pitchFamily="34" charset="-120"/>
               </a:rPr>
-              <a:t> Memorise just the 4 physical/body limbs (3, 4, 5) — āsana, prāṇāyāma, pratyāhāra — and the 1 mental endpoint (8 — samādhi). Build up.</a:t>
+              <a:t>Reinforce: the tradition says a turbulent inner life makes meditation impossible, so you have to settle the outer life first. (At Middle band that's a sufficient gloss.)</a:t>
             </a:r>
             <a:endParaRPr lang="en-US" sz="1200" dirty="0"/>
           </a:p>
@@ -3808,7 +3904,7 @@
       </p:sp>
       <p:sp>
         <p:nvSpPr>
-          <p:cNvPr id="5" name="Text 3"/>
+          <p:cNvPr id="6" name="Text 4"/>
           <p:cNvSpPr/>
           <p:nvPr/>
         </p:nvSpPr>
@@ -3958,7 +4054,7 @@
                 <a:ea typeface="Georgia" pitchFamily="34" charset="-122"/>
                 <a:cs typeface="Georgia" pitchFamily="34" charset="-120"/>
               </a:rPr>
-              <a:t>Teacher notes</a:t>
+              <a:t>Practice (15 min) — Tāḍāsana + introduction to vṛkṣāsana</a:t>
             </a:r>
             <a:endParaRPr lang="en-US" sz="1800" dirty="0"/>
           </a:p>
@@ -3972,8 +4068,8 @@
         </p:nvSpPr>
         <p:spPr>
           <a:xfrm>
-            <a:off x="406301" y="870942"/>
-            <a:ext cx="8498026" cy="853083"/>
+            <a:off x="634901" y="883593"/>
+            <a:ext cx="8102798" cy="2232124"/>
           </a:xfrm>
           <a:prstGeom prst="rect">
             <a:avLst/>
@@ -3985,17 +4081,15 @@
           <a:bodyPr wrap="square" lIns="0" tIns="0" rIns="0" bIns="0" rtlCol="0" anchor="t"/>
           <a:lstStyle/>
           <a:p>
-            <a:pPr algn="l" indent="0" marL="0">
-              <a:lnSpc>
-                <a:spcPts val="1680"/>
-              </a:lnSpc>
-              <a:spcBef>
-                <a:spcPts val="300"/>
-              </a:spcBef>
-              <a:spcAft>
-                <a:spcPts val="300"/>
-              </a:spcAft>
-              <a:buNone/>
+            <a:pPr algn="l" marL="342900" indent="-342900">
+              <a:lnSpc>
+                <a:spcPts val="1620"/>
+              </a:lnSpc>
+              <a:spcAft>
+                <a:spcPts val="300"/>
+              </a:spcAft>
+              <a:buSzPct val="100000"/>
+              <a:buChar char="•"/>
             </a:pPr>
             <a:r>
               <a:rPr lang="en-US" sz="1200" dirty="0">
@@ -4006,7 +4100,219 @@
                 <a:ea typeface="Arial" pitchFamily="34" charset="-122"/>
                 <a:cs typeface="Arial" pitchFamily="34" charset="-120"/>
               </a:rPr>
-              <a:t>– The Sanskrit names will be slippery for some students. Daily chorus repetition helps; create a hand gesture per limb for the kinesthetic learners. – Watch knee placement during vṛkṣāsana — the foot must NOT press into the side of the knee (medial cruciate strain risk). Foot above OR below the knee, never on it. – If a student falls during balance, normalise it: "wobbling is what balance learning looks like."</a:t>
+              <a:t>Tāḍāsana, 3 holds of 30 sec each.</a:t>
+            </a:r>
+            <a:endParaRPr lang="en-US" sz="1200" dirty="0"/>
+          </a:p>
+          <a:p>
+            <a:pPr algn="l" marL="342900" indent="-342900">
+              <a:lnSpc>
+                <a:spcPts val="1620"/>
+              </a:lnSpc>
+              <a:spcAft>
+                <a:spcPts val="300"/>
+              </a:spcAft>
+              <a:buSzPct val="100000"/>
+              <a:buChar char="•"/>
+            </a:pPr>
+            <a:r>
+              <a:rPr lang="en-US" sz="1200" dirty="0">
+                <a:solidFill>
+                  <a:srgbClr val="1C2833"/>
+                </a:solidFill>
+                <a:latin typeface="Arial" pitchFamily="34" charset="0"/>
+                <a:ea typeface="Arial" pitchFamily="34" charset="-122"/>
+                <a:cs typeface="Arial" pitchFamily="34" charset="-120"/>
+              </a:rPr>
+              <a:t>Now: </a:t>
+            </a:r>
+            <a:pPr algn="l" indent="0" marL="0">
+              <a:lnSpc>
+                <a:spcPts val="1620"/>
+              </a:lnSpc>
+              <a:spcAft>
+                <a:spcPts val="300"/>
+              </a:spcAft>
+              <a:buNone/>
+            </a:pPr>
+            <a:r>
+              <a:rPr lang="en-US" sz="1200" b="1" dirty="0">
+                <a:solidFill>
+                  <a:srgbClr val="1C2833"/>
+                </a:solidFill>
+                <a:latin typeface="Arial" pitchFamily="34" charset="0"/>
+                <a:ea typeface="Arial" pitchFamily="34" charset="-122"/>
+                <a:cs typeface="Arial" pitchFamily="34" charset="-120"/>
+              </a:rPr>
+              <a:t>vṛkṣāsana (tree posture).</a:t>
+            </a:r>
+            <a:endParaRPr lang="en-US" sz="1200" dirty="0"/>
+          </a:p>
+          <a:p>
+            <a:pPr algn="l" marL="342900" indent="-342900">
+              <a:lnSpc>
+                <a:spcPts val="1620"/>
+              </a:lnSpc>
+              <a:spcAft>
+                <a:spcPts val="300"/>
+              </a:spcAft>
+              <a:buSzPct val="100000"/>
+              <a:buChar char="•"/>
+            </a:pPr>
+            <a:r>
+              <a:rPr lang="en-US" sz="1200" dirty="0">
+                <a:solidFill>
+                  <a:srgbClr val="1C2833"/>
+                </a:solidFill>
+                <a:latin typeface="Arial" pitchFamily="34" charset="0"/>
+                <a:ea typeface="Arial" pitchFamily="34" charset="-122"/>
+                <a:cs typeface="Arial" pitchFamily="34" charset="-120"/>
+              </a:rPr>
+              <a:t>Stand in tāḍāsana.</a:t>
+            </a:r>
+            <a:endParaRPr lang="en-US" sz="1200" dirty="0"/>
+          </a:p>
+          <a:p>
+            <a:pPr algn="l" marL="342900" indent="-342900">
+              <a:lnSpc>
+                <a:spcPts val="1620"/>
+              </a:lnSpc>
+              <a:spcAft>
+                <a:spcPts val="300"/>
+              </a:spcAft>
+              <a:buSzPct val="100000"/>
+              <a:buChar char="•"/>
+            </a:pPr>
+            <a:r>
+              <a:rPr lang="en-US" sz="1200" dirty="0">
+                <a:solidFill>
+                  <a:srgbClr val="1C2833"/>
+                </a:solidFill>
+                <a:latin typeface="Arial" pitchFamily="34" charset="0"/>
+                <a:ea typeface="Arial" pitchFamily="34" charset="-122"/>
+                <a:cs typeface="Arial" pitchFamily="34" charset="-120"/>
+              </a:rPr>
+              <a:t>Shift weight onto the left foot.</a:t>
+            </a:r>
+            <a:endParaRPr lang="en-US" sz="1200" dirty="0"/>
+          </a:p>
+          <a:p>
+            <a:pPr algn="l" marL="342900" indent="-342900">
+              <a:lnSpc>
+                <a:spcPts val="1620"/>
+              </a:lnSpc>
+              <a:spcAft>
+                <a:spcPts val="300"/>
+              </a:spcAft>
+              <a:buSzPct val="100000"/>
+              <a:buChar char="•"/>
+            </a:pPr>
+            <a:r>
+              <a:rPr lang="en-US" sz="1200" dirty="0">
+                <a:solidFill>
+                  <a:srgbClr val="1C2833"/>
+                </a:solidFill>
+                <a:latin typeface="Arial" pitchFamily="34" charset="0"/>
+                <a:ea typeface="Arial" pitchFamily="34" charset="-122"/>
+                <a:cs typeface="Arial" pitchFamily="34" charset="-120"/>
+              </a:rPr>
+              <a:t>Place the right foot's sole against the inside of the left calf (NOT the side of the knee).</a:t>
+            </a:r>
+            <a:endParaRPr lang="en-US" sz="1200" dirty="0"/>
+          </a:p>
+          <a:p>
+            <a:pPr algn="l" marL="342900" indent="-342900">
+              <a:lnSpc>
+                <a:spcPts val="1620"/>
+              </a:lnSpc>
+              <a:spcAft>
+                <a:spcPts val="300"/>
+              </a:spcAft>
+              <a:buSzPct val="100000"/>
+              <a:buChar char="•"/>
+            </a:pPr>
+            <a:r>
+              <a:rPr lang="en-US" sz="1200" dirty="0">
+                <a:solidFill>
+                  <a:srgbClr val="1C2833"/>
+                </a:solidFill>
+                <a:latin typeface="Arial" pitchFamily="34" charset="0"/>
+                <a:ea typeface="Arial" pitchFamily="34" charset="-122"/>
+                <a:cs typeface="Arial" pitchFamily="34" charset="-120"/>
+              </a:rPr>
+              <a:t>Hands at heart centre, or raised above the head.</a:t>
+            </a:r>
+            <a:endParaRPr lang="en-US" sz="1200" dirty="0"/>
+          </a:p>
+          <a:p>
+            <a:pPr algn="l" marL="342900" indent="-342900">
+              <a:lnSpc>
+                <a:spcPts val="1620"/>
+              </a:lnSpc>
+              <a:spcAft>
+                <a:spcPts val="300"/>
+              </a:spcAft>
+              <a:buSzPct val="100000"/>
+              <a:buChar char="•"/>
+            </a:pPr>
+            <a:r>
+              <a:rPr lang="en-US" sz="1200" dirty="0">
+                <a:solidFill>
+                  <a:srgbClr val="1C2833"/>
+                </a:solidFill>
+                <a:latin typeface="Arial" pitchFamily="34" charset="0"/>
+                <a:ea typeface="Arial" pitchFamily="34" charset="-122"/>
+                <a:cs typeface="Arial" pitchFamily="34" charset="-120"/>
+              </a:rPr>
+              <a:t>Gaze fixed on one spot on the wall ahead.</a:t>
+            </a:r>
+            <a:endParaRPr lang="en-US" sz="1200" dirty="0"/>
+          </a:p>
+          <a:p>
+            <a:pPr algn="l" marL="342900" indent="-342900">
+              <a:lnSpc>
+                <a:spcPts val="1620"/>
+              </a:lnSpc>
+              <a:spcAft>
+                <a:spcPts val="300"/>
+              </a:spcAft>
+              <a:buSzPct val="100000"/>
+              <a:buChar char="•"/>
+            </a:pPr>
+            <a:r>
+              <a:rPr lang="en-US" sz="1200" dirty="0">
+                <a:solidFill>
+                  <a:srgbClr val="1C2833"/>
+                </a:solidFill>
+                <a:latin typeface="Arial" pitchFamily="34" charset="0"/>
+                <a:ea typeface="Arial" pitchFamily="34" charset="-122"/>
+                <a:cs typeface="Arial" pitchFamily="34" charset="-120"/>
+              </a:rPr>
+              <a:t>Hold for 20 seconds. Switch sides.</a:t>
+            </a:r>
+            <a:endParaRPr lang="en-US" sz="1200" dirty="0"/>
+          </a:p>
+          <a:p>
+            <a:pPr algn="l" marL="342900" indent="-342900">
+              <a:lnSpc>
+                <a:spcPts val="1620"/>
+              </a:lnSpc>
+              <a:spcAft>
+                <a:spcPts val="300"/>
+              </a:spcAft>
+              <a:buSzPct val="100000"/>
+              <a:buChar char="•"/>
+            </a:pPr>
+            <a:r>
+              <a:rPr lang="en-US" sz="1200" dirty="0">
+                <a:solidFill>
+                  <a:srgbClr val="1C2833"/>
+                </a:solidFill>
+                <a:latin typeface="Arial" pitchFamily="34" charset="0"/>
+                <a:ea typeface="Arial" pitchFamily="34" charset="-122"/>
+                <a:cs typeface="Arial" pitchFamily="34" charset="-120"/>
+              </a:rPr>
+              <a:t>Wobbling is normal. Falling is information, not failure.</a:t>
             </a:r>
             <a:endParaRPr lang="en-US" sz="1200" dirty="0"/>
           </a:p>
@@ -4164,7 +4470,7 @@
                 <a:ea typeface="Georgia" pitchFamily="34" charset="-122"/>
                 <a:cs typeface="Georgia" pitchFamily="34" charset="-120"/>
               </a:rPr>
-              <a:t>Citation(s) used in this lesson</a:t>
+              <a:t>Exit ticket (8 min)</a:t>
             </a:r>
             <a:endParaRPr lang="en-US" sz="1800" dirty="0"/>
           </a:p>
@@ -4179,7 +4485,7 @@
         <p:spPr>
           <a:xfrm>
             <a:off x="634901" y="883593"/>
-            <a:ext cx="8102798" cy="506611"/>
+            <a:ext cx="8102798" cy="544711"/>
           </a:xfrm>
           <a:prstGeom prst="rect">
             <a:avLst/>
@@ -4210,16 +4516,20 @@
                 <a:ea typeface="Arial" pitchFamily="34" charset="-122"/>
                 <a:cs typeface="Arial" pitchFamily="34" charset="-120"/>
               </a:rPr>
-              <a:t>vidya-karana RAG cache </a:t>
-            </a:r>
-            <a:pPr algn="l" indent="0" marL="0">
-              <a:lnSpc>
-                <a:spcPts val="1620"/>
-              </a:lnSpc>
-              <a:spcAft>
-                <a:spcPts val="300"/>
-              </a:spcAft>
-              <a:buNone/>
+              <a:t>Worksheet: students match each of the 8 limbs to a description.</a:t>
+            </a:r>
+            <a:endParaRPr lang="en-US" sz="1200" dirty="0"/>
+          </a:p>
+          <a:p>
+            <a:pPr algn="l" marL="342900" indent="-342900">
+              <a:lnSpc>
+                <a:spcPts val="1620"/>
+              </a:lnSpc>
+              <a:spcAft>
+                <a:spcPts val="300"/>
+              </a:spcAft>
+              <a:buSzPct val="100000"/>
+              <a:buChar char="•"/>
             </a:pPr>
             <a:r>
               <a:rPr lang="en-US" sz="1200" dirty="0">
@@ -4230,7 +4540,7 @@
                 <a:ea typeface="Arial" pitchFamily="34" charset="-122"/>
                 <a:cs typeface="Arial" pitchFamily="34" charset="-120"/>
               </a:rPr>
-              <a:t>day-02-eightlimbs.json</a:t>
+              <a:t>See </a:t>
             </a:r>
             <a:pPr algn="l" indent="0" marL="0">
               <a:lnSpc>
@@ -4250,7 +4560,255 @@
                 <a:ea typeface="Arial" pitchFamily="34" charset="-122"/>
                 <a:cs typeface="Arial" pitchFamily="34" charset="-120"/>
               </a:rPr>
-              <a:t> — chunks from SB 3 purport, </a:t>
+              <a:t>quizzes/formative.md</a:t>
+            </a:r>
+            <a:pPr algn="l" indent="0" marL="0">
+              <a:lnSpc>
+                <a:spcPts val="1620"/>
+              </a:lnSpc>
+              <a:spcAft>
+                <a:spcPts val="300"/>
+              </a:spcAft>
+              <a:buNone/>
+            </a:pPr>
+            <a:r>
+              <a:rPr lang="en-US" sz="1200" dirty="0">
+                <a:solidFill>
+                  <a:srgbClr val="1C2833"/>
+                </a:solidFill>
+                <a:latin typeface="Arial" pitchFamily="34" charset="0"/>
+                <a:ea typeface="Arial" pitchFamily="34" charset="-122"/>
+                <a:cs typeface="Arial" pitchFamily="34" charset="-120"/>
+              </a:rPr>
+              <a:t> Part A.</a:t>
+            </a:r>
+            <a:endParaRPr lang="en-US" sz="1200" dirty="0"/>
+          </a:p>
+        </p:txBody>
+      </p:sp>
+      <p:sp>
+        <p:nvSpPr>
+          <p:cNvPr id="5" name="Text 3"/>
+          <p:cNvSpPr/>
+          <p:nvPr/>
+        </p:nvSpPr>
+        <p:spPr>
+          <a:xfrm>
+            <a:off x="406301" y="4434929"/>
+            <a:ext cx="8498026" cy="213271"/>
+          </a:xfrm>
+          <a:prstGeom prst="rect">
+            <a:avLst/>
+          </a:prstGeom>
+          <a:noFill/>
+          <a:ln/>
+        </p:spPr>
+        <p:txBody>
+          <a:bodyPr wrap="square" lIns="0" tIns="0" rIns="0" bIns="0" rtlCol="0" anchor="t"/>
+          <a:lstStyle/>
+          <a:p>
+            <a:pPr algn="l" indent="0" marL="0">
+              <a:lnSpc>
+                <a:spcPts val="1680"/>
+              </a:lnSpc>
+              <a:spcBef>
+                <a:spcPts val="300"/>
+              </a:spcBef>
+              <a:spcAft>
+                <a:spcPts val="300"/>
+              </a:spcAft>
+              <a:buNone/>
+            </a:pPr>
+            <a:r>
+              <a:rPr lang="en-US" sz="1200" dirty="0">
+                <a:solidFill>
+                  <a:srgbClr val="1C2833"/>
+                </a:solidFill>
+                <a:latin typeface="Arial" pitchFamily="34" charset="0"/>
+                <a:ea typeface="Arial" pitchFamily="34" charset="-122"/>
+                <a:cs typeface="Arial" pitchFamily="34" charset="-120"/>
+              </a:rPr>
+              <a:t>Middle ·  · IKS Curriculum</a:t>
+            </a:r>
+            <a:endParaRPr lang="en-US" sz="1200" dirty="0"/>
+          </a:p>
+        </p:txBody>
+      </p:sp>
+    </p:spTree>
+  </p:cSld>
+  <p:clrMapOvr>
+    <a:masterClrMapping/>
+  </p:clrMapOvr>
+</p:sld>
+</file>
+
+<file path=ppt/slides/slide15.xml><?xml version="1.0" encoding="utf-8"?>
+<p:sld xmlns:a="http://schemas.openxmlformats.org/drawingml/2006/main" xmlns:r="http://schemas.openxmlformats.org/officeDocument/2006/relationships" xmlns:p="http://schemas.openxmlformats.org/presentationml/2006/main">
+  <p:cSld name="Slide 15">
+    <p:bg>
+      <p:bgPr>
+        <a:solidFill>
+          <a:srgbClr val="FFFFFF"/>
+        </a:solidFill>
+      </p:bgPr>
+    </p:bg>
+    <p:spTree>
+      <p:nvGrpSpPr>
+        <p:cNvPr id="1" name=""/>
+        <p:cNvGrpSpPr/>
+        <p:nvPr/>
+      </p:nvGrpSpPr>
+      <p:grpSpPr>
+        <a:xfrm>
+          <a:off x="0" y="0"/>
+          <a:ext cx="0" cy="0"/>
+          <a:chOff x="0" y="0"/>
+          <a:chExt cx="0" cy="0"/>
+        </a:xfrm>
+      </p:grpSpPr>
+      <p:sp>
+        <p:nvSpPr>
+          <p:cNvPr id="2" name="Text 0"/>
+          <p:cNvSpPr/>
+          <p:nvPr/>
+        </p:nvSpPr>
+        <p:spPr>
+          <a:xfrm>
+            <a:off x="0" y="0"/>
+            <a:ext cx="9144000" cy="101501"/>
+          </a:xfrm>
+          <a:prstGeom prst="rect">
+            <a:avLst/>
+          </a:prstGeom>
+          <a:solidFill>
+            <a:srgbClr val="277884"/>
+          </a:solidFill>
+          <a:ln/>
+        </p:spPr>
+        <p:txBody>
+          <a:bodyPr wrap="square" rtlCol="0" anchor="ctr"/>
+          <a:lstStyle/>
+          <a:p>
+            <a:pPr indent="0" marL="0">
+              <a:buNone/>
+            </a:pPr>
+            <a:endParaRPr lang="en-US" dirty="0"/>
+          </a:p>
+        </p:txBody>
+      </p:sp>
+      <p:sp>
+        <p:nvSpPr>
+          <p:cNvPr id="3" name="Text 1"/>
+          <p:cNvSpPr/>
+          <p:nvPr/>
+        </p:nvSpPr>
+        <p:spPr>
+          <a:xfrm>
+            <a:off x="406301" y="457051"/>
+            <a:ext cx="8498026" cy="274290"/>
+          </a:xfrm>
+          <a:prstGeom prst="rect">
+            <a:avLst/>
+          </a:prstGeom>
+          <a:noFill/>
+          <a:ln/>
+        </p:spPr>
+        <p:txBody>
+          <a:bodyPr wrap="square" lIns="0" tIns="0" rIns="0" bIns="0" rtlCol="0" anchor="t"/>
+          <a:lstStyle/>
+          <a:p>
+            <a:pPr algn="l" indent="0" marL="0">
+              <a:lnSpc>
+                <a:spcPts val="2160"/>
+              </a:lnSpc>
+              <a:spcBef>
+                <a:spcPts val="600"/>
+              </a:spcBef>
+              <a:spcAft>
+                <a:spcPts val="800"/>
+              </a:spcAft>
+              <a:buNone/>
+            </a:pPr>
+            <a:r>
+              <a:rPr lang="en-US" sz="1800" b="1" dirty="0">
+                <a:solidFill>
+                  <a:srgbClr val="FE4447"/>
+                </a:solidFill>
+                <a:latin typeface="Georgia" pitchFamily="34" charset="0"/>
+                <a:ea typeface="Georgia" pitchFamily="34" charset="-122"/>
+                <a:cs typeface="Georgia" pitchFamily="34" charset="-120"/>
+              </a:rPr>
+              <a:t>Wrap-up (5 min)</a:t>
+            </a:r>
+            <a:endParaRPr lang="en-US" sz="1800" dirty="0"/>
+          </a:p>
+        </p:txBody>
+      </p:sp>
+      <p:sp>
+        <p:nvSpPr>
+          <p:cNvPr id="4" name="Text 2"/>
+          <p:cNvSpPr/>
+          <p:nvPr/>
+        </p:nvSpPr>
+        <p:spPr>
+          <a:xfrm>
+            <a:off x="634901" y="883593"/>
+            <a:ext cx="8102798" cy="1257002"/>
+          </a:xfrm>
+          <a:prstGeom prst="rect">
+            <a:avLst/>
+          </a:prstGeom>
+          <a:noFill/>
+          <a:ln/>
+        </p:spPr>
+        <p:txBody>
+          <a:bodyPr wrap="square" lIns="0" tIns="0" rIns="0" bIns="0" rtlCol="0" anchor="t"/>
+          <a:lstStyle/>
+          <a:p>
+            <a:pPr algn="l" marL="342900" indent="-342900">
+              <a:lnSpc>
+                <a:spcPts val="1620"/>
+              </a:lnSpc>
+              <a:spcAft>
+                <a:spcPts val="300"/>
+              </a:spcAft>
+              <a:buSzPct val="100000"/>
+              <a:buChar char="•"/>
+            </a:pPr>
+            <a:r>
+              <a:rPr lang="en-US" sz="1200" dirty="0">
+                <a:solidFill>
+                  <a:srgbClr val="1C2833"/>
+                </a:solidFill>
+                <a:latin typeface="Arial" pitchFamily="34" charset="0"/>
+                <a:ea typeface="Arial" pitchFamily="34" charset="-122"/>
+                <a:cs typeface="Arial" pitchFamily="34" charset="-120"/>
+              </a:rPr>
+              <a:t>Three-question recap:</a:t>
+            </a:r>
+            <a:endParaRPr lang="en-US" sz="1200" dirty="0"/>
+          </a:p>
+          <a:p>
+            <a:pPr algn="l" marL="342900" indent="-342900">
+              <a:lnSpc>
+                <a:spcPts val="1620"/>
+              </a:lnSpc>
+              <a:spcAft>
+                <a:spcPts val="300"/>
+              </a:spcAft>
+              <a:buSzPct val="100000"/>
+              <a:buChar char="•"/>
+            </a:pPr>
+            <a:r>
+              <a:rPr lang="en-US" sz="1200" dirty="0">
+                <a:solidFill>
+                  <a:srgbClr val="1C2833"/>
+                </a:solidFill>
+                <a:latin typeface="Arial" pitchFamily="34" charset="0"/>
+                <a:ea typeface="Arial" pitchFamily="34" charset="-122"/>
+                <a:cs typeface="Arial" pitchFamily="34" charset="-120"/>
+              </a:rPr>
+              <a:t>Which limb is posture? </a:t>
             </a:r>
             <a:pPr algn="l" indent="0" marL="0">
               <a:lnSpc>
@@ -4270,16 +4828,20 @@
                 <a:ea typeface="Arial" pitchFamily="34" charset="-122"/>
                 <a:cs typeface="Arial" pitchFamily="34" charset="-120"/>
               </a:rPr>
-              <a:t>Veda, Secrets from the East</a:t>
-            </a:r>
-            <a:pPr algn="l" indent="0" marL="0">
-              <a:lnSpc>
-                <a:spcPts val="1620"/>
-              </a:lnSpc>
-              <a:spcAft>
-                <a:spcPts val="300"/>
-              </a:spcAft>
-              <a:buNone/>
+              <a:t>(3rd — āsana.)</a:t>
+            </a:r>
+            <a:endParaRPr lang="en-US" sz="1200" dirty="0"/>
+          </a:p>
+          <a:p>
+            <a:pPr algn="l" marL="342900" indent="-342900">
+              <a:lnSpc>
+                <a:spcPts val="1620"/>
+              </a:lnSpc>
+              <a:spcAft>
+                <a:spcPts val="300"/>
+              </a:spcAft>
+              <a:buSzPct val="100000"/>
+              <a:buChar char="•"/>
             </a:pPr>
             <a:r>
               <a:rPr lang="en-US" sz="1200" dirty="0">
@@ -4290,7 +4852,7 @@
                 <a:ea typeface="Arial" pitchFamily="34" charset="-122"/>
                 <a:cs typeface="Arial" pitchFamily="34" charset="-120"/>
               </a:rPr>
-              <a:t>, </a:t>
+              <a:t>Which limb is breath? </a:t>
             </a:r>
             <a:pPr algn="l" indent="0" marL="0">
               <a:lnSpc>
@@ -4310,16 +4872,20 @@
                 <a:ea typeface="Arial" pitchFamily="34" charset="-122"/>
                 <a:cs typeface="Arial" pitchFamily="34" charset="-120"/>
               </a:rPr>
-              <a:t>Journey of Self Discovery</a:t>
-            </a:r>
-            <a:pPr algn="l" indent="0" marL="0">
-              <a:lnSpc>
-                <a:spcPts val="1620"/>
-              </a:lnSpc>
-              <a:spcAft>
-                <a:spcPts val="300"/>
-              </a:spcAft>
-              <a:buNone/>
+              <a:t>(4th — prāṇāyāma.)</a:t>
+            </a:r>
+            <a:endParaRPr lang="en-US" sz="1200" dirty="0"/>
+          </a:p>
+          <a:p>
+            <a:pPr algn="l" marL="342900" indent="-342900">
+              <a:lnSpc>
+                <a:spcPts val="1620"/>
+              </a:lnSpc>
+              <a:spcAft>
+                <a:spcPts val="300"/>
+              </a:spcAft>
+              <a:buSzPct val="100000"/>
+              <a:buChar char="•"/>
             </a:pPr>
             <a:r>
               <a:rPr lang="en-US" sz="1200" dirty="0">
@@ -4330,7 +4896,1785 @@
                 <a:ea typeface="Arial" pitchFamily="34" charset="-122"/>
                 <a:cs typeface="Arial" pitchFamily="34" charset="-120"/>
               </a:rPr>
-              <a:t>.</a:t>
+              <a:t>What comes LAST? </a:t>
+            </a:r>
+            <a:pPr algn="l" indent="0" marL="0">
+              <a:lnSpc>
+                <a:spcPts val="1620"/>
+              </a:lnSpc>
+              <a:spcAft>
+                <a:spcPts val="300"/>
+              </a:spcAft>
+              <a:buNone/>
+            </a:pPr>
+            <a:r>
+              <a:rPr lang="en-US" sz="1200" i="1" dirty="0">
+                <a:solidFill>
+                  <a:srgbClr val="1C2833"/>
+                </a:solidFill>
+                <a:latin typeface="Arial" pitchFamily="34" charset="0"/>
+                <a:ea typeface="Arial" pitchFamily="34" charset="-122"/>
+                <a:cs typeface="Arial" pitchFamily="34" charset="-120"/>
+              </a:rPr>
+              <a:t>(8th — samādhi.)</a:t>
+            </a:r>
+            <a:endParaRPr lang="en-US" sz="1200" dirty="0"/>
+          </a:p>
+          <a:p>
+            <a:pPr algn="l" marL="342900" indent="-342900">
+              <a:lnSpc>
+                <a:spcPts val="1620"/>
+              </a:lnSpc>
+              <a:spcAft>
+                <a:spcPts val="300"/>
+              </a:spcAft>
+              <a:buSzPct val="100000"/>
+              <a:buChar char="•"/>
+            </a:pPr>
+            <a:r>
+              <a:rPr lang="en-US" sz="1200" dirty="0">
+                <a:solidFill>
+                  <a:srgbClr val="1C2833"/>
+                </a:solidFill>
+                <a:latin typeface="Arial" pitchFamily="34" charset="0"/>
+                <a:ea typeface="Arial" pitchFamily="34" charset="-122"/>
+                <a:cs typeface="Arial" pitchFamily="34" charset="-120"/>
+              </a:rPr>
+              <a:t>Preview Day 3: </a:t>
+            </a:r>
+            <a:pPr algn="l" indent="0" marL="0">
+              <a:lnSpc>
+                <a:spcPts val="1620"/>
+              </a:lnSpc>
+              <a:spcAft>
+                <a:spcPts val="300"/>
+              </a:spcAft>
+              <a:buNone/>
+            </a:pPr>
+            <a:r>
+              <a:rPr lang="en-US" sz="1200" i="1" dirty="0">
+                <a:solidFill>
+                  <a:srgbClr val="1C2833"/>
+                </a:solidFill>
+                <a:latin typeface="Arial" pitchFamily="34" charset="0"/>
+                <a:ea typeface="Arial" pitchFamily="34" charset="-122"/>
+                <a:cs typeface="Arial" pitchFamily="34" charset="-120"/>
+              </a:rPr>
+              <a:t>"Tomorrow — five foundational āsanas, including the tree we tried today."</a:t>
+            </a:r>
+            <a:endParaRPr lang="en-US" sz="1200" dirty="0"/>
+          </a:p>
+        </p:txBody>
+      </p:sp>
+      <p:sp>
+        <p:nvSpPr>
+          <p:cNvPr id="5" name="Text 3"/>
+          <p:cNvSpPr/>
+          <p:nvPr/>
+        </p:nvSpPr>
+        <p:spPr>
+          <a:xfrm>
+            <a:off x="406301" y="4434929"/>
+            <a:ext cx="8498026" cy="213271"/>
+          </a:xfrm>
+          <a:prstGeom prst="rect">
+            <a:avLst/>
+          </a:prstGeom>
+          <a:noFill/>
+          <a:ln/>
+        </p:spPr>
+        <p:txBody>
+          <a:bodyPr wrap="square" lIns="0" tIns="0" rIns="0" bIns="0" rtlCol="0" anchor="t"/>
+          <a:lstStyle/>
+          <a:p>
+            <a:pPr algn="l" indent="0" marL="0">
+              <a:lnSpc>
+                <a:spcPts val="1680"/>
+              </a:lnSpc>
+              <a:spcBef>
+                <a:spcPts val="300"/>
+              </a:spcBef>
+              <a:spcAft>
+                <a:spcPts val="300"/>
+              </a:spcAft>
+              <a:buNone/>
+            </a:pPr>
+            <a:r>
+              <a:rPr lang="en-US" sz="1200" dirty="0">
+                <a:solidFill>
+                  <a:srgbClr val="1C2833"/>
+                </a:solidFill>
+                <a:latin typeface="Arial" pitchFamily="34" charset="0"/>
+                <a:ea typeface="Arial" pitchFamily="34" charset="-122"/>
+                <a:cs typeface="Arial" pitchFamily="34" charset="-120"/>
+              </a:rPr>
+              <a:t>Middle ·  · IKS Curriculum</a:t>
+            </a:r>
+            <a:endParaRPr lang="en-US" sz="1200" dirty="0"/>
+          </a:p>
+        </p:txBody>
+      </p:sp>
+    </p:spTree>
+  </p:cSld>
+  <p:clrMapOvr>
+    <a:masterClrMapping/>
+  </p:clrMapOvr>
+</p:sld>
+</file>
+
+<file path=ppt/slides/slide16.xml><?xml version="1.0" encoding="utf-8"?>
+<p:sld xmlns:a="http://schemas.openxmlformats.org/drawingml/2006/main" xmlns:r="http://schemas.openxmlformats.org/officeDocument/2006/relationships" xmlns:p="http://schemas.openxmlformats.org/presentationml/2006/main">
+  <p:cSld name="Slide 16">
+    <p:bg>
+      <p:bgPr>
+        <a:solidFill>
+          <a:srgbClr val="FFFFFF"/>
+        </a:solidFill>
+      </p:bgPr>
+    </p:bg>
+    <p:spTree>
+      <p:nvGrpSpPr>
+        <p:cNvPr id="1" name=""/>
+        <p:cNvGrpSpPr/>
+        <p:nvPr/>
+      </p:nvGrpSpPr>
+      <p:grpSpPr>
+        <a:xfrm>
+          <a:off x="0" y="0"/>
+          <a:ext cx="0" cy="0"/>
+          <a:chOff x="0" y="0"/>
+          <a:chExt cx="0" cy="0"/>
+        </a:xfrm>
+      </p:grpSpPr>
+      <p:sp>
+        <p:nvSpPr>
+          <p:cNvPr id="2" name="Text 0"/>
+          <p:cNvSpPr/>
+          <p:nvPr/>
+        </p:nvSpPr>
+        <p:spPr>
+          <a:xfrm>
+            <a:off x="0" y="0"/>
+            <a:ext cx="9144000" cy="101501"/>
+          </a:xfrm>
+          <a:prstGeom prst="rect">
+            <a:avLst/>
+          </a:prstGeom>
+          <a:solidFill>
+            <a:srgbClr val="277884"/>
+          </a:solidFill>
+          <a:ln/>
+        </p:spPr>
+        <p:txBody>
+          <a:bodyPr wrap="square" rtlCol="0" anchor="ctr"/>
+          <a:lstStyle/>
+          <a:p>
+            <a:pPr indent="0" marL="0">
+              <a:buNone/>
+            </a:pPr>
+            <a:endParaRPr lang="en-US" dirty="0"/>
+          </a:p>
+        </p:txBody>
+      </p:sp>
+      <p:sp>
+        <p:nvSpPr>
+          <p:cNvPr id="3" name="Text 1"/>
+          <p:cNvSpPr/>
+          <p:nvPr/>
+        </p:nvSpPr>
+        <p:spPr>
+          <a:xfrm>
+            <a:off x="406301" y="457051"/>
+            <a:ext cx="8498026" cy="274290"/>
+          </a:xfrm>
+          <a:prstGeom prst="rect">
+            <a:avLst/>
+          </a:prstGeom>
+          <a:noFill/>
+          <a:ln/>
+        </p:spPr>
+        <p:txBody>
+          <a:bodyPr wrap="square" lIns="0" tIns="0" rIns="0" bIns="0" rtlCol="0" anchor="t"/>
+          <a:lstStyle/>
+          <a:p>
+            <a:pPr algn="l" indent="0" marL="0">
+              <a:lnSpc>
+                <a:spcPts val="2160"/>
+              </a:lnSpc>
+              <a:spcBef>
+                <a:spcPts val="600"/>
+              </a:spcBef>
+              <a:spcAft>
+                <a:spcPts val="800"/>
+              </a:spcAft>
+              <a:buNone/>
+            </a:pPr>
+            <a:r>
+              <a:rPr lang="en-US" sz="1800" b="1" dirty="0">
+                <a:solidFill>
+                  <a:srgbClr val="FE4447"/>
+                </a:solidFill>
+                <a:latin typeface="Georgia" pitchFamily="34" charset="0"/>
+                <a:ea typeface="Georgia" pitchFamily="34" charset="-122"/>
+                <a:cs typeface="Georgia" pitchFamily="34" charset="-120"/>
+              </a:rPr>
+              <a:t>Student-facing content</a:t>
+            </a:r>
+            <a:endParaRPr lang="en-US" sz="1800" dirty="0"/>
+          </a:p>
+        </p:txBody>
+      </p:sp>
+      <p:sp>
+        <p:nvSpPr>
+          <p:cNvPr id="4" name="Text 2"/>
+          <p:cNvSpPr/>
+          <p:nvPr/>
+        </p:nvSpPr>
+        <p:spPr>
+          <a:xfrm>
+            <a:off x="406301" y="883593"/>
+            <a:ext cx="8331398" cy="2112169"/>
+          </a:xfrm>
+          <a:prstGeom prst="rect">
+            <a:avLst/>
+          </a:prstGeom>
+          <a:solidFill>
+            <a:srgbClr val="F4F8F9"/>
+          </a:solidFill>
+          <a:ln/>
+        </p:spPr>
+        <p:txBody>
+          <a:bodyPr wrap="square" rtlCol="0" anchor="ctr"/>
+          <a:lstStyle/>
+          <a:p>
+            <a:pPr indent="0" marL="0">
+              <a:buNone/>
+            </a:pPr>
+            <a:endParaRPr lang="en-US" dirty="0"/>
+          </a:p>
+        </p:txBody>
+      </p:sp>
+      <p:sp>
+        <p:nvSpPr>
+          <p:cNvPr id="5" name="Shape 3"/>
+          <p:cNvSpPr/>
+          <p:nvPr/>
+        </p:nvSpPr>
+        <p:spPr>
+          <a:xfrm>
+            <a:off x="434876" y="883593"/>
+            <a:ext cx="0" cy="2112169"/>
+          </a:xfrm>
+          <a:prstGeom prst="line">
+            <a:avLst/>
+          </a:prstGeom>
+          <a:noFill/>
+          <a:ln w="57150">
+            <a:solidFill>
+              <a:srgbClr val="FE4447"/>
+            </a:solidFill>
+            <a:prstDash val="solid"/>
+          </a:ln>
+        </p:spPr>
+      </p:sp>
+      <p:sp>
+        <p:nvSpPr>
+          <p:cNvPr id="6" name="Text 4"/>
+          <p:cNvSpPr/>
+          <p:nvPr/>
+        </p:nvSpPr>
+        <p:spPr>
+          <a:xfrm>
+            <a:off x="692051" y="1074093"/>
+            <a:ext cx="7973389" cy="230981"/>
+          </a:xfrm>
+          <a:prstGeom prst="rect">
+            <a:avLst/>
+          </a:prstGeom>
+          <a:noFill/>
+          <a:ln/>
+        </p:spPr>
+        <p:txBody>
+          <a:bodyPr wrap="square" lIns="0" tIns="0" rIns="0" bIns="0" rtlCol="0" anchor="t"/>
+          <a:lstStyle/>
+          <a:p>
+            <a:pPr algn="l" indent="0" marL="0">
+              <a:lnSpc>
+                <a:spcPts val="1820"/>
+              </a:lnSpc>
+              <a:spcBef>
+                <a:spcPts val="300"/>
+              </a:spcBef>
+              <a:spcAft>
+                <a:spcPts val="300"/>
+              </a:spcAft>
+              <a:buNone/>
+            </a:pPr>
+            <a:r>
+              <a:rPr lang="en-US" sz="1300" b="1" i="1" dirty="0">
+                <a:solidFill>
+                  <a:srgbClr val="1C2833"/>
+                </a:solidFill>
+                <a:latin typeface="Georgia" pitchFamily="34" charset="0"/>
+                <a:ea typeface="Georgia" pitchFamily="34" charset="-122"/>
+                <a:cs typeface="Georgia" pitchFamily="34" charset="-120"/>
+              </a:rPr>
+              <a:t>The Eight Limbs of Yoga</a:t>
+            </a:r>
+            <a:pPr algn="l" indent="0" marL="0">
+              <a:lnSpc>
+                <a:spcPts val="1820"/>
+              </a:lnSpc>
+              <a:spcBef>
+                <a:spcPts val="300"/>
+              </a:spcBef>
+              <a:spcAft>
+                <a:spcPts val="300"/>
+              </a:spcAft>
+              <a:buNone/>
+            </a:pPr>
+            <a:r>
+              <a:rPr lang="en-US" sz="1300" dirty="0">
+                <a:solidFill>
+                  <a:srgbClr val="1C2833"/>
+                </a:solidFill>
+                <a:latin typeface="Georgia" pitchFamily="34" charset="0"/>
+                <a:ea typeface="Georgia" pitchFamily="34" charset="-122"/>
+                <a:cs typeface="Georgia" pitchFamily="34" charset="-120"/>
+              </a:rPr>
+              <a:t> (Patañjali's </a:t>
+            </a:r>
+            <a:pPr algn="l" indent="0" marL="0">
+              <a:lnSpc>
+                <a:spcPts val="1820"/>
+              </a:lnSpc>
+              <a:spcBef>
+                <a:spcPts val="300"/>
+              </a:spcBef>
+              <a:spcAft>
+                <a:spcPts val="300"/>
+              </a:spcAft>
+              <a:buNone/>
+            </a:pPr>
+            <a:r>
+              <a:rPr lang="en-US" sz="1300" i="1" dirty="0">
+                <a:solidFill>
+                  <a:srgbClr val="1C2833"/>
+                </a:solidFill>
+                <a:latin typeface="Georgia" pitchFamily="34" charset="0"/>
+                <a:ea typeface="Georgia" pitchFamily="34" charset="-122"/>
+                <a:cs typeface="Georgia" pitchFamily="34" charset="-120"/>
+              </a:rPr>
+              <a:t>aṣṭāṅga</a:t>
+            </a:r>
+            <a:pPr algn="l" indent="0" marL="0">
+              <a:lnSpc>
+                <a:spcPts val="1820"/>
+              </a:lnSpc>
+              <a:spcBef>
+                <a:spcPts val="300"/>
+              </a:spcBef>
+              <a:spcAft>
+                <a:spcPts val="300"/>
+              </a:spcAft>
+              <a:buNone/>
+            </a:pPr>
+            <a:r>
+              <a:rPr lang="en-US" sz="1300" dirty="0">
+                <a:solidFill>
+                  <a:srgbClr val="1C2833"/>
+                </a:solidFill>
+                <a:latin typeface="Georgia" pitchFamily="34" charset="0"/>
+                <a:ea typeface="Georgia" pitchFamily="34" charset="-122"/>
+                <a:cs typeface="Georgia" pitchFamily="34" charset="-120"/>
+              </a:rPr>
+              <a:t>)</a:t>
+            </a:r>
+            <a:endParaRPr lang="en-US" sz="1300" dirty="0"/>
+          </a:p>
+        </p:txBody>
+      </p:sp>
+      <p:sp>
+        <p:nvSpPr>
+          <p:cNvPr id="7" name="Text 5"/>
+          <p:cNvSpPr/>
+          <p:nvPr/>
+        </p:nvSpPr>
+        <p:spPr>
+          <a:xfrm>
+            <a:off x="692051" y="1343174"/>
+            <a:ext cx="7973389" cy="923925"/>
+          </a:xfrm>
+          <a:prstGeom prst="rect">
+            <a:avLst/>
+          </a:prstGeom>
+          <a:noFill/>
+          <a:ln/>
+        </p:spPr>
+        <p:txBody>
+          <a:bodyPr wrap="square" lIns="0" tIns="0" rIns="0" bIns="0" rtlCol="0" anchor="t"/>
+          <a:lstStyle/>
+          <a:p>
+            <a:pPr algn="l" indent="0" marL="0">
+              <a:lnSpc>
+                <a:spcPts val="1820"/>
+              </a:lnSpc>
+              <a:spcBef>
+                <a:spcPts val="300"/>
+              </a:spcBef>
+              <a:spcAft>
+                <a:spcPts val="300"/>
+              </a:spcAft>
+              <a:buNone/>
+            </a:pPr>
+            <a:r>
+              <a:rPr lang="en-US" sz="1300" dirty="0">
+                <a:solidFill>
+                  <a:srgbClr val="1C2833"/>
+                </a:solidFill>
+                <a:latin typeface="Georgia" pitchFamily="34" charset="0"/>
+                <a:ea typeface="Georgia" pitchFamily="34" charset="-122"/>
+                <a:cs typeface="Georgia" pitchFamily="34" charset="-120"/>
+              </a:rPr>
+              <a:t>| # | Sanskrit | Meaning | |---|----------|---------| | 1 | </a:t>
+            </a:r>
+            <a:pPr algn="l" indent="0" marL="0">
+              <a:lnSpc>
+                <a:spcPts val="1820"/>
+              </a:lnSpc>
+              <a:spcBef>
+                <a:spcPts val="300"/>
+              </a:spcBef>
+              <a:spcAft>
+                <a:spcPts val="300"/>
+              </a:spcAft>
+              <a:buNone/>
+            </a:pPr>
+            <a:r>
+              <a:rPr lang="en-US" sz="1300" i="1" dirty="0">
+                <a:solidFill>
+                  <a:srgbClr val="1C2833"/>
+                </a:solidFill>
+                <a:latin typeface="Georgia" pitchFamily="34" charset="0"/>
+                <a:ea typeface="Georgia" pitchFamily="34" charset="-122"/>
+                <a:cs typeface="Georgia" pitchFamily="34" charset="-120"/>
+              </a:rPr>
+              <a:t>yama</a:t>
+            </a:r>
+            <a:pPr algn="l" indent="0" marL="0">
+              <a:lnSpc>
+                <a:spcPts val="1820"/>
+              </a:lnSpc>
+              <a:spcBef>
+                <a:spcPts val="300"/>
+              </a:spcBef>
+              <a:spcAft>
+                <a:spcPts val="300"/>
+              </a:spcAft>
+              <a:buNone/>
+            </a:pPr>
+            <a:r>
+              <a:rPr lang="en-US" sz="1300" dirty="0">
+                <a:solidFill>
+                  <a:srgbClr val="1C2833"/>
+                </a:solidFill>
+                <a:latin typeface="Georgia" pitchFamily="34" charset="0"/>
+                <a:ea typeface="Georgia" pitchFamily="34" charset="-122"/>
+                <a:cs typeface="Georgia" pitchFamily="34" charset="-120"/>
+              </a:rPr>
+              <a:t> | restraints (don'ts) | | 2 | </a:t>
+            </a:r>
+            <a:pPr algn="l" indent="0" marL="0">
+              <a:lnSpc>
+                <a:spcPts val="1820"/>
+              </a:lnSpc>
+              <a:spcBef>
+                <a:spcPts val="300"/>
+              </a:spcBef>
+              <a:spcAft>
+                <a:spcPts val="300"/>
+              </a:spcAft>
+              <a:buNone/>
+            </a:pPr>
+            <a:r>
+              <a:rPr lang="en-US" sz="1300" i="1" dirty="0">
+                <a:solidFill>
+                  <a:srgbClr val="1C2833"/>
+                </a:solidFill>
+                <a:latin typeface="Georgia" pitchFamily="34" charset="0"/>
+                <a:ea typeface="Georgia" pitchFamily="34" charset="-122"/>
+                <a:cs typeface="Georgia" pitchFamily="34" charset="-120"/>
+              </a:rPr>
+              <a:t>niyama</a:t>
+            </a:r>
+            <a:pPr algn="l" indent="0" marL="0">
+              <a:lnSpc>
+                <a:spcPts val="1820"/>
+              </a:lnSpc>
+              <a:spcBef>
+                <a:spcPts val="300"/>
+              </a:spcBef>
+              <a:spcAft>
+                <a:spcPts val="300"/>
+              </a:spcAft>
+              <a:buNone/>
+            </a:pPr>
+            <a:r>
+              <a:rPr lang="en-US" sz="1300" dirty="0">
+                <a:solidFill>
+                  <a:srgbClr val="1C2833"/>
+                </a:solidFill>
+                <a:latin typeface="Georgia" pitchFamily="34" charset="0"/>
+                <a:ea typeface="Georgia" pitchFamily="34" charset="-122"/>
+                <a:cs typeface="Georgia" pitchFamily="34" charset="-120"/>
+              </a:rPr>
+              <a:t> | observances (dos) | | 3 | </a:t>
+            </a:r>
+            <a:pPr algn="l" indent="0" marL="0">
+              <a:lnSpc>
+                <a:spcPts val="1820"/>
+              </a:lnSpc>
+              <a:spcBef>
+                <a:spcPts val="300"/>
+              </a:spcBef>
+              <a:spcAft>
+                <a:spcPts val="300"/>
+              </a:spcAft>
+              <a:buNone/>
+            </a:pPr>
+            <a:r>
+              <a:rPr lang="en-US" sz="1300" i="1" dirty="0">
+                <a:solidFill>
+                  <a:srgbClr val="1C2833"/>
+                </a:solidFill>
+                <a:latin typeface="Georgia" pitchFamily="34" charset="0"/>
+                <a:ea typeface="Georgia" pitchFamily="34" charset="-122"/>
+                <a:cs typeface="Georgia" pitchFamily="34" charset="-120"/>
+              </a:rPr>
+              <a:t>āsana</a:t>
+            </a:r>
+            <a:pPr algn="l" indent="0" marL="0">
+              <a:lnSpc>
+                <a:spcPts val="1820"/>
+              </a:lnSpc>
+              <a:spcBef>
+                <a:spcPts val="300"/>
+              </a:spcBef>
+              <a:spcAft>
+                <a:spcPts val="300"/>
+              </a:spcAft>
+              <a:buNone/>
+            </a:pPr>
+            <a:r>
+              <a:rPr lang="en-US" sz="1300" dirty="0">
+                <a:solidFill>
+                  <a:srgbClr val="1C2833"/>
+                </a:solidFill>
+                <a:latin typeface="Georgia" pitchFamily="34" charset="0"/>
+                <a:ea typeface="Georgia" pitchFamily="34" charset="-122"/>
+                <a:cs typeface="Georgia" pitchFamily="34" charset="-120"/>
+              </a:rPr>
+              <a:t> | posture | | 4 | </a:t>
+            </a:r>
+            <a:pPr algn="l" indent="0" marL="0">
+              <a:lnSpc>
+                <a:spcPts val="1820"/>
+              </a:lnSpc>
+              <a:spcBef>
+                <a:spcPts val="300"/>
+              </a:spcBef>
+              <a:spcAft>
+                <a:spcPts val="300"/>
+              </a:spcAft>
+              <a:buNone/>
+            </a:pPr>
+            <a:r>
+              <a:rPr lang="en-US" sz="1300" i="1" dirty="0">
+                <a:solidFill>
+                  <a:srgbClr val="1C2833"/>
+                </a:solidFill>
+                <a:latin typeface="Georgia" pitchFamily="34" charset="0"/>
+                <a:ea typeface="Georgia" pitchFamily="34" charset="-122"/>
+                <a:cs typeface="Georgia" pitchFamily="34" charset="-120"/>
+              </a:rPr>
+              <a:t>prāṇāyāma</a:t>
+            </a:r>
+            <a:pPr algn="l" indent="0" marL="0">
+              <a:lnSpc>
+                <a:spcPts val="1820"/>
+              </a:lnSpc>
+              <a:spcBef>
+                <a:spcPts val="300"/>
+              </a:spcBef>
+              <a:spcAft>
+                <a:spcPts val="300"/>
+              </a:spcAft>
+              <a:buNone/>
+            </a:pPr>
+            <a:r>
+              <a:rPr lang="en-US" sz="1300" dirty="0">
+                <a:solidFill>
+                  <a:srgbClr val="1C2833"/>
+                </a:solidFill>
+                <a:latin typeface="Georgia" pitchFamily="34" charset="0"/>
+                <a:ea typeface="Georgia" pitchFamily="34" charset="-122"/>
+                <a:cs typeface="Georgia" pitchFamily="34" charset="-120"/>
+              </a:rPr>
+              <a:t> | breath regulation | | 5 | </a:t>
+            </a:r>
+            <a:pPr algn="l" indent="0" marL="0">
+              <a:lnSpc>
+                <a:spcPts val="1820"/>
+              </a:lnSpc>
+              <a:spcBef>
+                <a:spcPts val="300"/>
+              </a:spcBef>
+              <a:spcAft>
+                <a:spcPts val="300"/>
+              </a:spcAft>
+              <a:buNone/>
+            </a:pPr>
+            <a:r>
+              <a:rPr lang="en-US" sz="1300" i="1" dirty="0">
+                <a:solidFill>
+                  <a:srgbClr val="1C2833"/>
+                </a:solidFill>
+                <a:latin typeface="Georgia" pitchFamily="34" charset="0"/>
+                <a:ea typeface="Georgia" pitchFamily="34" charset="-122"/>
+                <a:cs typeface="Georgia" pitchFamily="34" charset="-120"/>
+              </a:rPr>
+              <a:t>pratyāhāra</a:t>
+            </a:r>
+            <a:pPr algn="l" indent="0" marL="0">
+              <a:lnSpc>
+                <a:spcPts val="1820"/>
+              </a:lnSpc>
+              <a:spcBef>
+                <a:spcPts val="300"/>
+              </a:spcBef>
+              <a:spcAft>
+                <a:spcPts val="300"/>
+              </a:spcAft>
+              <a:buNone/>
+            </a:pPr>
+            <a:r>
+              <a:rPr lang="en-US" sz="1300" dirty="0">
+                <a:solidFill>
+                  <a:srgbClr val="1C2833"/>
+                </a:solidFill>
+                <a:latin typeface="Georgia" pitchFamily="34" charset="0"/>
+                <a:ea typeface="Georgia" pitchFamily="34" charset="-122"/>
+                <a:cs typeface="Georgia" pitchFamily="34" charset="-120"/>
+              </a:rPr>
+              <a:t> | sense-withdrawal | | 6 | </a:t>
+            </a:r>
+            <a:pPr algn="l" indent="0" marL="0">
+              <a:lnSpc>
+                <a:spcPts val="1820"/>
+              </a:lnSpc>
+              <a:spcBef>
+                <a:spcPts val="300"/>
+              </a:spcBef>
+              <a:spcAft>
+                <a:spcPts val="300"/>
+              </a:spcAft>
+              <a:buNone/>
+            </a:pPr>
+            <a:r>
+              <a:rPr lang="en-US" sz="1300" i="1" dirty="0">
+                <a:solidFill>
+                  <a:srgbClr val="1C2833"/>
+                </a:solidFill>
+                <a:latin typeface="Georgia" pitchFamily="34" charset="0"/>
+                <a:ea typeface="Georgia" pitchFamily="34" charset="-122"/>
+                <a:cs typeface="Georgia" pitchFamily="34" charset="-120"/>
+              </a:rPr>
+              <a:t>dhāraṇā</a:t>
+            </a:r>
+            <a:pPr algn="l" indent="0" marL="0">
+              <a:lnSpc>
+                <a:spcPts val="1820"/>
+              </a:lnSpc>
+              <a:spcBef>
+                <a:spcPts val="300"/>
+              </a:spcBef>
+              <a:spcAft>
+                <a:spcPts val="300"/>
+              </a:spcAft>
+              <a:buNone/>
+            </a:pPr>
+            <a:r>
+              <a:rPr lang="en-US" sz="1300" dirty="0">
+                <a:solidFill>
+                  <a:srgbClr val="1C2833"/>
+                </a:solidFill>
+                <a:latin typeface="Georgia" pitchFamily="34" charset="0"/>
+                <a:ea typeface="Georgia" pitchFamily="34" charset="-122"/>
+                <a:cs typeface="Georgia" pitchFamily="34" charset="-120"/>
+              </a:rPr>
+              <a:t> | focused attention | | 7 | </a:t>
+            </a:r>
+            <a:pPr algn="l" indent="0" marL="0">
+              <a:lnSpc>
+                <a:spcPts val="1820"/>
+              </a:lnSpc>
+              <a:spcBef>
+                <a:spcPts val="300"/>
+              </a:spcBef>
+              <a:spcAft>
+                <a:spcPts val="300"/>
+              </a:spcAft>
+              <a:buNone/>
+            </a:pPr>
+            <a:r>
+              <a:rPr lang="en-US" sz="1300" i="1" dirty="0">
+                <a:solidFill>
+                  <a:srgbClr val="1C2833"/>
+                </a:solidFill>
+                <a:latin typeface="Georgia" pitchFamily="34" charset="0"/>
+                <a:ea typeface="Georgia" pitchFamily="34" charset="-122"/>
+                <a:cs typeface="Georgia" pitchFamily="34" charset="-120"/>
+              </a:rPr>
+              <a:t>dhyāna</a:t>
+            </a:r>
+            <a:pPr algn="l" indent="0" marL="0">
+              <a:lnSpc>
+                <a:spcPts val="1820"/>
+              </a:lnSpc>
+              <a:spcBef>
+                <a:spcPts val="300"/>
+              </a:spcBef>
+              <a:spcAft>
+                <a:spcPts val="300"/>
+              </a:spcAft>
+              <a:buNone/>
+            </a:pPr>
+            <a:r>
+              <a:rPr lang="en-US" sz="1300" dirty="0">
+                <a:solidFill>
+                  <a:srgbClr val="1C2833"/>
+                </a:solidFill>
+                <a:latin typeface="Georgia" pitchFamily="34" charset="0"/>
+                <a:ea typeface="Georgia" pitchFamily="34" charset="-122"/>
+                <a:cs typeface="Georgia" pitchFamily="34" charset="-120"/>
+              </a:rPr>
+              <a:t> | sustained meditation | | 8 | </a:t>
+            </a:r>
+            <a:pPr algn="l" indent="0" marL="0">
+              <a:lnSpc>
+                <a:spcPts val="1820"/>
+              </a:lnSpc>
+              <a:spcBef>
+                <a:spcPts val="300"/>
+              </a:spcBef>
+              <a:spcAft>
+                <a:spcPts val="300"/>
+              </a:spcAft>
+              <a:buNone/>
+            </a:pPr>
+            <a:r>
+              <a:rPr lang="en-US" sz="1300" i="1" dirty="0">
+                <a:solidFill>
+                  <a:srgbClr val="1C2833"/>
+                </a:solidFill>
+                <a:latin typeface="Georgia" pitchFamily="34" charset="0"/>
+                <a:ea typeface="Georgia" pitchFamily="34" charset="-122"/>
+                <a:cs typeface="Georgia" pitchFamily="34" charset="-120"/>
+              </a:rPr>
+              <a:t>samādhi</a:t>
+            </a:r>
+            <a:pPr algn="l" indent="0" marL="0">
+              <a:lnSpc>
+                <a:spcPts val="1820"/>
+              </a:lnSpc>
+              <a:spcBef>
+                <a:spcPts val="300"/>
+              </a:spcBef>
+              <a:spcAft>
+                <a:spcPts val="300"/>
+              </a:spcAft>
+              <a:buNone/>
+            </a:pPr>
+            <a:r>
+              <a:rPr lang="en-US" sz="1300" dirty="0">
+                <a:solidFill>
+                  <a:srgbClr val="1C2833"/>
+                </a:solidFill>
+                <a:latin typeface="Georgia" pitchFamily="34" charset="0"/>
+                <a:ea typeface="Georgia" pitchFamily="34" charset="-122"/>
+                <a:cs typeface="Georgia" pitchFamily="34" charset="-120"/>
+              </a:rPr>
+              <a:t> | absorption |</a:t>
+            </a:r>
+            <a:endParaRPr lang="en-US" sz="1300" dirty="0"/>
+          </a:p>
+        </p:txBody>
+      </p:sp>
+      <p:sp>
+        <p:nvSpPr>
+          <p:cNvPr id="8" name="Text 6"/>
+          <p:cNvSpPr/>
+          <p:nvPr/>
+        </p:nvSpPr>
+        <p:spPr>
+          <a:xfrm>
+            <a:off x="692051" y="2305199"/>
+            <a:ext cx="7973389" cy="230981"/>
+          </a:xfrm>
+          <a:prstGeom prst="rect">
+            <a:avLst/>
+          </a:prstGeom>
+          <a:noFill/>
+          <a:ln/>
+        </p:spPr>
+        <p:txBody>
+          <a:bodyPr wrap="square" lIns="0" tIns="0" rIns="0" bIns="0" rtlCol="0" anchor="t"/>
+          <a:lstStyle/>
+          <a:p>
+            <a:pPr algn="l" indent="0" marL="0">
+              <a:lnSpc>
+                <a:spcPts val="1820"/>
+              </a:lnSpc>
+              <a:spcBef>
+                <a:spcPts val="300"/>
+              </a:spcBef>
+              <a:spcAft>
+                <a:spcPts val="300"/>
+              </a:spcAft>
+              <a:buNone/>
+            </a:pPr>
+            <a:r>
+              <a:rPr lang="en-US" sz="1300" i="1" dirty="0">
+                <a:solidFill>
+                  <a:srgbClr val="1C2833"/>
+                </a:solidFill>
+                <a:latin typeface="Georgia" pitchFamily="34" charset="0"/>
+                <a:ea typeface="Georgia" pitchFamily="34" charset="-122"/>
+                <a:cs typeface="Georgia" pitchFamily="34" charset="-120"/>
+              </a:rPr>
+              <a:t>Limbs 1–2: conduct. 3–4: body. 5–8: mind.</a:t>
+            </a:r>
+            <a:endParaRPr lang="en-US" sz="1300" dirty="0"/>
+          </a:p>
+        </p:txBody>
+      </p:sp>
+      <p:sp>
+        <p:nvSpPr>
+          <p:cNvPr id="9" name="Text 7"/>
+          <p:cNvSpPr/>
+          <p:nvPr/>
+        </p:nvSpPr>
+        <p:spPr>
+          <a:xfrm>
+            <a:off x="692051" y="2574280"/>
+            <a:ext cx="7973389" cy="230981"/>
+          </a:xfrm>
+          <a:prstGeom prst="rect">
+            <a:avLst/>
+          </a:prstGeom>
+          <a:noFill/>
+          <a:ln/>
+        </p:spPr>
+        <p:txBody>
+          <a:bodyPr wrap="square" lIns="0" tIns="0" rIns="0" bIns="0" rtlCol="0" anchor="t"/>
+          <a:lstStyle/>
+          <a:p>
+            <a:pPr algn="l" indent="0" marL="0">
+              <a:lnSpc>
+                <a:spcPts val="1820"/>
+              </a:lnSpc>
+              <a:spcBef>
+                <a:spcPts val="300"/>
+              </a:spcBef>
+              <a:spcAft>
+                <a:spcPts val="300"/>
+              </a:spcAft>
+              <a:buNone/>
+            </a:pPr>
+            <a:r>
+              <a:rPr lang="en-US" sz="1300" dirty="0">
+                <a:solidFill>
+                  <a:srgbClr val="1C2833"/>
+                </a:solidFill>
+                <a:latin typeface="Georgia" pitchFamily="34" charset="0"/>
+                <a:ea typeface="Georgia" pitchFamily="34" charset="-122"/>
+                <a:cs typeface="Georgia" pitchFamily="34" charset="-120"/>
+              </a:rPr>
+              <a:t>Today's pose: </a:t>
+            </a:r>
+            <a:pPr algn="l" indent="0" marL="0">
+              <a:lnSpc>
+                <a:spcPts val="1820"/>
+              </a:lnSpc>
+              <a:spcBef>
+                <a:spcPts val="300"/>
+              </a:spcBef>
+              <a:spcAft>
+                <a:spcPts val="300"/>
+              </a:spcAft>
+              <a:buNone/>
+            </a:pPr>
+            <a:r>
+              <a:rPr lang="en-US" sz="1300" b="1" i="1" dirty="0">
+                <a:solidFill>
+                  <a:srgbClr val="1C2833"/>
+                </a:solidFill>
+                <a:latin typeface="Georgia" pitchFamily="34" charset="0"/>
+                <a:ea typeface="Georgia" pitchFamily="34" charset="-122"/>
+                <a:cs typeface="Georgia" pitchFamily="34" charset="-120"/>
+              </a:rPr>
+              <a:t>vṛkṣāsana</a:t>
+            </a:r>
+            <a:pPr algn="l" indent="0" marL="0">
+              <a:lnSpc>
+                <a:spcPts val="1820"/>
+              </a:lnSpc>
+              <a:spcBef>
+                <a:spcPts val="300"/>
+              </a:spcBef>
+              <a:spcAft>
+                <a:spcPts val="300"/>
+              </a:spcAft>
+              <a:buNone/>
+            </a:pPr>
+            <a:r>
+              <a:rPr lang="en-US" sz="1300" dirty="0">
+                <a:solidFill>
+                  <a:srgbClr val="1C2833"/>
+                </a:solidFill>
+                <a:latin typeface="Georgia" pitchFamily="34" charset="0"/>
+                <a:ea typeface="Georgia" pitchFamily="34" charset="-122"/>
+                <a:cs typeface="Georgia" pitchFamily="34" charset="-120"/>
+              </a:rPr>
+              <a:t> (tree). Stand on one leg. Balance. Wobble is allowed.</a:t>
+            </a:r>
+            <a:endParaRPr lang="en-US" sz="1300" dirty="0"/>
+          </a:p>
+        </p:txBody>
+      </p:sp>
+      <p:sp>
+        <p:nvSpPr>
+          <p:cNvPr id="10" name="Text 8"/>
+          <p:cNvSpPr/>
+          <p:nvPr/>
+        </p:nvSpPr>
+        <p:spPr>
+          <a:xfrm>
+            <a:off x="406301" y="4434929"/>
+            <a:ext cx="8498026" cy="213271"/>
+          </a:xfrm>
+          <a:prstGeom prst="rect">
+            <a:avLst/>
+          </a:prstGeom>
+          <a:noFill/>
+          <a:ln/>
+        </p:spPr>
+        <p:txBody>
+          <a:bodyPr wrap="square" lIns="0" tIns="0" rIns="0" bIns="0" rtlCol="0" anchor="t"/>
+          <a:lstStyle/>
+          <a:p>
+            <a:pPr algn="l" indent="0" marL="0">
+              <a:lnSpc>
+                <a:spcPts val="1680"/>
+              </a:lnSpc>
+              <a:spcBef>
+                <a:spcPts val="300"/>
+              </a:spcBef>
+              <a:spcAft>
+                <a:spcPts val="300"/>
+              </a:spcAft>
+              <a:buNone/>
+            </a:pPr>
+            <a:r>
+              <a:rPr lang="en-US" sz="1200" dirty="0">
+                <a:solidFill>
+                  <a:srgbClr val="1C2833"/>
+                </a:solidFill>
+                <a:latin typeface="Arial" pitchFamily="34" charset="0"/>
+                <a:ea typeface="Arial" pitchFamily="34" charset="-122"/>
+                <a:cs typeface="Arial" pitchFamily="34" charset="-120"/>
+              </a:rPr>
+              <a:t>Middle ·  · IKS Curriculum</a:t>
+            </a:r>
+            <a:endParaRPr lang="en-US" sz="1200" dirty="0"/>
+          </a:p>
+        </p:txBody>
+      </p:sp>
+    </p:spTree>
+  </p:cSld>
+  <p:clrMapOvr>
+    <a:masterClrMapping/>
+  </p:clrMapOvr>
+</p:sld>
+</file>
+
+<file path=ppt/slides/slide17.xml><?xml version="1.0" encoding="utf-8"?>
+<p:sld xmlns:a="http://schemas.openxmlformats.org/drawingml/2006/main" xmlns:r="http://schemas.openxmlformats.org/officeDocument/2006/relationships" xmlns:p="http://schemas.openxmlformats.org/presentationml/2006/main">
+  <p:cSld name="Slide 17">
+    <p:bg>
+      <p:bgPr>
+        <a:solidFill>
+          <a:srgbClr val="FFFFFF"/>
+        </a:solidFill>
+      </p:bgPr>
+    </p:bg>
+    <p:spTree>
+      <p:nvGrpSpPr>
+        <p:cNvPr id="1" name=""/>
+        <p:cNvGrpSpPr/>
+        <p:nvPr/>
+      </p:nvGrpSpPr>
+      <p:grpSpPr>
+        <a:xfrm>
+          <a:off x="0" y="0"/>
+          <a:ext cx="0" cy="0"/>
+          <a:chOff x="0" y="0"/>
+          <a:chExt cx="0" cy="0"/>
+        </a:xfrm>
+      </p:grpSpPr>
+      <p:sp>
+        <p:nvSpPr>
+          <p:cNvPr id="2" name="Text 0"/>
+          <p:cNvSpPr/>
+          <p:nvPr/>
+        </p:nvSpPr>
+        <p:spPr>
+          <a:xfrm>
+            <a:off x="0" y="0"/>
+            <a:ext cx="9144000" cy="101501"/>
+          </a:xfrm>
+          <a:prstGeom prst="rect">
+            <a:avLst/>
+          </a:prstGeom>
+          <a:solidFill>
+            <a:srgbClr val="277884"/>
+          </a:solidFill>
+          <a:ln/>
+        </p:spPr>
+        <p:txBody>
+          <a:bodyPr wrap="square" rtlCol="0" anchor="ctr"/>
+          <a:lstStyle/>
+          <a:p>
+            <a:pPr indent="0" marL="0">
+              <a:buNone/>
+            </a:pPr>
+            <a:endParaRPr lang="en-US" dirty="0"/>
+          </a:p>
+        </p:txBody>
+      </p:sp>
+      <p:sp>
+        <p:nvSpPr>
+          <p:cNvPr id="3" name="Text 1"/>
+          <p:cNvSpPr/>
+          <p:nvPr/>
+        </p:nvSpPr>
+        <p:spPr>
+          <a:xfrm>
+            <a:off x="406301" y="457051"/>
+            <a:ext cx="8498026" cy="274290"/>
+          </a:xfrm>
+          <a:prstGeom prst="rect">
+            <a:avLst/>
+          </a:prstGeom>
+          <a:noFill/>
+          <a:ln/>
+        </p:spPr>
+        <p:txBody>
+          <a:bodyPr wrap="square" lIns="0" tIns="0" rIns="0" bIns="0" rtlCol="0" anchor="t"/>
+          <a:lstStyle/>
+          <a:p>
+            <a:pPr algn="l" indent="0" marL="0">
+              <a:lnSpc>
+                <a:spcPts val="2160"/>
+              </a:lnSpc>
+              <a:spcBef>
+                <a:spcPts val="600"/>
+              </a:spcBef>
+              <a:spcAft>
+                <a:spcPts val="800"/>
+              </a:spcAft>
+              <a:buNone/>
+            </a:pPr>
+            <a:r>
+              <a:rPr lang="en-US" sz="1800" b="1" dirty="0">
+                <a:solidFill>
+                  <a:srgbClr val="FE4447"/>
+                </a:solidFill>
+                <a:latin typeface="Georgia" pitchFamily="34" charset="0"/>
+                <a:ea typeface="Georgia" pitchFamily="34" charset="-122"/>
+                <a:cs typeface="Georgia" pitchFamily="34" charset="-120"/>
+              </a:rPr>
+              <a:t>Homework</a:t>
+            </a:r>
+            <a:endParaRPr lang="en-US" sz="1800" dirty="0"/>
+          </a:p>
+        </p:txBody>
+      </p:sp>
+      <p:sp>
+        <p:nvSpPr>
+          <p:cNvPr id="4" name="Text 2"/>
+          <p:cNvSpPr/>
+          <p:nvPr/>
+        </p:nvSpPr>
+        <p:spPr>
+          <a:xfrm>
+            <a:off x="634901" y="883593"/>
+            <a:ext cx="8102798" cy="525661"/>
+          </a:xfrm>
+          <a:prstGeom prst="rect">
+            <a:avLst/>
+          </a:prstGeom>
+          <a:noFill/>
+          <a:ln/>
+        </p:spPr>
+        <p:txBody>
+          <a:bodyPr wrap="square" lIns="0" tIns="0" rIns="0" bIns="0" rtlCol="0" anchor="t"/>
+          <a:lstStyle/>
+          <a:p>
+            <a:pPr algn="l" marL="342900" indent="-342900">
+              <a:lnSpc>
+                <a:spcPts val="1620"/>
+              </a:lnSpc>
+              <a:spcAft>
+                <a:spcPts val="300"/>
+              </a:spcAft>
+              <a:buSzPct val="100000"/>
+              <a:buChar char="•"/>
+            </a:pPr>
+            <a:r>
+              <a:rPr lang="en-US" sz="1200" dirty="0">
+                <a:solidFill>
+                  <a:srgbClr val="1C2833"/>
+                </a:solidFill>
+                <a:latin typeface="Arial" pitchFamily="34" charset="0"/>
+                <a:ea typeface="Arial" pitchFamily="34" charset="-122"/>
+                <a:cs typeface="Arial" pitchFamily="34" charset="-120"/>
+              </a:rPr>
+              <a:t>Memorise the 8 limbs in order. Bring to next class — pop quiz.</a:t>
+            </a:r>
+            <a:endParaRPr lang="en-US" sz="1200" dirty="0"/>
+          </a:p>
+          <a:p>
+            <a:pPr algn="l" marL="342900" indent="-342900">
+              <a:lnSpc>
+                <a:spcPts val="1620"/>
+              </a:lnSpc>
+              <a:spcAft>
+                <a:spcPts val="300"/>
+              </a:spcAft>
+              <a:buSzPct val="100000"/>
+              <a:buChar char="•"/>
+            </a:pPr>
+            <a:r>
+              <a:rPr lang="en-US" sz="1200" dirty="0">
+                <a:solidFill>
+                  <a:srgbClr val="1C2833"/>
+                </a:solidFill>
+                <a:latin typeface="Arial" pitchFamily="34" charset="0"/>
+                <a:ea typeface="Arial" pitchFamily="34" charset="-122"/>
+                <a:cs typeface="Arial" pitchFamily="34" charset="-120"/>
+              </a:rPr>
+              <a:t>Practice tāḍāsana + vṛkṣāsana for 5 min before breakfast.</a:t>
+            </a:r>
+            <a:endParaRPr lang="en-US" sz="1200" dirty="0"/>
+          </a:p>
+        </p:txBody>
+      </p:sp>
+      <p:sp>
+        <p:nvSpPr>
+          <p:cNvPr id="5" name="Text 3"/>
+          <p:cNvSpPr/>
+          <p:nvPr/>
+        </p:nvSpPr>
+        <p:spPr>
+          <a:xfrm>
+            <a:off x="406301" y="4434929"/>
+            <a:ext cx="8498026" cy="213271"/>
+          </a:xfrm>
+          <a:prstGeom prst="rect">
+            <a:avLst/>
+          </a:prstGeom>
+          <a:noFill/>
+          <a:ln/>
+        </p:spPr>
+        <p:txBody>
+          <a:bodyPr wrap="square" lIns="0" tIns="0" rIns="0" bIns="0" rtlCol="0" anchor="t"/>
+          <a:lstStyle/>
+          <a:p>
+            <a:pPr algn="l" indent="0" marL="0">
+              <a:lnSpc>
+                <a:spcPts val="1680"/>
+              </a:lnSpc>
+              <a:spcBef>
+                <a:spcPts val="300"/>
+              </a:spcBef>
+              <a:spcAft>
+                <a:spcPts val="300"/>
+              </a:spcAft>
+              <a:buNone/>
+            </a:pPr>
+            <a:r>
+              <a:rPr lang="en-US" sz="1200" dirty="0">
+                <a:solidFill>
+                  <a:srgbClr val="1C2833"/>
+                </a:solidFill>
+                <a:latin typeface="Arial" pitchFamily="34" charset="0"/>
+                <a:ea typeface="Arial" pitchFamily="34" charset="-122"/>
+                <a:cs typeface="Arial" pitchFamily="34" charset="-120"/>
+              </a:rPr>
+              <a:t>Middle ·  · IKS Curriculum</a:t>
+            </a:r>
+            <a:endParaRPr lang="en-US" sz="1200" dirty="0"/>
+          </a:p>
+        </p:txBody>
+      </p:sp>
+    </p:spTree>
+  </p:cSld>
+  <p:clrMapOvr>
+    <a:masterClrMapping/>
+  </p:clrMapOvr>
+</p:sld>
+</file>
+
+<file path=ppt/slides/slide18.xml><?xml version="1.0" encoding="utf-8"?>
+<p:sld xmlns:a="http://schemas.openxmlformats.org/drawingml/2006/main" xmlns:r="http://schemas.openxmlformats.org/officeDocument/2006/relationships" xmlns:p="http://schemas.openxmlformats.org/presentationml/2006/main">
+  <p:cSld name="Slide 18">
+    <p:bg>
+      <p:bgPr>
+        <a:solidFill>
+          <a:srgbClr val="FFFFFF"/>
+        </a:solidFill>
+      </p:bgPr>
+    </p:bg>
+    <p:spTree>
+      <p:nvGrpSpPr>
+        <p:cNvPr id="1" name=""/>
+        <p:cNvGrpSpPr/>
+        <p:nvPr/>
+      </p:nvGrpSpPr>
+      <p:grpSpPr>
+        <a:xfrm>
+          <a:off x="0" y="0"/>
+          <a:ext cx="0" cy="0"/>
+          <a:chOff x="0" y="0"/>
+          <a:chExt cx="0" cy="0"/>
+        </a:xfrm>
+      </p:grpSpPr>
+      <p:sp>
+        <p:nvSpPr>
+          <p:cNvPr id="2" name="Text 0"/>
+          <p:cNvSpPr/>
+          <p:nvPr/>
+        </p:nvSpPr>
+        <p:spPr>
+          <a:xfrm>
+            <a:off x="0" y="0"/>
+            <a:ext cx="9144000" cy="101501"/>
+          </a:xfrm>
+          <a:prstGeom prst="rect">
+            <a:avLst/>
+          </a:prstGeom>
+          <a:solidFill>
+            <a:srgbClr val="277884"/>
+          </a:solidFill>
+          <a:ln/>
+        </p:spPr>
+        <p:txBody>
+          <a:bodyPr wrap="square" rtlCol="0" anchor="ctr"/>
+          <a:lstStyle/>
+          <a:p>
+            <a:pPr indent="0" marL="0">
+              <a:buNone/>
+            </a:pPr>
+            <a:endParaRPr lang="en-US" dirty="0"/>
+          </a:p>
+        </p:txBody>
+      </p:sp>
+      <p:sp>
+        <p:nvSpPr>
+          <p:cNvPr id="3" name="Text 1"/>
+          <p:cNvSpPr/>
+          <p:nvPr/>
+        </p:nvSpPr>
+        <p:spPr>
+          <a:xfrm>
+            <a:off x="406301" y="457051"/>
+            <a:ext cx="8498026" cy="274290"/>
+          </a:xfrm>
+          <a:prstGeom prst="rect">
+            <a:avLst/>
+          </a:prstGeom>
+          <a:noFill/>
+          <a:ln/>
+        </p:spPr>
+        <p:txBody>
+          <a:bodyPr wrap="square" lIns="0" tIns="0" rIns="0" bIns="0" rtlCol="0" anchor="t"/>
+          <a:lstStyle/>
+          <a:p>
+            <a:pPr algn="l" indent="0" marL="0">
+              <a:lnSpc>
+                <a:spcPts val="2160"/>
+              </a:lnSpc>
+              <a:spcBef>
+                <a:spcPts val="600"/>
+              </a:spcBef>
+              <a:spcAft>
+                <a:spcPts val="800"/>
+              </a:spcAft>
+              <a:buNone/>
+            </a:pPr>
+            <a:r>
+              <a:rPr lang="en-US" sz="1800" b="1" dirty="0">
+                <a:solidFill>
+                  <a:srgbClr val="FE4447"/>
+                </a:solidFill>
+                <a:latin typeface="Georgia" pitchFamily="34" charset="0"/>
+                <a:ea typeface="Georgia" pitchFamily="34" charset="-122"/>
+                <a:cs typeface="Georgia" pitchFamily="34" charset="-120"/>
+              </a:rPr>
+              <a:t>Differentiation</a:t>
+            </a:r>
+            <a:endParaRPr lang="en-US" sz="1800" dirty="0"/>
+          </a:p>
+        </p:txBody>
+      </p:sp>
+      <p:sp>
+        <p:nvSpPr>
+          <p:cNvPr id="4" name="Text 2"/>
+          <p:cNvSpPr/>
+          <p:nvPr/>
+        </p:nvSpPr>
+        <p:spPr>
+          <a:xfrm>
+            <a:off x="634901" y="883593"/>
+            <a:ext cx="8102798" cy="731341"/>
+          </a:xfrm>
+          <a:prstGeom prst="rect">
+            <a:avLst/>
+          </a:prstGeom>
+          <a:noFill/>
+          <a:ln/>
+        </p:spPr>
+        <p:txBody>
+          <a:bodyPr wrap="square" lIns="0" tIns="0" rIns="0" bIns="0" rtlCol="0" anchor="t"/>
+          <a:lstStyle/>
+          <a:p>
+            <a:pPr algn="l" marL="342900" indent="-342900">
+              <a:lnSpc>
+                <a:spcPts val="1620"/>
+              </a:lnSpc>
+              <a:spcAft>
+                <a:spcPts val="300"/>
+              </a:spcAft>
+              <a:buSzPct val="100000"/>
+              <a:buChar char="•"/>
+            </a:pPr>
+            <a:r>
+              <a:rPr lang="en-US" sz="1200" b="1" dirty="0">
+                <a:solidFill>
+                  <a:srgbClr val="1C2833"/>
+                </a:solidFill>
+                <a:latin typeface="Arial" pitchFamily="34" charset="0"/>
+                <a:ea typeface="Arial" pitchFamily="34" charset="-122"/>
+                <a:cs typeface="Arial" pitchFamily="34" charset="-120"/>
+              </a:rPr>
+              <a:t>Tier up:</a:t>
+            </a:r>
+            <a:pPr algn="l" indent="0" marL="0">
+              <a:lnSpc>
+                <a:spcPts val="1620"/>
+              </a:lnSpc>
+              <a:spcAft>
+                <a:spcPts val="300"/>
+              </a:spcAft>
+              <a:buNone/>
+            </a:pPr>
+            <a:r>
+              <a:rPr lang="en-US" sz="1200" dirty="0">
+                <a:solidFill>
+                  <a:srgbClr val="1C2833"/>
+                </a:solidFill>
+                <a:latin typeface="Arial" pitchFamily="34" charset="0"/>
+                <a:ea typeface="Arial" pitchFamily="34" charset="-122"/>
+                <a:cs typeface="Arial" pitchFamily="34" charset="-120"/>
+              </a:rPr>
+              <a:t> Add the meanings of </a:t>
+            </a:r>
+            <a:pPr algn="l" indent="0" marL="0">
+              <a:lnSpc>
+                <a:spcPts val="1620"/>
+              </a:lnSpc>
+              <a:spcAft>
+                <a:spcPts val="300"/>
+              </a:spcAft>
+              <a:buNone/>
+            </a:pPr>
+            <a:r>
+              <a:rPr lang="en-US" sz="1200" i="1" dirty="0">
+                <a:solidFill>
+                  <a:srgbClr val="1C2833"/>
+                </a:solidFill>
+                <a:latin typeface="Arial" pitchFamily="34" charset="0"/>
+                <a:ea typeface="Arial" pitchFamily="34" charset="-122"/>
+                <a:cs typeface="Arial" pitchFamily="34" charset="-120"/>
+              </a:rPr>
+              <a:t>yama</a:t>
+            </a:r>
+            <a:pPr algn="l" indent="0" marL="0">
+              <a:lnSpc>
+                <a:spcPts val="1620"/>
+              </a:lnSpc>
+              <a:spcAft>
+                <a:spcPts val="300"/>
+              </a:spcAft>
+              <a:buNone/>
+            </a:pPr>
+            <a:r>
+              <a:rPr lang="en-US" sz="1200" dirty="0">
+                <a:solidFill>
+                  <a:srgbClr val="1C2833"/>
+                </a:solidFill>
+                <a:latin typeface="Arial" pitchFamily="34" charset="0"/>
+                <a:ea typeface="Arial" pitchFamily="34" charset="-122"/>
+                <a:cs typeface="Arial" pitchFamily="34" charset="-120"/>
+              </a:rPr>
+              <a:t> and </a:t>
+            </a:r>
+            <a:pPr algn="l" indent="0" marL="0">
+              <a:lnSpc>
+                <a:spcPts val="1620"/>
+              </a:lnSpc>
+              <a:spcAft>
+                <a:spcPts val="300"/>
+              </a:spcAft>
+              <a:buNone/>
+            </a:pPr>
+            <a:r>
+              <a:rPr lang="en-US" sz="1200" i="1" dirty="0">
+                <a:solidFill>
+                  <a:srgbClr val="1C2833"/>
+                </a:solidFill>
+                <a:latin typeface="Arial" pitchFamily="34" charset="0"/>
+                <a:ea typeface="Arial" pitchFamily="34" charset="-122"/>
+                <a:cs typeface="Arial" pitchFamily="34" charset="-120"/>
+              </a:rPr>
+              <a:t>niyama</a:t>
+            </a:r>
+            <a:pPr algn="l" indent="0" marL="0">
+              <a:lnSpc>
+                <a:spcPts val="1620"/>
+              </a:lnSpc>
+              <a:spcAft>
+                <a:spcPts val="300"/>
+              </a:spcAft>
+              <a:buNone/>
+            </a:pPr>
+            <a:r>
+              <a:rPr lang="en-US" sz="1200" dirty="0">
+                <a:solidFill>
+                  <a:srgbClr val="1C2833"/>
+                </a:solidFill>
+                <a:latin typeface="Arial" pitchFamily="34" charset="0"/>
+                <a:ea typeface="Arial" pitchFamily="34" charset="-122"/>
+                <a:cs typeface="Arial" pitchFamily="34" charset="-120"/>
+              </a:rPr>
+              <a:t> with at least 2 examples each (ahiṁsā, satya, śauca, santoṣa, etc.).</a:t>
+            </a:r>
+            <a:endParaRPr lang="en-US" sz="1200" dirty="0"/>
+          </a:p>
+          <a:p>
+            <a:pPr algn="l" marL="342900" indent="-342900">
+              <a:lnSpc>
+                <a:spcPts val="1620"/>
+              </a:lnSpc>
+              <a:spcAft>
+                <a:spcPts val="300"/>
+              </a:spcAft>
+              <a:buSzPct val="100000"/>
+              <a:buChar char="•"/>
+            </a:pPr>
+            <a:r>
+              <a:rPr lang="en-US" sz="1200" b="1" dirty="0">
+                <a:solidFill>
+                  <a:srgbClr val="1C2833"/>
+                </a:solidFill>
+                <a:latin typeface="Arial" pitchFamily="34" charset="0"/>
+                <a:ea typeface="Arial" pitchFamily="34" charset="-122"/>
+                <a:cs typeface="Arial" pitchFamily="34" charset="-120"/>
+              </a:rPr>
+              <a:t>Tier down:</a:t>
+            </a:r>
+            <a:pPr algn="l" indent="0" marL="0">
+              <a:lnSpc>
+                <a:spcPts val="1620"/>
+              </a:lnSpc>
+              <a:spcAft>
+                <a:spcPts val="300"/>
+              </a:spcAft>
+              <a:buNone/>
+            </a:pPr>
+            <a:r>
+              <a:rPr lang="en-US" sz="1200" dirty="0">
+                <a:solidFill>
+                  <a:srgbClr val="1C2833"/>
+                </a:solidFill>
+                <a:latin typeface="Arial" pitchFamily="34" charset="0"/>
+                <a:ea typeface="Arial" pitchFamily="34" charset="-122"/>
+                <a:cs typeface="Arial" pitchFamily="34" charset="-120"/>
+              </a:rPr>
+              <a:t> Memorise just the 4 physical/body limbs (3, 4, 5) — āsana, prāṇāyāma, pratyāhāra — and the 1 mental endpoint (8 — samādhi). Build up.</a:t>
+            </a:r>
+            <a:endParaRPr lang="en-US" sz="1200" dirty="0"/>
+          </a:p>
+        </p:txBody>
+      </p:sp>
+      <p:sp>
+        <p:nvSpPr>
+          <p:cNvPr id="5" name="Text 3"/>
+          <p:cNvSpPr/>
+          <p:nvPr/>
+        </p:nvSpPr>
+        <p:spPr>
+          <a:xfrm>
+            <a:off x="406301" y="4434929"/>
+            <a:ext cx="8498026" cy="213271"/>
+          </a:xfrm>
+          <a:prstGeom prst="rect">
+            <a:avLst/>
+          </a:prstGeom>
+          <a:noFill/>
+          <a:ln/>
+        </p:spPr>
+        <p:txBody>
+          <a:bodyPr wrap="square" lIns="0" tIns="0" rIns="0" bIns="0" rtlCol="0" anchor="t"/>
+          <a:lstStyle/>
+          <a:p>
+            <a:pPr algn="l" indent="0" marL="0">
+              <a:lnSpc>
+                <a:spcPts val="1680"/>
+              </a:lnSpc>
+              <a:spcBef>
+                <a:spcPts val="300"/>
+              </a:spcBef>
+              <a:spcAft>
+                <a:spcPts val="300"/>
+              </a:spcAft>
+              <a:buNone/>
+            </a:pPr>
+            <a:r>
+              <a:rPr lang="en-US" sz="1200" dirty="0">
+                <a:solidFill>
+                  <a:srgbClr val="1C2833"/>
+                </a:solidFill>
+                <a:latin typeface="Arial" pitchFamily="34" charset="0"/>
+                <a:ea typeface="Arial" pitchFamily="34" charset="-122"/>
+                <a:cs typeface="Arial" pitchFamily="34" charset="-120"/>
+              </a:rPr>
+              <a:t>Middle ·  · IKS Curriculum</a:t>
+            </a:r>
+            <a:endParaRPr lang="en-US" sz="1200" dirty="0"/>
+          </a:p>
+        </p:txBody>
+      </p:sp>
+    </p:spTree>
+  </p:cSld>
+  <p:clrMapOvr>
+    <a:masterClrMapping/>
+  </p:clrMapOvr>
+</p:sld>
+</file>
+
+<file path=ppt/slides/slide19.xml><?xml version="1.0" encoding="utf-8"?>
+<p:sld xmlns:a="http://schemas.openxmlformats.org/drawingml/2006/main" xmlns:r="http://schemas.openxmlformats.org/officeDocument/2006/relationships" xmlns:p="http://schemas.openxmlformats.org/presentationml/2006/main">
+  <p:cSld name="Slide 19">
+    <p:bg>
+      <p:bgPr>
+        <a:solidFill>
+          <a:srgbClr val="FFFFFF"/>
+        </a:solidFill>
+      </p:bgPr>
+    </p:bg>
+    <p:spTree>
+      <p:nvGrpSpPr>
+        <p:cNvPr id="1" name=""/>
+        <p:cNvGrpSpPr/>
+        <p:nvPr/>
+      </p:nvGrpSpPr>
+      <p:grpSpPr>
+        <a:xfrm>
+          <a:off x="0" y="0"/>
+          <a:ext cx="0" cy="0"/>
+          <a:chOff x="0" y="0"/>
+          <a:chExt cx="0" cy="0"/>
+        </a:xfrm>
+      </p:grpSpPr>
+      <p:sp>
+        <p:nvSpPr>
+          <p:cNvPr id="2" name="Text 0"/>
+          <p:cNvSpPr/>
+          <p:nvPr/>
+        </p:nvSpPr>
+        <p:spPr>
+          <a:xfrm>
+            <a:off x="0" y="0"/>
+            <a:ext cx="9144000" cy="101501"/>
+          </a:xfrm>
+          <a:prstGeom prst="rect">
+            <a:avLst/>
+          </a:prstGeom>
+          <a:solidFill>
+            <a:srgbClr val="277884"/>
+          </a:solidFill>
+          <a:ln/>
+        </p:spPr>
+        <p:txBody>
+          <a:bodyPr wrap="square" rtlCol="0" anchor="ctr"/>
+          <a:lstStyle/>
+          <a:p>
+            <a:pPr indent="0" marL="0">
+              <a:buNone/>
+            </a:pPr>
+            <a:endParaRPr lang="en-US" dirty="0"/>
+          </a:p>
+        </p:txBody>
+      </p:sp>
+      <p:sp>
+        <p:nvSpPr>
+          <p:cNvPr id="3" name="Text 1"/>
+          <p:cNvSpPr/>
+          <p:nvPr/>
+        </p:nvSpPr>
+        <p:spPr>
+          <a:xfrm>
+            <a:off x="406301" y="457051"/>
+            <a:ext cx="8498026" cy="274290"/>
+          </a:xfrm>
+          <a:prstGeom prst="rect">
+            <a:avLst/>
+          </a:prstGeom>
+          <a:noFill/>
+          <a:ln/>
+        </p:spPr>
+        <p:txBody>
+          <a:bodyPr wrap="square" lIns="0" tIns="0" rIns="0" bIns="0" rtlCol="0" anchor="t"/>
+          <a:lstStyle/>
+          <a:p>
+            <a:pPr algn="l" indent="0" marL="0">
+              <a:lnSpc>
+                <a:spcPts val="2160"/>
+              </a:lnSpc>
+              <a:spcBef>
+                <a:spcPts val="600"/>
+              </a:spcBef>
+              <a:spcAft>
+                <a:spcPts val="800"/>
+              </a:spcAft>
+              <a:buNone/>
+            </a:pPr>
+            <a:r>
+              <a:rPr lang="en-US" sz="1800" b="1" dirty="0">
+                <a:solidFill>
+                  <a:srgbClr val="FE4447"/>
+                </a:solidFill>
+                <a:latin typeface="Georgia" pitchFamily="34" charset="0"/>
+                <a:ea typeface="Georgia" pitchFamily="34" charset="-122"/>
+                <a:cs typeface="Georgia" pitchFamily="34" charset="-120"/>
+              </a:rPr>
+              <a:t>Teacher notes</a:t>
+            </a:r>
+            <a:endParaRPr lang="en-US" sz="1800" dirty="0"/>
+          </a:p>
+        </p:txBody>
+      </p:sp>
+      <p:sp>
+        <p:nvSpPr>
+          <p:cNvPr id="4" name="Text 2"/>
+          <p:cNvSpPr/>
+          <p:nvPr/>
+        </p:nvSpPr>
+        <p:spPr>
+          <a:xfrm>
+            <a:off x="634901" y="883593"/>
+            <a:ext cx="8102798" cy="1180802"/>
+          </a:xfrm>
+          <a:prstGeom prst="rect">
+            <a:avLst/>
+          </a:prstGeom>
+          <a:noFill/>
+          <a:ln/>
+        </p:spPr>
+        <p:txBody>
+          <a:bodyPr wrap="square" lIns="0" tIns="0" rIns="0" bIns="0" rtlCol="0" anchor="t"/>
+          <a:lstStyle/>
+          <a:p>
+            <a:pPr algn="l" marL="342900" indent="-342900">
+              <a:lnSpc>
+                <a:spcPts val="1620"/>
+              </a:lnSpc>
+              <a:spcAft>
+                <a:spcPts val="300"/>
+              </a:spcAft>
+              <a:buSzPct val="100000"/>
+              <a:buChar char="•"/>
+            </a:pPr>
+            <a:r>
+              <a:rPr lang="en-US" sz="1200" dirty="0">
+                <a:solidFill>
+                  <a:srgbClr val="1C2833"/>
+                </a:solidFill>
+                <a:latin typeface="Arial" pitchFamily="34" charset="0"/>
+                <a:ea typeface="Arial" pitchFamily="34" charset="-122"/>
+                <a:cs typeface="Arial" pitchFamily="34" charset="-120"/>
+              </a:rPr>
+              <a:t>The Sanskrit names will be slippery for some students. Daily chorus repetition helps; create a hand gesture per limb for the kinesthetic learners.</a:t>
+            </a:r>
+            <a:endParaRPr lang="en-US" sz="1200" dirty="0"/>
+          </a:p>
+          <a:p>
+            <a:pPr algn="l" marL="342900" indent="-342900">
+              <a:lnSpc>
+                <a:spcPts val="1620"/>
+              </a:lnSpc>
+              <a:spcAft>
+                <a:spcPts val="300"/>
+              </a:spcAft>
+              <a:buSzPct val="100000"/>
+              <a:buChar char="•"/>
+            </a:pPr>
+            <a:r>
+              <a:rPr lang="en-US" sz="1200" dirty="0">
+                <a:solidFill>
+                  <a:srgbClr val="1C2833"/>
+                </a:solidFill>
+                <a:latin typeface="Arial" pitchFamily="34" charset="0"/>
+                <a:ea typeface="Arial" pitchFamily="34" charset="-122"/>
+                <a:cs typeface="Arial" pitchFamily="34" charset="-120"/>
+              </a:rPr>
+              <a:t>Watch knee placement during vṛkṣāsana — the foot must NOT press into the side of the knee (medial cruciate strain risk). Foot above OR below the knee, never on it.</a:t>
+            </a:r>
+            <a:endParaRPr lang="en-US" sz="1200" dirty="0"/>
+          </a:p>
+          <a:p>
+            <a:pPr algn="l" marL="342900" indent="-342900">
+              <a:lnSpc>
+                <a:spcPts val="1620"/>
+              </a:lnSpc>
+              <a:spcAft>
+                <a:spcPts val="300"/>
+              </a:spcAft>
+              <a:buSzPct val="100000"/>
+              <a:buChar char="•"/>
+            </a:pPr>
+            <a:r>
+              <a:rPr lang="en-US" sz="1200" dirty="0">
+                <a:solidFill>
+                  <a:srgbClr val="1C2833"/>
+                </a:solidFill>
+                <a:latin typeface="Arial" pitchFamily="34" charset="0"/>
+                <a:ea typeface="Arial" pitchFamily="34" charset="-122"/>
+                <a:cs typeface="Arial" pitchFamily="34" charset="-120"/>
+              </a:rPr>
+              <a:t>If a student falls during balance, normalise it: "wobbling is what balance learning looks like."</a:t>
             </a:r>
             <a:endParaRPr lang="en-US" sz="1200" dirty="0"/>
           </a:p>
@@ -4488,7 +6832,7 @@
                 <a:ea typeface="Georgia" pitchFamily="34" charset="-122"/>
                 <a:cs typeface="Georgia" pitchFamily="34" charset="-120"/>
               </a:rPr>
-              <a:t>Materials</a:t>
+              <a:t>Learning objective</a:t>
             </a:r>
             <a:endParaRPr lang="en-US" sz="1800" dirty="0"/>
           </a:p>
@@ -4536,7 +6880,331 @@
                 <a:ea typeface="Arial" pitchFamily="34" charset="-122"/>
                 <a:cs typeface="Arial" pitchFamily="34" charset="-120"/>
               </a:rPr>
-              <a:t>– Wall chart (or board diagram) showing the 8 limbs as a vertical or circular arrangement. – Worksheet: limb-matching exit ticket.</a:t>
+              <a:t>By the end of this lesson, students will name all eight limbs of Patañjali's yoga in order and identify which limbs are physical, which are mental, and which are about ethical conduct.</a:t>
+            </a:r>
+            <a:endParaRPr lang="en-US" sz="1200" dirty="0"/>
+          </a:p>
+        </p:txBody>
+      </p:sp>
+      <p:sp>
+        <p:nvSpPr>
+          <p:cNvPr id="5" name="Text 3"/>
+          <p:cNvSpPr/>
+          <p:nvPr/>
+        </p:nvSpPr>
+        <p:spPr>
+          <a:xfrm>
+            <a:off x="406301" y="4434929"/>
+            <a:ext cx="8498026" cy="213271"/>
+          </a:xfrm>
+          <a:prstGeom prst="rect">
+            <a:avLst/>
+          </a:prstGeom>
+          <a:noFill/>
+          <a:ln/>
+        </p:spPr>
+        <p:txBody>
+          <a:bodyPr wrap="square" lIns="0" tIns="0" rIns="0" bIns="0" rtlCol="0" anchor="t"/>
+          <a:lstStyle/>
+          <a:p>
+            <a:pPr algn="l" indent="0" marL="0">
+              <a:lnSpc>
+                <a:spcPts val="1680"/>
+              </a:lnSpc>
+              <a:spcBef>
+                <a:spcPts val="300"/>
+              </a:spcBef>
+              <a:spcAft>
+                <a:spcPts val="300"/>
+              </a:spcAft>
+              <a:buNone/>
+            </a:pPr>
+            <a:r>
+              <a:rPr lang="en-US" sz="1200" dirty="0">
+                <a:solidFill>
+                  <a:srgbClr val="1C2833"/>
+                </a:solidFill>
+                <a:latin typeface="Arial" pitchFamily="34" charset="0"/>
+                <a:ea typeface="Arial" pitchFamily="34" charset="-122"/>
+                <a:cs typeface="Arial" pitchFamily="34" charset="-120"/>
+              </a:rPr>
+              <a:t>Middle ·  · IKS Curriculum</a:t>
+            </a:r>
+            <a:endParaRPr lang="en-US" sz="1200" dirty="0"/>
+          </a:p>
+        </p:txBody>
+      </p:sp>
+    </p:spTree>
+  </p:cSld>
+  <p:clrMapOvr>
+    <a:masterClrMapping/>
+  </p:clrMapOvr>
+</p:sld>
+</file>
+
+<file path=ppt/slides/slide20.xml><?xml version="1.0" encoding="utf-8"?>
+<p:sld xmlns:a="http://schemas.openxmlformats.org/drawingml/2006/main" xmlns:r="http://schemas.openxmlformats.org/officeDocument/2006/relationships" xmlns:p="http://schemas.openxmlformats.org/presentationml/2006/main">
+  <p:cSld name="Slide 20">
+    <p:bg>
+      <p:bgPr>
+        <a:solidFill>
+          <a:srgbClr val="FFFFFF"/>
+        </a:solidFill>
+      </p:bgPr>
+    </p:bg>
+    <p:spTree>
+      <p:nvGrpSpPr>
+        <p:cNvPr id="1" name=""/>
+        <p:cNvGrpSpPr/>
+        <p:nvPr/>
+      </p:nvGrpSpPr>
+      <p:grpSpPr>
+        <a:xfrm>
+          <a:off x="0" y="0"/>
+          <a:ext cx="0" cy="0"/>
+          <a:chOff x="0" y="0"/>
+          <a:chExt cx="0" cy="0"/>
+        </a:xfrm>
+      </p:grpSpPr>
+      <p:sp>
+        <p:nvSpPr>
+          <p:cNvPr id="2" name="Text 0"/>
+          <p:cNvSpPr/>
+          <p:nvPr/>
+        </p:nvSpPr>
+        <p:spPr>
+          <a:xfrm>
+            <a:off x="0" y="0"/>
+            <a:ext cx="9144000" cy="101501"/>
+          </a:xfrm>
+          <a:prstGeom prst="rect">
+            <a:avLst/>
+          </a:prstGeom>
+          <a:solidFill>
+            <a:srgbClr val="277884"/>
+          </a:solidFill>
+          <a:ln/>
+        </p:spPr>
+        <p:txBody>
+          <a:bodyPr wrap="square" rtlCol="0" anchor="ctr"/>
+          <a:lstStyle/>
+          <a:p>
+            <a:pPr indent="0" marL="0">
+              <a:buNone/>
+            </a:pPr>
+            <a:endParaRPr lang="en-US" dirty="0"/>
+          </a:p>
+        </p:txBody>
+      </p:sp>
+      <p:sp>
+        <p:nvSpPr>
+          <p:cNvPr id="3" name="Text 1"/>
+          <p:cNvSpPr/>
+          <p:nvPr/>
+        </p:nvSpPr>
+        <p:spPr>
+          <a:xfrm>
+            <a:off x="406301" y="457051"/>
+            <a:ext cx="8498026" cy="274290"/>
+          </a:xfrm>
+          <a:prstGeom prst="rect">
+            <a:avLst/>
+          </a:prstGeom>
+          <a:noFill/>
+          <a:ln/>
+        </p:spPr>
+        <p:txBody>
+          <a:bodyPr wrap="square" lIns="0" tIns="0" rIns="0" bIns="0" rtlCol="0" anchor="t"/>
+          <a:lstStyle/>
+          <a:p>
+            <a:pPr algn="l" indent="0" marL="0">
+              <a:lnSpc>
+                <a:spcPts val="2160"/>
+              </a:lnSpc>
+              <a:spcBef>
+                <a:spcPts val="600"/>
+              </a:spcBef>
+              <a:spcAft>
+                <a:spcPts val="800"/>
+              </a:spcAft>
+              <a:buNone/>
+            </a:pPr>
+            <a:r>
+              <a:rPr lang="en-US" sz="1800" b="1" dirty="0">
+                <a:solidFill>
+                  <a:srgbClr val="FE4447"/>
+                </a:solidFill>
+                <a:latin typeface="Georgia" pitchFamily="34" charset="0"/>
+                <a:ea typeface="Georgia" pitchFamily="34" charset="-122"/>
+                <a:cs typeface="Georgia" pitchFamily="34" charset="-120"/>
+              </a:rPr>
+              <a:t>Citation(s) used in this lesson</a:t>
+            </a:r>
+            <a:endParaRPr lang="en-US" sz="1800" dirty="0"/>
+          </a:p>
+        </p:txBody>
+      </p:sp>
+      <p:sp>
+        <p:nvSpPr>
+          <p:cNvPr id="4" name="Text 2"/>
+          <p:cNvSpPr/>
+          <p:nvPr/>
+        </p:nvSpPr>
+        <p:spPr>
+          <a:xfrm>
+            <a:off x="634901" y="883593"/>
+            <a:ext cx="8102798" cy="506611"/>
+          </a:xfrm>
+          <a:prstGeom prst="rect">
+            <a:avLst/>
+          </a:prstGeom>
+          <a:noFill/>
+          <a:ln/>
+        </p:spPr>
+        <p:txBody>
+          <a:bodyPr wrap="square" lIns="0" tIns="0" rIns="0" bIns="0" rtlCol="0" anchor="t"/>
+          <a:lstStyle/>
+          <a:p>
+            <a:pPr algn="l" marL="342900" indent="-342900">
+              <a:lnSpc>
+                <a:spcPts val="1620"/>
+              </a:lnSpc>
+              <a:spcAft>
+                <a:spcPts val="300"/>
+              </a:spcAft>
+              <a:buSzPct val="100000"/>
+              <a:buChar char="•"/>
+            </a:pPr>
+            <a:r>
+              <a:rPr lang="en-US" sz="1200" dirty="0">
+                <a:solidFill>
+                  <a:srgbClr val="1C2833"/>
+                </a:solidFill>
+                <a:latin typeface="Arial" pitchFamily="34" charset="0"/>
+                <a:ea typeface="Arial" pitchFamily="34" charset="-122"/>
+                <a:cs typeface="Arial" pitchFamily="34" charset="-120"/>
+              </a:rPr>
+              <a:t>vidya-karana RAG cache </a:t>
+            </a:r>
+            <a:pPr algn="l" indent="0" marL="0">
+              <a:lnSpc>
+                <a:spcPts val="1620"/>
+              </a:lnSpc>
+              <a:spcAft>
+                <a:spcPts val="300"/>
+              </a:spcAft>
+              <a:buNone/>
+            </a:pPr>
+            <a:r>
+              <a:rPr lang="en-US" sz="1200" dirty="0">
+                <a:solidFill>
+                  <a:srgbClr val="1C2833"/>
+                </a:solidFill>
+                <a:latin typeface="Arial" pitchFamily="34" charset="0"/>
+                <a:ea typeface="Arial" pitchFamily="34" charset="-122"/>
+                <a:cs typeface="Arial" pitchFamily="34" charset="-120"/>
+              </a:rPr>
+              <a:t>day-02-eightlimbs.json</a:t>
+            </a:r>
+            <a:pPr algn="l" indent="0" marL="0">
+              <a:lnSpc>
+                <a:spcPts val="1620"/>
+              </a:lnSpc>
+              <a:spcAft>
+                <a:spcPts val="300"/>
+              </a:spcAft>
+              <a:buNone/>
+            </a:pPr>
+            <a:r>
+              <a:rPr lang="en-US" sz="1200" dirty="0">
+                <a:solidFill>
+                  <a:srgbClr val="1C2833"/>
+                </a:solidFill>
+                <a:latin typeface="Arial" pitchFamily="34" charset="0"/>
+                <a:ea typeface="Arial" pitchFamily="34" charset="-122"/>
+                <a:cs typeface="Arial" pitchFamily="34" charset="-120"/>
+              </a:rPr>
+              <a:t> — chunks from SB 3 purport, </a:t>
+            </a:r>
+            <a:pPr algn="l" indent="0" marL="0">
+              <a:lnSpc>
+                <a:spcPts val="1620"/>
+              </a:lnSpc>
+              <a:spcAft>
+                <a:spcPts val="300"/>
+              </a:spcAft>
+              <a:buNone/>
+            </a:pPr>
+            <a:r>
+              <a:rPr lang="en-US" sz="1200" i="1" dirty="0">
+                <a:solidFill>
+                  <a:srgbClr val="1C2833"/>
+                </a:solidFill>
+                <a:latin typeface="Arial" pitchFamily="34" charset="0"/>
+                <a:ea typeface="Arial" pitchFamily="34" charset="-122"/>
+                <a:cs typeface="Arial" pitchFamily="34" charset="-120"/>
+              </a:rPr>
+              <a:t>Veda, Secrets from the East</a:t>
+            </a:r>
+            <a:pPr algn="l" indent="0" marL="0">
+              <a:lnSpc>
+                <a:spcPts val="1620"/>
+              </a:lnSpc>
+              <a:spcAft>
+                <a:spcPts val="300"/>
+              </a:spcAft>
+              <a:buNone/>
+            </a:pPr>
+            <a:r>
+              <a:rPr lang="en-US" sz="1200" dirty="0">
+                <a:solidFill>
+                  <a:srgbClr val="1C2833"/>
+                </a:solidFill>
+                <a:latin typeface="Arial" pitchFamily="34" charset="0"/>
+                <a:ea typeface="Arial" pitchFamily="34" charset="-122"/>
+                <a:cs typeface="Arial" pitchFamily="34" charset="-120"/>
+              </a:rPr>
+              <a:t>, </a:t>
+            </a:r>
+            <a:pPr algn="l" indent="0" marL="0">
+              <a:lnSpc>
+                <a:spcPts val="1620"/>
+              </a:lnSpc>
+              <a:spcAft>
+                <a:spcPts val="300"/>
+              </a:spcAft>
+              <a:buNone/>
+            </a:pPr>
+            <a:r>
+              <a:rPr lang="en-US" sz="1200" i="1" dirty="0">
+                <a:solidFill>
+                  <a:srgbClr val="1C2833"/>
+                </a:solidFill>
+                <a:latin typeface="Arial" pitchFamily="34" charset="0"/>
+                <a:ea typeface="Arial" pitchFamily="34" charset="-122"/>
+                <a:cs typeface="Arial" pitchFamily="34" charset="-120"/>
+              </a:rPr>
+              <a:t>Journey of Self Discovery</a:t>
+            </a:r>
+            <a:pPr algn="l" indent="0" marL="0">
+              <a:lnSpc>
+                <a:spcPts val="1620"/>
+              </a:lnSpc>
+              <a:spcAft>
+                <a:spcPts val="300"/>
+              </a:spcAft>
+              <a:buNone/>
+            </a:pPr>
+            <a:r>
+              <a:rPr lang="en-US" sz="1200" dirty="0">
+                <a:solidFill>
+                  <a:srgbClr val="1C2833"/>
+                </a:solidFill>
+                <a:latin typeface="Arial" pitchFamily="34" charset="0"/>
+                <a:ea typeface="Arial" pitchFamily="34" charset="-122"/>
+                <a:cs typeface="Arial" pitchFamily="34" charset="-120"/>
+              </a:rPr>
+              <a:t>.</a:t>
             </a:r>
             <a:endParaRPr lang="en-US" sz="1200" dirty="0"/>
           </a:p>
@@ -4694,7 +7362,7 @@
                 <a:ea typeface="Georgia" pitchFamily="34" charset="-122"/>
                 <a:cs typeface="Georgia" pitchFamily="34" charset="-120"/>
               </a:rPr>
-              <a:t>Vocabulary introduced today</a:t>
+              <a:t>Materials</a:t>
             </a:r>
             <a:endParaRPr lang="en-US" sz="1800" dirty="0"/>
           </a:p>
@@ -4709,7 +7377,7 @@
         <p:spPr>
           <a:xfrm>
             <a:off x="634901" y="883593"/>
-            <a:ext cx="8102798" cy="281880"/>
+            <a:ext cx="8102798" cy="525661"/>
           </a:xfrm>
           <a:prstGeom prst="rect">
             <a:avLst/>
@@ -4732,26 +7400,6 @@
               <a:buChar char="•"/>
             </a:pPr>
             <a:r>
-              <a:rPr lang="en-US" sz="1200" i="1" dirty="0">
-                <a:solidFill>
-                  <a:srgbClr val="1C2833"/>
-                </a:solidFill>
-                <a:latin typeface="Arial" pitchFamily="34" charset="0"/>
-                <a:ea typeface="Arial" pitchFamily="34" charset="-122"/>
-                <a:cs typeface="Arial" pitchFamily="34" charset="-120"/>
-              </a:rPr>
-              <a:t>aṣṭāṅga</a:t>
-            </a:r>
-            <a:pPr algn="l" indent="0" marL="0">
-              <a:lnSpc>
-                <a:spcPts val="1620"/>
-              </a:lnSpc>
-              <a:spcAft>
-                <a:spcPts val="300"/>
-              </a:spcAft>
-              <a:buNone/>
-            </a:pPr>
-            <a:r>
               <a:rPr lang="en-US" sz="1200" dirty="0">
                 <a:solidFill>
                   <a:srgbClr val="1C2833"/>
@@ -4760,431 +7408,39 @@
                 <a:ea typeface="Arial" pitchFamily="34" charset="-122"/>
                 <a:cs typeface="Arial" pitchFamily="34" charset="-120"/>
               </a:rPr>
-              <a:t> (IAST: aṣṭāṅga; lit. "eight-limbed") — Patañjali's eight-stage scheme.</a:t>
+              <a:t>Wall chart (or board diagram) showing the 8 limbs as a vertical or circular arrangement.</a:t>
             </a:r>
             <a:endParaRPr lang="en-US" sz="1200" dirty="0"/>
           </a:p>
+          <a:p>
+            <a:pPr algn="l" marL="342900" indent="-342900">
+              <a:lnSpc>
+                <a:spcPts val="1620"/>
+              </a:lnSpc>
+              <a:spcAft>
+                <a:spcPts val="300"/>
+              </a:spcAft>
+              <a:buSzPct val="100000"/>
+              <a:buChar char="•"/>
+            </a:pPr>
+            <a:r>
+              <a:rPr lang="en-US" sz="1200" dirty="0">
+                <a:solidFill>
+                  <a:srgbClr val="1C2833"/>
+                </a:solidFill>
+                <a:latin typeface="Arial" pitchFamily="34" charset="0"/>
+                <a:ea typeface="Arial" pitchFamily="34" charset="-122"/>
+                <a:cs typeface="Arial" pitchFamily="34" charset="-120"/>
+              </a:rPr>
+              <a:t>Worksheet: limb-matching exit ticket.</a:t>
+            </a:r>
+            <a:endParaRPr lang="en-US" sz="1200" dirty="0"/>
+          </a:p>
         </p:txBody>
       </p:sp>
       <p:sp>
         <p:nvSpPr>
           <p:cNvPr id="5" name="Text 3"/>
-          <p:cNvSpPr/>
-          <p:nvPr/>
-        </p:nvSpPr>
-        <p:spPr>
-          <a:xfrm>
-            <a:off x="406301" y="1254323"/>
-            <a:ext cx="8498026" cy="639812"/>
-          </a:xfrm>
-          <a:prstGeom prst="rect">
-            <a:avLst/>
-          </a:prstGeom>
-          <a:noFill/>
-          <a:ln/>
-        </p:spPr>
-        <p:txBody>
-          <a:bodyPr wrap="square" lIns="0" tIns="0" rIns="0" bIns="0" rtlCol="0" anchor="t"/>
-          <a:lstStyle/>
-          <a:p>
-            <a:pPr algn="l" indent="0" marL="0">
-              <a:lnSpc>
-                <a:spcPts val="1680"/>
-              </a:lnSpc>
-              <a:spcBef>
-                <a:spcPts val="300"/>
-              </a:spcBef>
-              <a:spcAft>
-                <a:spcPts val="300"/>
-              </a:spcAft>
-              <a:buNone/>
-            </a:pPr>
-            <a:r>
-              <a:rPr lang="en-US" sz="1200" dirty="0">
-                <a:solidFill>
-                  <a:srgbClr val="1C2833"/>
-                </a:solidFill>
-                <a:latin typeface="Arial" pitchFamily="34" charset="0"/>
-                <a:ea typeface="Arial" pitchFamily="34" charset="-122"/>
-                <a:cs typeface="Arial" pitchFamily="34" charset="-120"/>
-              </a:rPr>
-              <a:t>– All eight limbs: - </a:t>
-            </a:r>
-            <a:pPr algn="l" indent="0" marL="0">
-              <a:lnSpc>
-                <a:spcPts val="1680"/>
-              </a:lnSpc>
-              <a:spcBef>
-                <a:spcPts val="300"/>
-              </a:spcBef>
-              <a:spcAft>
-                <a:spcPts val="300"/>
-              </a:spcAft>
-              <a:buNone/>
-            </a:pPr>
-            <a:r>
-              <a:rPr lang="en-US" sz="1200" i="1" dirty="0">
-                <a:solidFill>
-                  <a:srgbClr val="1C2833"/>
-                </a:solidFill>
-                <a:latin typeface="Arial" pitchFamily="34" charset="0"/>
-                <a:ea typeface="Arial" pitchFamily="34" charset="-122"/>
-                <a:cs typeface="Arial" pitchFamily="34" charset="-120"/>
-              </a:rPr>
-              <a:t>yama</a:t>
-            </a:r>
-            <a:pPr algn="l" indent="0" marL="0">
-              <a:lnSpc>
-                <a:spcPts val="1680"/>
-              </a:lnSpc>
-              <a:spcBef>
-                <a:spcPts val="300"/>
-              </a:spcBef>
-              <a:spcAft>
-                <a:spcPts val="300"/>
-              </a:spcAft>
-              <a:buNone/>
-            </a:pPr>
-            <a:r>
-              <a:rPr lang="en-US" sz="1200" dirty="0">
-                <a:solidFill>
-                  <a:srgbClr val="1C2833"/>
-                </a:solidFill>
-                <a:latin typeface="Arial" pitchFamily="34" charset="0"/>
-                <a:ea typeface="Arial" pitchFamily="34" charset="-122"/>
-                <a:cs typeface="Arial" pitchFamily="34" charset="-120"/>
-              </a:rPr>
-              <a:t> (ethical restraints) - </a:t>
-            </a:r>
-            <a:pPr algn="l" indent="0" marL="0">
-              <a:lnSpc>
-                <a:spcPts val="1680"/>
-              </a:lnSpc>
-              <a:spcBef>
-                <a:spcPts val="300"/>
-              </a:spcBef>
-              <a:spcAft>
-                <a:spcPts val="300"/>
-              </a:spcAft>
-              <a:buNone/>
-            </a:pPr>
-            <a:r>
-              <a:rPr lang="en-US" sz="1200" i="1" dirty="0">
-                <a:solidFill>
-                  <a:srgbClr val="1C2833"/>
-                </a:solidFill>
-                <a:latin typeface="Arial" pitchFamily="34" charset="0"/>
-                <a:ea typeface="Arial" pitchFamily="34" charset="-122"/>
-                <a:cs typeface="Arial" pitchFamily="34" charset="-120"/>
-              </a:rPr>
-              <a:t>niyama</a:t>
-            </a:r>
-            <a:pPr algn="l" indent="0" marL="0">
-              <a:lnSpc>
-                <a:spcPts val="1680"/>
-              </a:lnSpc>
-              <a:spcBef>
-                <a:spcPts val="300"/>
-              </a:spcBef>
-              <a:spcAft>
-                <a:spcPts val="300"/>
-              </a:spcAft>
-              <a:buNone/>
-            </a:pPr>
-            <a:r>
-              <a:rPr lang="en-US" sz="1200" dirty="0">
-                <a:solidFill>
-                  <a:srgbClr val="1C2833"/>
-                </a:solidFill>
-                <a:latin typeface="Arial" pitchFamily="34" charset="0"/>
-                <a:ea typeface="Arial" pitchFamily="34" charset="-122"/>
-                <a:cs typeface="Arial" pitchFamily="34" charset="-120"/>
-              </a:rPr>
-              <a:t> (personal observances) - </a:t>
-            </a:r>
-            <a:pPr algn="l" indent="0" marL="0">
-              <a:lnSpc>
-                <a:spcPts val="1680"/>
-              </a:lnSpc>
-              <a:spcBef>
-                <a:spcPts val="300"/>
-              </a:spcBef>
-              <a:spcAft>
-                <a:spcPts val="300"/>
-              </a:spcAft>
-              <a:buNone/>
-            </a:pPr>
-            <a:r>
-              <a:rPr lang="en-US" sz="1200" i="1" dirty="0">
-                <a:solidFill>
-                  <a:srgbClr val="1C2833"/>
-                </a:solidFill>
-                <a:latin typeface="Arial" pitchFamily="34" charset="0"/>
-                <a:ea typeface="Arial" pitchFamily="34" charset="-122"/>
-                <a:cs typeface="Arial" pitchFamily="34" charset="-120"/>
-              </a:rPr>
-              <a:t>āsana</a:t>
-            </a:r>
-            <a:pPr algn="l" indent="0" marL="0">
-              <a:lnSpc>
-                <a:spcPts val="1680"/>
-              </a:lnSpc>
-              <a:spcBef>
-                <a:spcPts val="300"/>
-              </a:spcBef>
-              <a:spcAft>
-                <a:spcPts val="300"/>
-              </a:spcAft>
-              <a:buNone/>
-            </a:pPr>
-            <a:r>
-              <a:rPr lang="en-US" sz="1200" dirty="0">
-                <a:solidFill>
-                  <a:srgbClr val="1C2833"/>
-                </a:solidFill>
-                <a:latin typeface="Arial" pitchFamily="34" charset="0"/>
-                <a:ea typeface="Arial" pitchFamily="34" charset="-122"/>
-                <a:cs typeface="Arial" pitchFamily="34" charset="-120"/>
-              </a:rPr>
-              <a:t> (posture) - </a:t>
-            </a:r>
-            <a:pPr algn="l" indent="0" marL="0">
-              <a:lnSpc>
-                <a:spcPts val="1680"/>
-              </a:lnSpc>
-              <a:spcBef>
-                <a:spcPts val="300"/>
-              </a:spcBef>
-              <a:spcAft>
-                <a:spcPts val="300"/>
-              </a:spcAft>
-              <a:buNone/>
-            </a:pPr>
-            <a:r>
-              <a:rPr lang="en-US" sz="1200" i="1" dirty="0">
-                <a:solidFill>
-                  <a:srgbClr val="1C2833"/>
-                </a:solidFill>
-                <a:latin typeface="Arial" pitchFamily="34" charset="0"/>
-                <a:ea typeface="Arial" pitchFamily="34" charset="-122"/>
-                <a:cs typeface="Arial" pitchFamily="34" charset="-120"/>
-              </a:rPr>
-              <a:t>prāṇāyāma</a:t>
-            </a:r>
-            <a:pPr algn="l" indent="0" marL="0">
-              <a:lnSpc>
-                <a:spcPts val="1680"/>
-              </a:lnSpc>
-              <a:spcBef>
-                <a:spcPts val="300"/>
-              </a:spcBef>
-              <a:spcAft>
-                <a:spcPts val="300"/>
-              </a:spcAft>
-              <a:buNone/>
-            </a:pPr>
-            <a:r>
-              <a:rPr lang="en-US" sz="1200" dirty="0">
-                <a:solidFill>
-                  <a:srgbClr val="1C2833"/>
-                </a:solidFill>
-                <a:latin typeface="Arial" pitchFamily="34" charset="0"/>
-                <a:ea typeface="Arial" pitchFamily="34" charset="-122"/>
-                <a:cs typeface="Arial" pitchFamily="34" charset="-120"/>
-              </a:rPr>
-              <a:t> (breath regulation) - </a:t>
-            </a:r>
-            <a:pPr algn="l" indent="0" marL="0">
-              <a:lnSpc>
-                <a:spcPts val="1680"/>
-              </a:lnSpc>
-              <a:spcBef>
-                <a:spcPts val="300"/>
-              </a:spcBef>
-              <a:spcAft>
-                <a:spcPts val="300"/>
-              </a:spcAft>
-              <a:buNone/>
-            </a:pPr>
-            <a:r>
-              <a:rPr lang="en-US" sz="1200" i="1" dirty="0">
-                <a:solidFill>
-                  <a:srgbClr val="1C2833"/>
-                </a:solidFill>
-                <a:latin typeface="Arial" pitchFamily="34" charset="0"/>
-                <a:ea typeface="Arial" pitchFamily="34" charset="-122"/>
-                <a:cs typeface="Arial" pitchFamily="34" charset="-120"/>
-              </a:rPr>
-              <a:t>pratyāhāra</a:t>
-            </a:r>
-            <a:pPr algn="l" indent="0" marL="0">
-              <a:lnSpc>
-                <a:spcPts val="1680"/>
-              </a:lnSpc>
-              <a:spcBef>
-                <a:spcPts val="300"/>
-              </a:spcBef>
-              <a:spcAft>
-                <a:spcPts val="300"/>
-              </a:spcAft>
-              <a:buNone/>
-            </a:pPr>
-            <a:r>
-              <a:rPr lang="en-US" sz="1200" dirty="0">
-                <a:solidFill>
-                  <a:srgbClr val="1C2833"/>
-                </a:solidFill>
-                <a:latin typeface="Arial" pitchFamily="34" charset="0"/>
-                <a:ea typeface="Arial" pitchFamily="34" charset="-122"/>
-                <a:cs typeface="Arial" pitchFamily="34" charset="-120"/>
-              </a:rPr>
-              <a:t> (sense-withdrawal) - </a:t>
-            </a:r>
-            <a:pPr algn="l" indent="0" marL="0">
-              <a:lnSpc>
-                <a:spcPts val="1680"/>
-              </a:lnSpc>
-              <a:spcBef>
-                <a:spcPts val="300"/>
-              </a:spcBef>
-              <a:spcAft>
-                <a:spcPts val="300"/>
-              </a:spcAft>
-              <a:buNone/>
-            </a:pPr>
-            <a:r>
-              <a:rPr lang="en-US" sz="1200" i="1" dirty="0">
-                <a:solidFill>
-                  <a:srgbClr val="1C2833"/>
-                </a:solidFill>
-                <a:latin typeface="Arial" pitchFamily="34" charset="0"/>
-                <a:ea typeface="Arial" pitchFamily="34" charset="-122"/>
-                <a:cs typeface="Arial" pitchFamily="34" charset="-120"/>
-              </a:rPr>
-              <a:t>dhāraṇā</a:t>
-            </a:r>
-            <a:pPr algn="l" indent="0" marL="0">
-              <a:lnSpc>
-                <a:spcPts val="1680"/>
-              </a:lnSpc>
-              <a:spcBef>
-                <a:spcPts val="300"/>
-              </a:spcBef>
-              <a:spcAft>
-                <a:spcPts val="300"/>
-              </a:spcAft>
-              <a:buNone/>
-            </a:pPr>
-            <a:r>
-              <a:rPr lang="en-US" sz="1200" dirty="0">
-                <a:solidFill>
-                  <a:srgbClr val="1C2833"/>
-                </a:solidFill>
-                <a:latin typeface="Arial" pitchFamily="34" charset="0"/>
-                <a:ea typeface="Arial" pitchFamily="34" charset="-122"/>
-                <a:cs typeface="Arial" pitchFamily="34" charset="-120"/>
-              </a:rPr>
-              <a:t> (focused attention) - </a:t>
-            </a:r>
-            <a:pPr algn="l" indent="0" marL="0">
-              <a:lnSpc>
-                <a:spcPts val="1680"/>
-              </a:lnSpc>
-              <a:spcBef>
-                <a:spcPts val="300"/>
-              </a:spcBef>
-              <a:spcAft>
-                <a:spcPts val="300"/>
-              </a:spcAft>
-              <a:buNone/>
-            </a:pPr>
-            <a:r>
-              <a:rPr lang="en-US" sz="1200" i="1" dirty="0">
-                <a:solidFill>
-                  <a:srgbClr val="1C2833"/>
-                </a:solidFill>
-                <a:latin typeface="Arial" pitchFamily="34" charset="0"/>
-                <a:ea typeface="Arial" pitchFamily="34" charset="-122"/>
-                <a:cs typeface="Arial" pitchFamily="34" charset="-120"/>
-              </a:rPr>
-              <a:t>dhyāna</a:t>
-            </a:r>
-            <a:pPr algn="l" indent="0" marL="0">
-              <a:lnSpc>
-                <a:spcPts val="1680"/>
-              </a:lnSpc>
-              <a:spcBef>
-                <a:spcPts val="300"/>
-              </a:spcBef>
-              <a:spcAft>
-                <a:spcPts val="300"/>
-              </a:spcAft>
-              <a:buNone/>
-            </a:pPr>
-            <a:r>
-              <a:rPr lang="en-US" sz="1200" dirty="0">
-                <a:solidFill>
-                  <a:srgbClr val="1C2833"/>
-                </a:solidFill>
-                <a:latin typeface="Arial" pitchFamily="34" charset="0"/>
-                <a:ea typeface="Arial" pitchFamily="34" charset="-122"/>
-                <a:cs typeface="Arial" pitchFamily="34" charset="-120"/>
-              </a:rPr>
-              <a:t> (sustained meditation) - </a:t>
-            </a:r>
-            <a:pPr algn="l" indent="0" marL="0">
-              <a:lnSpc>
-                <a:spcPts val="1680"/>
-              </a:lnSpc>
-              <a:spcBef>
-                <a:spcPts val="300"/>
-              </a:spcBef>
-              <a:spcAft>
-                <a:spcPts val="300"/>
-              </a:spcAft>
-              <a:buNone/>
-            </a:pPr>
-            <a:r>
-              <a:rPr lang="en-US" sz="1200" i="1" dirty="0">
-                <a:solidFill>
-                  <a:srgbClr val="1C2833"/>
-                </a:solidFill>
-                <a:latin typeface="Arial" pitchFamily="34" charset="0"/>
-                <a:ea typeface="Arial" pitchFamily="34" charset="-122"/>
-                <a:cs typeface="Arial" pitchFamily="34" charset="-120"/>
-              </a:rPr>
-              <a:t>samādhi</a:t>
-            </a:r>
-            <a:pPr algn="l" indent="0" marL="0">
-              <a:lnSpc>
-                <a:spcPts val="1680"/>
-              </a:lnSpc>
-              <a:spcBef>
-                <a:spcPts val="300"/>
-              </a:spcBef>
-              <a:spcAft>
-                <a:spcPts val="300"/>
-              </a:spcAft>
-              <a:buNone/>
-            </a:pPr>
-            <a:r>
-              <a:rPr lang="en-US" sz="1200" dirty="0">
-                <a:solidFill>
-                  <a:srgbClr val="1C2833"/>
-                </a:solidFill>
-                <a:latin typeface="Arial" pitchFamily="34" charset="0"/>
-                <a:ea typeface="Arial" pitchFamily="34" charset="-122"/>
-                <a:cs typeface="Arial" pitchFamily="34" charset="-120"/>
-              </a:rPr>
-              <a:t> (absorption)</a:t>
-            </a:r>
-            <a:endParaRPr lang="en-US" sz="1200" dirty="0"/>
-          </a:p>
-        </p:txBody>
-      </p:sp>
-      <p:sp>
-        <p:nvSpPr>
-          <p:cNvPr id="6" name="Text 4"/>
           <p:cNvSpPr/>
           <p:nvPr/>
         </p:nvSpPr>
@@ -5334,7 +7590,7 @@
                 <a:ea typeface="Georgia" pitchFamily="34" charset="-122"/>
                 <a:cs typeface="Georgia" pitchFamily="34" charset="-120"/>
               </a:rPr>
-              <a:t>Lesson flow</a:t>
+              <a:t>Vocabulary introduced today</a:t>
             </a:r>
             <a:endParaRPr lang="en-US" sz="1800" dirty="0"/>
           </a:p>
@@ -5343,6 +7599,448 @@
       <p:sp>
         <p:nvSpPr>
           <p:cNvPr id="4" name="Text 2"/>
+          <p:cNvSpPr/>
+          <p:nvPr/>
+        </p:nvSpPr>
+        <p:spPr>
+          <a:xfrm>
+            <a:off x="634901" y="883593"/>
+            <a:ext cx="8102798" cy="2475905"/>
+          </a:xfrm>
+          <a:prstGeom prst="rect">
+            <a:avLst/>
+          </a:prstGeom>
+          <a:noFill/>
+          <a:ln/>
+        </p:spPr>
+        <p:txBody>
+          <a:bodyPr wrap="square" lIns="0" tIns="0" rIns="0" bIns="0" rtlCol="0" anchor="t"/>
+          <a:lstStyle/>
+          <a:p>
+            <a:pPr algn="l" marL="342900" indent="-342900">
+              <a:lnSpc>
+                <a:spcPts val="1620"/>
+              </a:lnSpc>
+              <a:spcAft>
+                <a:spcPts val="300"/>
+              </a:spcAft>
+              <a:buSzPct val="100000"/>
+              <a:buChar char="•"/>
+            </a:pPr>
+            <a:r>
+              <a:rPr lang="en-US" sz="1200" i="1" dirty="0">
+                <a:solidFill>
+                  <a:srgbClr val="1C2833"/>
+                </a:solidFill>
+                <a:latin typeface="Arial" pitchFamily="34" charset="0"/>
+                <a:ea typeface="Arial" pitchFamily="34" charset="-122"/>
+                <a:cs typeface="Arial" pitchFamily="34" charset="-120"/>
+              </a:rPr>
+              <a:t>aṣṭāṅga</a:t>
+            </a:r>
+            <a:pPr algn="l" indent="0" marL="0">
+              <a:lnSpc>
+                <a:spcPts val="1620"/>
+              </a:lnSpc>
+              <a:spcAft>
+                <a:spcPts val="300"/>
+              </a:spcAft>
+              <a:buNone/>
+            </a:pPr>
+            <a:r>
+              <a:rPr lang="en-US" sz="1200" dirty="0">
+                <a:solidFill>
+                  <a:srgbClr val="1C2833"/>
+                </a:solidFill>
+                <a:latin typeface="Arial" pitchFamily="34" charset="0"/>
+                <a:ea typeface="Arial" pitchFamily="34" charset="-122"/>
+                <a:cs typeface="Arial" pitchFamily="34" charset="-120"/>
+              </a:rPr>
+              <a:t> (IAST: aṣṭāṅga; lit. "eight-limbed") — Patañjali's eight-stage scheme.</a:t>
+            </a:r>
+            <a:endParaRPr lang="en-US" sz="1200" dirty="0"/>
+          </a:p>
+          <a:p>
+            <a:pPr algn="l" marL="342900" indent="-342900">
+              <a:lnSpc>
+                <a:spcPts val="1620"/>
+              </a:lnSpc>
+              <a:spcAft>
+                <a:spcPts val="300"/>
+              </a:spcAft>
+              <a:buSzPct val="100000"/>
+              <a:buChar char="•"/>
+            </a:pPr>
+            <a:r>
+              <a:rPr lang="en-US" sz="1200" dirty="0">
+                <a:solidFill>
+                  <a:srgbClr val="1C2833"/>
+                </a:solidFill>
+                <a:latin typeface="Arial" pitchFamily="34" charset="0"/>
+                <a:ea typeface="Arial" pitchFamily="34" charset="-122"/>
+                <a:cs typeface="Arial" pitchFamily="34" charset="-120"/>
+              </a:rPr>
+              <a:t>All eight limbs:</a:t>
+            </a:r>
+            <a:endParaRPr lang="en-US" sz="1200" dirty="0"/>
+          </a:p>
+          <a:p>
+            <a:pPr algn="l" marL="342900" indent="-342900">
+              <a:lnSpc>
+                <a:spcPts val="1620"/>
+              </a:lnSpc>
+              <a:spcAft>
+                <a:spcPts val="300"/>
+              </a:spcAft>
+              <a:buSzPct val="100000"/>
+              <a:buChar char="•"/>
+            </a:pPr>
+            <a:r>
+              <a:rPr lang="en-US" sz="1200" i="1" dirty="0">
+                <a:solidFill>
+                  <a:srgbClr val="1C2833"/>
+                </a:solidFill>
+                <a:latin typeface="Arial" pitchFamily="34" charset="0"/>
+                <a:ea typeface="Arial" pitchFamily="34" charset="-122"/>
+                <a:cs typeface="Arial" pitchFamily="34" charset="-120"/>
+              </a:rPr>
+              <a:t>yama</a:t>
+            </a:r>
+            <a:pPr algn="l" indent="0" marL="0">
+              <a:lnSpc>
+                <a:spcPts val="1620"/>
+              </a:lnSpc>
+              <a:spcAft>
+                <a:spcPts val="300"/>
+              </a:spcAft>
+              <a:buNone/>
+            </a:pPr>
+            <a:r>
+              <a:rPr lang="en-US" sz="1200" dirty="0">
+                <a:solidFill>
+                  <a:srgbClr val="1C2833"/>
+                </a:solidFill>
+                <a:latin typeface="Arial" pitchFamily="34" charset="0"/>
+                <a:ea typeface="Arial" pitchFamily="34" charset="-122"/>
+                <a:cs typeface="Arial" pitchFamily="34" charset="-120"/>
+              </a:rPr>
+              <a:t> (ethical restraints)</a:t>
+            </a:r>
+            <a:endParaRPr lang="en-US" sz="1200" dirty="0"/>
+          </a:p>
+          <a:p>
+            <a:pPr algn="l" marL="342900" indent="-342900">
+              <a:lnSpc>
+                <a:spcPts val="1620"/>
+              </a:lnSpc>
+              <a:spcAft>
+                <a:spcPts val="300"/>
+              </a:spcAft>
+              <a:buSzPct val="100000"/>
+              <a:buChar char="•"/>
+            </a:pPr>
+            <a:r>
+              <a:rPr lang="en-US" sz="1200" i="1" dirty="0">
+                <a:solidFill>
+                  <a:srgbClr val="1C2833"/>
+                </a:solidFill>
+                <a:latin typeface="Arial" pitchFamily="34" charset="0"/>
+                <a:ea typeface="Arial" pitchFamily="34" charset="-122"/>
+                <a:cs typeface="Arial" pitchFamily="34" charset="-120"/>
+              </a:rPr>
+              <a:t>niyama</a:t>
+            </a:r>
+            <a:pPr algn="l" indent="0" marL="0">
+              <a:lnSpc>
+                <a:spcPts val="1620"/>
+              </a:lnSpc>
+              <a:spcAft>
+                <a:spcPts val="300"/>
+              </a:spcAft>
+              <a:buNone/>
+            </a:pPr>
+            <a:r>
+              <a:rPr lang="en-US" sz="1200" dirty="0">
+                <a:solidFill>
+                  <a:srgbClr val="1C2833"/>
+                </a:solidFill>
+                <a:latin typeface="Arial" pitchFamily="34" charset="0"/>
+                <a:ea typeface="Arial" pitchFamily="34" charset="-122"/>
+                <a:cs typeface="Arial" pitchFamily="34" charset="-120"/>
+              </a:rPr>
+              <a:t> (personal observances)</a:t>
+            </a:r>
+            <a:endParaRPr lang="en-US" sz="1200" dirty="0"/>
+          </a:p>
+          <a:p>
+            <a:pPr algn="l" marL="342900" indent="-342900">
+              <a:lnSpc>
+                <a:spcPts val="1620"/>
+              </a:lnSpc>
+              <a:spcAft>
+                <a:spcPts val="300"/>
+              </a:spcAft>
+              <a:buSzPct val="100000"/>
+              <a:buChar char="•"/>
+            </a:pPr>
+            <a:r>
+              <a:rPr lang="en-US" sz="1200" i="1" dirty="0">
+                <a:solidFill>
+                  <a:srgbClr val="1C2833"/>
+                </a:solidFill>
+                <a:latin typeface="Arial" pitchFamily="34" charset="0"/>
+                <a:ea typeface="Arial" pitchFamily="34" charset="-122"/>
+                <a:cs typeface="Arial" pitchFamily="34" charset="-120"/>
+              </a:rPr>
+              <a:t>āsana</a:t>
+            </a:r>
+            <a:pPr algn="l" indent="0" marL="0">
+              <a:lnSpc>
+                <a:spcPts val="1620"/>
+              </a:lnSpc>
+              <a:spcAft>
+                <a:spcPts val="300"/>
+              </a:spcAft>
+              <a:buNone/>
+            </a:pPr>
+            <a:r>
+              <a:rPr lang="en-US" sz="1200" dirty="0">
+                <a:solidFill>
+                  <a:srgbClr val="1C2833"/>
+                </a:solidFill>
+                <a:latin typeface="Arial" pitchFamily="34" charset="0"/>
+                <a:ea typeface="Arial" pitchFamily="34" charset="-122"/>
+                <a:cs typeface="Arial" pitchFamily="34" charset="-120"/>
+              </a:rPr>
+              <a:t> (posture)</a:t>
+            </a:r>
+            <a:endParaRPr lang="en-US" sz="1200" dirty="0"/>
+          </a:p>
+          <a:p>
+            <a:pPr algn="l" marL="342900" indent="-342900">
+              <a:lnSpc>
+                <a:spcPts val="1620"/>
+              </a:lnSpc>
+              <a:spcAft>
+                <a:spcPts val="300"/>
+              </a:spcAft>
+              <a:buSzPct val="100000"/>
+              <a:buChar char="•"/>
+            </a:pPr>
+            <a:r>
+              <a:rPr lang="en-US" sz="1200" i="1" dirty="0">
+                <a:solidFill>
+                  <a:srgbClr val="1C2833"/>
+                </a:solidFill>
+                <a:latin typeface="Arial" pitchFamily="34" charset="0"/>
+                <a:ea typeface="Arial" pitchFamily="34" charset="-122"/>
+                <a:cs typeface="Arial" pitchFamily="34" charset="-120"/>
+              </a:rPr>
+              <a:t>prāṇāyāma</a:t>
+            </a:r>
+            <a:pPr algn="l" indent="0" marL="0">
+              <a:lnSpc>
+                <a:spcPts val="1620"/>
+              </a:lnSpc>
+              <a:spcAft>
+                <a:spcPts val="300"/>
+              </a:spcAft>
+              <a:buNone/>
+            </a:pPr>
+            <a:r>
+              <a:rPr lang="en-US" sz="1200" dirty="0">
+                <a:solidFill>
+                  <a:srgbClr val="1C2833"/>
+                </a:solidFill>
+                <a:latin typeface="Arial" pitchFamily="34" charset="0"/>
+                <a:ea typeface="Arial" pitchFamily="34" charset="-122"/>
+                <a:cs typeface="Arial" pitchFamily="34" charset="-120"/>
+              </a:rPr>
+              <a:t> (breath regulation)</a:t>
+            </a:r>
+            <a:endParaRPr lang="en-US" sz="1200" dirty="0"/>
+          </a:p>
+          <a:p>
+            <a:pPr algn="l" marL="342900" indent="-342900">
+              <a:lnSpc>
+                <a:spcPts val="1620"/>
+              </a:lnSpc>
+              <a:spcAft>
+                <a:spcPts val="300"/>
+              </a:spcAft>
+              <a:buSzPct val="100000"/>
+              <a:buChar char="•"/>
+            </a:pPr>
+            <a:r>
+              <a:rPr lang="en-US" sz="1200" i="1" dirty="0">
+                <a:solidFill>
+                  <a:srgbClr val="1C2833"/>
+                </a:solidFill>
+                <a:latin typeface="Arial" pitchFamily="34" charset="0"/>
+                <a:ea typeface="Arial" pitchFamily="34" charset="-122"/>
+                <a:cs typeface="Arial" pitchFamily="34" charset="-120"/>
+              </a:rPr>
+              <a:t>pratyāhāra</a:t>
+            </a:r>
+            <a:pPr algn="l" indent="0" marL="0">
+              <a:lnSpc>
+                <a:spcPts val="1620"/>
+              </a:lnSpc>
+              <a:spcAft>
+                <a:spcPts val="300"/>
+              </a:spcAft>
+              <a:buNone/>
+            </a:pPr>
+            <a:r>
+              <a:rPr lang="en-US" sz="1200" dirty="0">
+                <a:solidFill>
+                  <a:srgbClr val="1C2833"/>
+                </a:solidFill>
+                <a:latin typeface="Arial" pitchFamily="34" charset="0"/>
+                <a:ea typeface="Arial" pitchFamily="34" charset="-122"/>
+                <a:cs typeface="Arial" pitchFamily="34" charset="-120"/>
+              </a:rPr>
+              <a:t> (sense-withdrawal)</a:t>
+            </a:r>
+            <a:endParaRPr lang="en-US" sz="1200" dirty="0"/>
+          </a:p>
+          <a:p>
+            <a:pPr algn="l" marL="342900" indent="-342900">
+              <a:lnSpc>
+                <a:spcPts val="1620"/>
+              </a:lnSpc>
+              <a:spcAft>
+                <a:spcPts val="300"/>
+              </a:spcAft>
+              <a:buSzPct val="100000"/>
+              <a:buChar char="•"/>
+            </a:pPr>
+            <a:r>
+              <a:rPr lang="en-US" sz="1200" i="1" dirty="0">
+                <a:solidFill>
+                  <a:srgbClr val="1C2833"/>
+                </a:solidFill>
+                <a:latin typeface="Arial" pitchFamily="34" charset="0"/>
+                <a:ea typeface="Arial" pitchFamily="34" charset="-122"/>
+                <a:cs typeface="Arial" pitchFamily="34" charset="-120"/>
+              </a:rPr>
+              <a:t>dhāraṇā</a:t>
+            </a:r>
+            <a:pPr algn="l" indent="0" marL="0">
+              <a:lnSpc>
+                <a:spcPts val="1620"/>
+              </a:lnSpc>
+              <a:spcAft>
+                <a:spcPts val="300"/>
+              </a:spcAft>
+              <a:buNone/>
+            </a:pPr>
+            <a:r>
+              <a:rPr lang="en-US" sz="1200" dirty="0">
+                <a:solidFill>
+                  <a:srgbClr val="1C2833"/>
+                </a:solidFill>
+                <a:latin typeface="Arial" pitchFamily="34" charset="0"/>
+                <a:ea typeface="Arial" pitchFamily="34" charset="-122"/>
+                <a:cs typeface="Arial" pitchFamily="34" charset="-120"/>
+              </a:rPr>
+              <a:t> (focused attention)</a:t>
+            </a:r>
+            <a:endParaRPr lang="en-US" sz="1200" dirty="0"/>
+          </a:p>
+          <a:p>
+            <a:pPr algn="l" marL="342900" indent="-342900">
+              <a:lnSpc>
+                <a:spcPts val="1620"/>
+              </a:lnSpc>
+              <a:spcAft>
+                <a:spcPts val="300"/>
+              </a:spcAft>
+              <a:buSzPct val="100000"/>
+              <a:buChar char="•"/>
+            </a:pPr>
+            <a:r>
+              <a:rPr lang="en-US" sz="1200" i="1" dirty="0">
+                <a:solidFill>
+                  <a:srgbClr val="1C2833"/>
+                </a:solidFill>
+                <a:latin typeface="Arial" pitchFamily="34" charset="0"/>
+                <a:ea typeface="Arial" pitchFamily="34" charset="-122"/>
+                <a:cs typeface="Arial" pitchFamily="34" charset="-120"/>
+              </a:rPr>
+              <a:t>dhyāna</a:t>
+            </a:r>
+            <a:pPr algn="l" indent="0" marL="0">
+              <a:lnSpc>
+                <a:spcPts val="1620"/>
+              </a:lnSpc>
+              <a:spcAft>
+                <a:spcPts val="300"/>
+              </a:spcAft>
+              <a:buNone/>
+            </a:pPr>
+            <a:r>
+              <a:rPr lang="en-US" sz="1200" dirty="0">
+                <a:solidFill>
+                  <a:srgbClr val="1C2833"/>
+                </a:solidFill>
+                <a:latin typeface="Arial" pitchFamily="34" charset="0"/>
+                <a:ea typeface="Arial" pitchFamily="34" charset="-122"/>
+                <a:cs typeface="Arial" pitchFamily="34" charset="-120"/>
+              </a:rPr>
+              <a:t> (sustained meditation)</a:t>
+            </a:r>
+            <a:endParaRPr lang="en-US" sz="1200" dirty="0"/>
+          </a:p>
+          <a:p>
+            <a:pPr algn="l" marL="342900" indent="-342900">
+              <a:lnSpc>
+                <a:spcPts val="1620"/>
+              </a:lnSpc>
+              <a:spcAft>
+                <a:spcPts val="300"/>
+              </a:spcAft>
+              <a:buSzPct val="100000"/>
+              <a:buChar char="•"/>
+            </a:pPr>
+            <a:r>
+              <a:rPr lang="en-US" sz="1200" i="1" dirty="0">
+                <a:solidFill>
+                  <a:srgbClr val="1C2833"/>
+                </a:solidFill>
+                <a:latin typeface="Arial" pitchFamily="34" charset="0"/>
+                <a:ea typeface="Arial" pitchFamily="34" charset="-122"/>
+                <a:cs typeface="Arial" pitchFamily="34" charset="-120"/>
+              </a:rPr>
+              <a:t>samādhi</a:t>
+            </a:r>
+            <a:pPr algn="l" indent="0" marL="0">
+              <a:lnSpc>
+                <a:spcPts val="1620"/>
+              </a:lnSpc>
+              <a:spcAft>
+                <a:spcPts val="300"/>
+              </a:spcAft>
+              <a:buNone/>
+            </a:pPr>
+            <a:r>
+              <a:rPr lang="en-US" sz="1200" dirty="0">
+                <a:solidFill>
+                  <a:srgbClr val="1C2833"/>
+                </a:solidFill>
+                <a:latin typeface="Arial" pitchFamily="34" charset="0"/>
+                <a:ea typeface="Arial" pitchFamily="34" charset="-122"/>
+                <a:cs typeface="Arial" pitchFamily="34" charset="-120"/>
+              </a:rPr>
+              <a:t> (absorption)</a:t>
+            </a:r>
+            <a:endParaRPr lang="en-US" sz="1200" dirty="0"/>
+          </a:p>
+        </p:txBody>
+      </p:sp>
+      <p:sp>
+        <p:nvSpPr>
+          <p:cNvPr id="5" name="Text 3"/>
           <p:cNvSpPr/>
           <p:nvPr/>
         </p:nvSpPr>
@@ -5492,7 +8190,7 @@
                 <a:ea typeface="Georgia" pitchFamily="34" charset="-122"/>
                 <a:cs typeface="Georgia" pitchFamily="34" charset="-120"/>
               </a:rPr>
-              <a:t>Settle (2 min)</a:t>
+              <a:t>Lesson flow</a:t>
             </a:r>
             <a:endParaRPr lang="en-US" sz="1800" dirty="0"/>
           </a:p>
@@ -5501,54 +8199,6 @@
       <p:sp>
         <p:nvSpPr>
           <p:cNvPr id="4" name="Text 2"/>
-          <p:cNvSpPr/>
-          <p:nvPr/>
-        </p:nvSpPr>
-        <p:spPr>
-          <a:xfrm>
-            <a:off x="406301" y="870942"/>
-            <a:ext cx="8498026" cy="213271"/>
-          </a:xfrm>
-          <a:prstGeom prst="rect">
-            <a:avLst/>
-          </a:prstGeom>
-          <a:noFill/>
-          <a:ln/>
-        </p:spPr>
-        <p:txBody>
-          <a:bodyPr wrap="square" lIns="0" tIns="0" rIns="0" bIns="0" rtlCol="0" anchor="t"/>
-          <a:lstStyle/>
-          <a:p>
-            <a:pPr algn="l" indent="0" marL="0">
-              <a:lnSpc>
-                <a:spcPts val="1680"/>
-              </a:lnSpc>
-              <a:spcBef>
-                <a:spcPts val="300"/>
-              </a:spcBef>
-              <a:spcAft>
-                <a:spcPts val="300"/>
-              </a:spcAft>
-              <a:buNone/>
-            </a:pPr>
-            <a:r>
-              <a:rPr lang="en-US" sz="1200" dirty="0">
-                <a:solidFill>
-                  <a:srgbClr val="1C2833"/>
-                </a:solidFill>
-                <a:latin typeface="Arial" pitchFamily="34" charset="0"/>
-                <a:ea typeface="Arial" pitchFamily="34" charset="-122"/>
-                <a:cs typeface="Arial" pitchFamily="34" charset="-120"/>
-              </a:rPr>
-              <a:t>– Sukhāsana. 5 breaths.</a:t>
-            </a:r>
-            <a:endParaRPr lang="en-US" sz="1200" dirty="0"/>
-          </a:p>
-        </p:txBody>
-      </p:sp>
-      <p:sp>
-        <p:nvSpPr>
-          <p:cNvPr id="5" name="Text 3"/>
           <p:cNvSpPr/>
           <p:nvPr/>
         </p:nvSpPr>
@@ -5698,7 +8348,7 @@
                 <a:ea typeface="Georgia" pitchFamily="34" charset="-122"/>
                 <a:cs typeface="Georgia" pitchFamily="34" charset="-120"/>
               </a:rPr>
-              <a:t>Core (15 min) — The eight limbs</a:t>
+              <a:t>Settle (2 min)</a:t>
             </a:r>
             <a:endParaRPr lang="en-US" sz="1800" dirty="0"/>
           </a:p>
@@ -5736,26 +8386,6 @@
               <a:buChar char="•"/>
             </a:pPr>
             <a:r>
-              <a:rPr lang="en-US" sz="1200" b="1" dirty="0">
-                <a:solidFill>
-                  <a:srgbClr val="1C2833"/>
-                </a:solidFill>
-                <a:latin typeface="Arial" pitchFamily="34" charset="0"/>
-                <a:ea typeface="Arial" pitchFamily="34" charset="-122"/>
-                <a:cs typeface="Arial" pitchFamily="34" charset="-120"/>
-              </a:rPr>
-              <a:t>Reveal the eight-limb chart.</a:t>
-            </a:r>
-            <a:pPr algn="l" indent="0" marL="0">
-              <a:lnSpc>
-                <a:spcPts val="1620"/>
-              </a:lnSpc>
-              <a:spcAft>
-                <a:spcPts val="300"/>
-              </a:spcAft>
-              <a:buNone/>
-            </a:pPr>
-            <a:r>
               <a:rPr lang="en-US" sz="1200" dirty="0">
                 <a:solidFill>
                   <a:srgbClr val="1C2833"/>
@@ -5764,7 +8394,7 @@
                 <a:ea typeface="Arial" pitchFamily="34" charset="-122"/>
                 <a:cs typeface="Arial" pitchFamily="34" charset="-120"/>
               </a:rPr>
-              <a:t> Walk through each limb with a one-line gloss:</a:t>
+              <a:t>Sukhāsana. 5 breaths.</a:t>
             </a:r>
             <a:endParaRPr lang="en-US" sz="1200" dirty="0"/>
           </a:p>
@@ -5778,1443 +8408,7 @@
         </p:nvSpPr>
         <p:spPr>
           <a:xfrm>
-            <a:off x="406301" y="1254323"/>
-            <a:ext cx="8498026" cy="213271"/>
-          </a:xfrm>
-          <a:prstGeom prst="rect">
-            <a:avLst/>
-          </a:prstGeom>
-          <a:noFill/>
-          <a:ln/>
-        </p:spPr>
-        <p:txBody>
-          <a:bodyPr wrap="square" lIns="0" tIns="0" rIns="0" bIns="0" rtlCol="0" anchor="t"/>
-          <a:lstStyle/>
-          <a:p>
-            <a:pPr algn="l" indent="0" marL="0">
-              <a:lnSpc>
-                <a:spcPts val="1680"/>
-              </a:lnSpc>
-              <a:spcBef>
-                <a:spcPts val="300"/>
-              </a:spcBef>
-              <a:spcAft>
-                <a:spcPts val="300"/>
-              </a:spcAft>
-              <a:buNone/>
-            </a:pPr>
-            <a:r>
-              <a:rPr lang="en-US" sz="1200" i="1" dirty="0">
-                <a:solidFill>
-                  <a:srgbClr val="1C2833"/>
-                </a:solidFill>
-                <a:latin typeface="Arial" pitchFamily="34" charset="0"/>
-                <a:ea typeface="Arial" pitchFamily="34" charset="-122"/>
-                <a:cs typeface="Arial" pitchFamily="34" charset="-120"/>
-              </a:rPr>
-              <a:t>Each row: # · Sanskrit · Meaning · Example.</a:t>
-            </a:r>
-            <a:endParaRPr lang="en-US" sz="1200" dirty="0"/>
-          </a:p>
-        </p:txBody>
-      </p:sp>
-      <p:sp>
-        <p:nvSpPr>
-          <p:cNvPr id="6" name="Text 4"/>
-          <p:cNvSpPr/>
-          <p:nvPr/>
-        </p:nvSpPr>
-        <p:spPr>
-          <a:xfrm>
-            <a:off x="634901" y="1556445"/>
-            <a:ext cx="8102798" cy="1988344"/>
-          </a:xfrm>
-          <a:prstGeom prst="rect">
-            <a:avLst/>
-          </a:prstGeom>
-          <a:noFill/>
-          <a:ln/>
-        </p:spPr>
-        <p:txBody>
-          <a:bodyPr wrap="square" lIns="0" tIns="0" rIns="0" bIns="0" rtlCol="0" anchor="t"/>
-          <a:lstStyle/>
-          <a:p>
-            <a:pPr algn="l" marL="342900" indent="-342900">
-              <a:lnSpc>
-                <a:spcPts val="1620"/>
-              </a:lnSpc>
-              <a:spcAft>
-                <a:spcPts val="300"/>
-              </a:spcAft>
-              <a:buSzPct val="100000"/>
-              <a:buChar char="•"/>
-            </a:pPr>
-            <a:r>
-              <a:rPr lang="en-US" sz="1200" b="1" dirty="0">
-                <a:solidFill>
-                  <a:srgbClr val="1C2833"/>
-                </a:solidFill>
-                <a:latin typeface="Arial" pitchFamily="34" charset="0"/>
-                <a:ea typeface="Arial" pitchFamily="34" charset="-122"/>
-                <a:cs typeface="Arial" pitchFamily="34" charset="-120"/>
-              </a:rPr>
-              <a:t>1</a:t>
-            </a:r>
-            <a:pPr algn="l" indent="0" marL="0">
-              <a:lnSpc>
-                <a:spcPts val="1620"/>
-              </a:lnSpc>
-              <a:spcAft>
-                <a:spcPts val="300"/>
-              </a:spcAft>
-              <a:buNone/>
-            </a:pPr>
-            <a:r>
-              <a:rPr lang="en-US" sz="1200" dirty="0">
-                <a:solidFill>
-                  <a:srgbClr val="1C2833"/>
-                </a:solidFill>
-                <a:latin typeface="Arial" pitchFamily="34" charset="0"/>
-                <a:ea typeface="Arial" pitchFamily="34" charset="-122"/>
-                <a:cs typeface="Arial" pitchFamily="34" charset="-120"/>
-              </a:rPr>
-              <a:t> — </a:t>
-            </a:r>
-            <a:pPr algn="l" indent="0" marL="0">
-              <a:lnSpc>
-                <a:spcPts val="1620"/>
-              </a:lnSpc>
-              <a:spcAft>
-                <a:spcPts val="300"/>
-              </a:spcAft>
-              <a:buNone/>
-            </a:pPr>
-            <a:r>
-              <a:rPr lang="en-US" sz="1200" i="1" dirty="0">
-                <a:solidFill>
-                  <a:srgbClr val="1C2833"/>
-                </a:solidFill>
-                <a:latin typeface="Arial" pitchFamily="34" charset="0"/>
-                <a:ea typeface="Arial" pitchFamily="34" charset="-122"/>
-                <a:cs typeface="Arial" pitchFamily="34" charset="-120"/>
-              </a:rPr>
-              <a:t>yama</a:t>
-            </a:r>
-            <a:pPr algn="l" indent="0" marL="0">
-              <a:lnSpc>
-                <a:spcPts val="1620"/>
-              </a:lnSpc>
-              <a:spcAft>
-                <a:spcPts val="300"/>
-              </a:spcAft>
-              <a:buNone/>
-            </a:pPr>
-            <a:r>
-              <a:rPr lang="en-US" sz="1200" dirty="0">
-                <a:solidFill>
-                  <a:srgbClr val="1C2833"/>
-                </a:solidFill>
-                <a:latin typeface="Arial" pitchFamily="34" charset="0"/>
-                <a:ea typeface="Arial" pitchFamily="34" charset="-122"/>
-                <a:cs typeface="Arial" pitchFamily="34" charset="-120"/>
-              </a:rPr>
-              <a:t> · restraints · non-harming (</a:t>
-            </a:r>
-            <a:pPr algn="l" indent="0" marL="0">
-              <a:lnSpc>
-                <a:spcPts val="1620"/>
-              </a:lnSpc>
-              <a:spcAft>
-                <a:spcPts val="300"/>
-              </a:spcAft>
-              <a:buNone/>
-            </a:pPr>
-            <a:r>
-              <a:rPr lang="en-US" sz="1200" i="1" dirty="0">
-                <a:solidFill>
-                  <a:srgbClr val="1C2833"/>
-                </a:solidFill>
-                <a:latin typeface="Arial" pitchFamily="34" charset="0"/>
-                <a:ea typeface="Arial" pitchFamily="34" charset="-122"/>
-                <a:cs typeface="Arial" pitchFamily="34" charset="-120"/>
-              </a:rPr>
-              <a:t>ahiṁsā</a:t>
-            </a:r>
-            <a:pPr algn="l" indent="0" marL="0">
-              <a:lnSpc>
-                <a:spcPts val="1620"/>
-              </a:lnSpc>
-              <a:spcAft>
-                <a:spcPts val="300"/>
-              </a:spcAft>
-              <a:buNone/>
-            </a:pPr>
-            <a:r>
-              <a:rPr lang="en-US" sz="1200" dirty="0">
-                <a:solidFill>
-                  <a:srgbClr val="1C2833"/>
-                </a:solidFill>
-                <a:latin typeface="Arial" pitchFamily="34" charset="0"/>
-                <a:ea typeface="Arial" pitchFamily="34" charset="-122"/>
-                <a:cs typeface="Arial" pitchFamily="34" charset="-120"/>
-              </a:rPr>
-              <a:t>), truthfulness (</a:t>
-            </a:r>
-            <a:pPr algn="l" indent="0" marL="0">
-              <a:lnSpc>
-                <a:spcPts val="1620"/>
-              </a:lnSpc>
-              <a:spcAft>
-                <a:spcPts val="300"/>
-              </a:spcAft>
-              <a:buNone/>
-            </a:pPr>
-            <a:r>
-              <a:rPr lang="en-US" sz="1200" i="1" dirty="0">
-                <a:solidFill>
-                  <a:srgbClr val="1C2833"/>
-                </a:solidFill>
-                <a:latin typeface="Arial" pitchFamily="34" charset="0"/>
-                <a:ea typeface="Arial" pitchFamily="34" charset="-122"/>
-                <a:cs typeface="Arial" pitchFamily="34" charset="-120"/>
-              </a:rPr>
-              <a:t>satya</a:t>
-            </a:r>
-            <a:pPr algn="l" indent="0" marL="0">
-              <a:lnSpc>
-                <a:spcPts val="1620"/>
-              </a:lnSpc>
-              <a:spcAft>
-                <a:spcPts val="300"/>
-              </a:spcAft>
-              <a:buNone/>
-            </a:pPr>
-            <a:r>
-              <a:rPr lang="en-US" sz="1200" dirty="0">
-                <a:solidFill>
-                  <a:srgbClr val="1C2833"/>
-                </a:solidFill>
-                <a:latin typeface="Arial" pitchFamily="34" charset="0"/>
-                <a:ea typeface="Arial" pitchFamily="34" charset="-122"/>
-                <a:cs typeface="Arial" pitchFamily="34" charset="-120"/>
-              </a:rPr>
-              <a:t>)</a:t>
-            </a:r>
-            <a:endParaRPr lang="en-US" sz="1200" dirty="0"/>
-          </a:p>
-          <a:p>
-            <a:pPr algn="l" marL="342900" indent="-342900">
-              <a:lnSpc>
-                <a:spcPts val="1620"/>
-              </a:lnSpc>
-              <a:spcAft>
-                <a:spcPts val="300"/>
-              </a:spcAft>
-              <a:buSzPct val="100000"/>
-              <a:buChar char="•"/>
-            </a:pPr>
-            <a:r>
-              <a:rPr lang="en-US" sz="1200" b="1" dirty="0">
-                <a:solidFill>
-                  <a:srgbClr val="1C2833"/>
-                </a:solidFill>
-                <a:latin typeface="Arial" pitchFamily="34" charset="0"/>
-                <a:ea typeface="Arial" pitchFamily="34" charset="-122"/>
-                <a:cs typeface="Arial" pitchFamily="34" charset="-120"/>
-              </a:rPr>
-              <a:t>2</a:t>
-            </a:r>
-            <a:pPr algn="l" indent="0" marL="0">
-              <a:lnSpc>
-                <a:spcPts val="1620"/>
-              </a:lnSpc>
-              <a:spcAft>
-                <a:spcPts val="300"/>
-              </a:spcAft>
-              <a:buNone/>
-            </a:pPr>
-            <a:r>
-              <a:rPr lang="en-US" sz="1200" dirty="0">
-                <a:solidFill>
-                  <a:srgbClr val="1C2833"/>
-                </a:solidFill>
-                <a:latin typeface="Arial" pitchFamily="34" charset="0"/>
-                <a:ea typeface="Arial" pitchFamily="34" charset="-122"/>
-                <a:cs typeface="Arial" pitchFamily="34" charset="-120"/>
-              </a:rPr>
-              <a:t> — </a:t>
-            </a:r>
-            <a:pPr algn="l" indent="0" marL="0">
-              <a:lnSpc>
-                <a:spcPts val="1620"/>
-              </a:lnSpc>
-              <a:spcAft>
-                <a:spcPts val="300"/>
-              </a:spcAft>
-              <a:buNone/>
-            </a:pPr>
-            <a:r>
-              <a:rPr lang="en-US" sz="1200" i="1" dirty="0">
-                <a:solidFill>
-                  <a:srgbClr val="1C2833"/>
-                </a:solidFill>
-                <a:latin typeface="Arial" pitchFamily="34" charset="0"/>
-                <a:ea typeface="Arial" pitchFamily="34" charset="-122"/>
-                <a:cs typeface="Arial" pitchFamily="34" charset="-120"/>
-              </a:rPr>
-              <a:t>niyama</a:t>
-            </a:r>
-            <a:pPr algn="l" indent="0" marL="0">
-              <a:lnSpc>
-                <a:spcPts val="1620"/>
-              </a:lnSpc>
-              <a:spcAft>
-                <a:spcPts val="300"/>
-              </a:spcAft>
-              <a:buNone/>
-            </a:pPr>
-            <a:r>
-              <a:rPr lang="en-US" sz="1200" dirty="0">
-                <a:solidFill>
-                  <a:srgbClr val="1C2833"/>
-                </a:solidFill>
-                <a:latin typeface="Arial" pitchFamily="34" charset="0"/>
-                <a:ea typeface="Arial" pitchFamily="34" charset="-122"/>
-                <a:cs typeface="Arial" pitchFamily="34" charset="-120"/>
-              </a:rPr>
-              <a:t> · observances · cleanliness (</a:t>
-            </a:r>
-            <a:pPr algn="l" indent="0" marL="0">
-              <a:lnSpc>
-                <a:spcPts val="1620"/>
-              </a:lnSpc>
-              <a:spcAft>
-                <a:spcPts val="300"/>
-              </a:spcAft>
-              <a:buNone/>
-            </a:pPr>
-            <a:r>
-              <a:rPr lang="en-US" sz="1200" i="1" dirty="0">
-                <a:solidFill>
-                  <a:srgbClr val="1C2833"/>
-                </a:solidFill>
-                <a:latin typeface="Arial" pitchFamily="34" charset="0"/>
-                <a:ea typeface="Arial" pitchFamily="34" charset="-122"/>
-                <a:cs typeface="Arial" pitchFamily="34" charset="-120"/>
-              </a:rPr>
-              <a:t>śauca</a:t>
-            </a:r>
-            <a:pPr algn="l" indent="0" marL="0">
-              <a:lnSpc>
-                <a:spcPts val="1620"/>
-              </a:lnSpc>
-              <a:spcAft>
-                <a:spcPts val="300"/>
-              </a:spcAft>
-              <a:buNone/>
-            </a:pPr>
-            <a:r>
-              <a:rPr lang="en-US" sz="1200" dirty="0">
-                <a:solidFill>
-                  <a:srgbClr val="1C2833"/>
-                </a:solidFill>
-                <a:latin typeface="Arial" pitchFamily="34" charset="0"/>
-                <a:ea typeface="Arial" pitchFamily="34" charset="-122"/>
-                <a:cs typeface="Arial" pitchFamily="34" charset="-120"/>
-              </a:rPr>
-              <a:t>), self-study (</a:t>
-            </a:r>
-            <a:pPr algn="l" indent="0" marL="0">
-              <a:lnSpc>
-                <a:spcPts val="1620"/>
-              </a:lnSpc>
-              <a:spcAft>
-                <a:spcPts val="300"/>
-              </a:spcAft>
-              <a:buNone/>
-            </a:pPr>
-            <a:r>
-              <a:rPr lang="en-US" sz="1200" i="1" dirty="0">
-                <a:solidFill>
-                  <a:srgbClr val="1C2833"/>
-                </a:solidFill>
-                <a:latin typeface="Arial" pitchFamily="34" charset="0"/>
-                <a:ea typeface="Arial" pitchFamily="34" charset="-122"/>
-                <a:cs typeface="Arial" pitchFamily="34" charset="-120"/>
-              </a:rPr>
-              <a:t>svādhyāya</a:t>
-            </a:r>
-            <a:pPr algn="l" indent="0" marL="0">
-              <a:lnSpc>
-                <a:spcPts val="1620"/>
-              </a:lnSpc>
-              <a:spcAft>
-                <a:spcPts val="300"/>
-              </a:spcAft>
-              <a:buNone/>
-            </a:pPr>
-            <a:r>
-              <a:rPr lang="en-US" sz="1200" dirty="0">
-                <a:solidFill>
-                  <a:srgbClr val="1C2833"/>
-                </a:solidFill>
-                <a:latin typeface="Arial" pitchFamily="34" charset="0"/>
-                <a:ea typeface="Arial" pitchFamily="34" charset="-122"/>
-                <a:cs typeface="Arial" pitchFamily="34" charset="-120"/>
-              </a:rPr>
-              <a:t>)</a:t>
-            </a:r>
-            <a:endParaRPr lang="en-US" sz="1200" dirty="0"/>
-          </a:p>
-          <a:p>
-            <a:pPr algn="l" marL="342900" indent="-342900">
-              <a:lnSpc>
-                <a:spcPts val="1620"/>
-              </a:lnSpc>
-              <a:spcAft>
-                <a:spcPts val="300"/>
-              </a:spcAft>
-              <a:buSzPct val="100000"/>
-              <a:buChar char="•"/>
-            </a:pPr>
-            <a:r>
-              <a:rPr lang="en-US" sz="1200" b="1" dirty="0">
-                <a:solidFill>
-                  <a:srgbClr val="1C2833"/>
-                </a:solidFill>
-                <a:latin typeface="Arial" pitchFamily="34" charset="0"/>
-                <a:ea typeface="Arial" pitchFamily="34" charset="-122"/>
-                <a:cs typeface="Arial" pitchFamily="34" charset="-120"/>
-              </a:rPr>
-              <a:t>3</a:t>
-            </a:r>
-            <a:pPr algn="l" indent="0" marL="0">
-              <a:lnSpc>
-                <a:spcPts val="1620"/>
-              </a:lnSpc>
-              <a:spcAft>
-                <a:spcPts val="300"/>
-              </a:spcAft>
-              <a:buNone/>
-            </a:pPr>
-            <a:r>
-              <a:rPr lang="en-US" sz="1200" dirty="0">
-                <a:solidFill>
-                  <a:srgbClr val="1C2833"/>
-                </a:solidFill>
-                <a:latin typeface="Arial" pitchFamily="34" charset="0"/>
-                <a:ea typeface="Arial" pitchFamily="34" charset="-122"/>
-                <a:cs typeface="Arial" pitchFamily="34" charset="-120"/>
-              </a:rPr>
-              <a:t> — </a:t>
-            </a:r>
-            <a:pPr algn="l" indent="0" marL="0">
-              <a:lnSpc>
-                <a:spcPts val="1620"/>
-              </a:lnSpc>
-              <a:spcAft>
-                <a:spcPts val="300"/>
-              </a:spcAft>
-              <a:buNone/>
-            </a:pPr>
-            <a:r>
-              <a:rPr lang="en-US" sz="1200" i="1" dirty="0">
-                <a:solidFill>
-                  <a:srgbClr val="1C2833"/>
-                </a:solidFill>
-                <a:latin typeface="Arial" pitchFamily="34" charset="0"/>
-                <a:ea typeface="Arial" pitchFamily="34" charset="-122"/>
-                <a:cs typeface="Arial" pitchFamily="34" charset="-120"/>
-              </a:rPr>
-              <a:t>āsana</a:t>
-            </a:r>
-            <a:pPr algn="l" indent="0" marL="0">
-              <a:lnSpc>
-                <a:spcPts val="1620"/>
-              </a:lnSpc>
-              <a:spcAft>
-                <a:spcPts val="300"/>
-              </a:spcAft>
-              <a:buNone/>
-            </a:pPr>
-            <a:r>
-              <a:rPr lang="en-US" sz="1200" dirty="0">
-                <a:solidFill>
-                  <a:srgbClr val="1C2833"/>
-                </a:solidFill>
-                <a:latin typeface="Arial" pitchFamily="34" charset="0"/>
-                <a:ea typeface="Arial" pitchFamily="34" charset="-122"/>
-                <a:cs typeface="Arial" pitchFamily="34" charset="-120"/>
-              </a:rPr>
-              <a:t> · posture · tāḍāsana, vṛkṣāsana — what we're learning</a:t>
-            </a:r>
-            <a:endParaRPr lang="en-US" sz="1200" dirty="0"/>
-          </a:p>
-          <a:p>
-            <a:pPr algn="l" marL="342900" indent="-342900">
-              <a:lnSpc>
-                <a:spcPts val="1620"/>
-              </a:lnSpc>
-              <a:spcAft>
-                <a:spcPts val="300"/>
-              </a:spcAft>
-              <a:buSzPct val="100000"/>
-              <a:buChar char="•"/>
-            </a:pPr>
-            <a:r>
-              <a:rPr lang="en-US" sz="1200" b="1" dirty="0">
-                <a:solidFill>
-                  <a:srgbClr val="1C2833"/>
-                </a:solidFill>
-                <a:latin typeface="Arial" pitchFamily="34" charset="0"/>
-                <a:ea typeface="Arial" pitchFamily="34" charset="-122"/>
-                <a:cs typeface="Arial" pitchFamily="34" charset="-120"/>
-              </a:rPr>
-              <a:t>4</a:t>
-            </a:r>
-            <a:pPr algn="l" indent="0" marL="0">
-              <a:lnSpc>
-                <a:spcPts val="1620"/>
-              </a:lnSpc>
-              <a:spcAft>
-                <a:spcPts val="300"/>
-              </a:spcAft>
-              <a:buNone/>
-            </a:pPr>
-            <a:r>
-              <a:rPr lang="en-US" sz="1200" dirty="0">
-                <a:solidFill>
-                  <a:srgbClr val="1C2833"/>
-                </a:solidFill>
-                <a:latin typeface="Arial" pitchFamily="34" charset="0"/>
-                <a:ea typeface="Arial" pitchFamily="34" charset="-122"/>
-                <a:cs typeface="Arial" pitchFamily="34" charset="-120"/>
-              </a:rPr>
-              <a:t> — </a:t>
-            </a:r>
-            <a:pPr algn="l" indent="0" marL="0">
-              <a:lnSpc>
-                <a:spcPts val="1620"/>
-              </a:lnSpc>
-              <a:spcAft>
-                <a:spcPts val="300"/>
-              </a:spcAft>
-              <a:buNone/>
-            </a:pPr>
-            <a:r>
-              <a:rPr lang="en-US" sz="1200" i="1" dirty="0">
-                <a:solidFill>
-                  <a:srgbClr val="1C2833"/>
-                </a:solidFill>
-                <a:latin typeface="Arial" pitchFamily="34" charset="0"/>
-                <a:ea typeface="Arial" pitchFamily="34" charset="-122"/>
-                <a:cs typeface="Arial" pitchFamily="34" charset="-120"/>
-              </a:rPr>
-              <a:t>prāṇāyāma</a:t>
-            </a:r>
-            <a:pPr algn="l" indent="0" marL="0">
-              <a:lnSpc>
-                <a:spcPts val="1620"/>
-              </a:lnSpc>
-              <a:spcAft>
-                <a:spcPts val="300"/>
-              </a:spcAft>
-              <a:buNone/>
-            </a:pPr>
-            <a:r>
-              <a:rPr lang="en-US" sz="1200" dirty="0">
-                <a:solidFill>
-                  <a:srgbClr val="1C2833"/>
-                </a:solidFill>
-                <a:latin typeface="Arial" pitchFamily="34" charset="0"/>
-                <a:ea typeface="Arial" pitchFamily="34" charset="-122"/>
-                <a:cs typeface="Arial" pitchFamily="34" charset="-120"/>
-              </a:rPr>
-              <a:t> · breath regulation · natural-breath observation</a:t>
-            </a:r>
-            <a:endParaRPr lang="en-US" sz="1200" dirty="0"/>
-          </a:p>
-          <a:p>
-            <a:pPr algn="l" marL="342900" indent="-342900">
-              <a:lnSpc>
-                <a:spcPts val="1620"/>
-              </a:lnSpc>
-              <a:spcAft>
-                <a:spcPts val="300"/>
-              </a:spcAft>
-              <a:buSzPct val="100000"/>
-              <a:buChar char="•"/>
-            </a:pPr>
-            <a:r>
-              <a:rPr lang="en-US" sz="1200" b="1" dirty="0">
-                <a:solidFill>
-                  <a:srgbClr val="1C2833"/>
-                </a:solidFill>
-                <a:latin typeface="Arial" pitchFamily="34" charset="0"/>
-                <a:ea typeface="Arial" pitchFamily="34" charset="-122"/>
-                <a:cs typeface="Arial" pitchFamily="34" charset="-120"/>
-              </a:rPr>
-              <a:t>5</a:t>
-            </a:r>
-            <a:pPr algn="l" indent="0" marL="0">
-              <a:lnSpc>
-                <a:spcPts val="1620"/>
-              </a:lnSpc>
-              <a:spcAft>
-                <a:spcPts val="300"/>
-              </a:spcAft>
-              <a:buNone/>
-            </a:pPr>
-            <a:r>
-              <a:rPr lang="en-US" sz="1200" dirty="0">
-                <a:solidFill>
-                  <a:srgbClr val="1C2833"/>
-                </a:solidFill>
-                <a:latin typeface="Arial" pitchFamily="34" charset="0"/>
-                <a:ea typeface="Arial" pitchFamily="34" charset="-122"/>
-                <a:cs typeface="Arial" pitchFamily="34" charset="-120"/>
-              </a:rPr>
-              <a:t> — </a:t>
-            </a:r>
-            <a:pPr algn="l" indent="0" marL="0">
-              <a:lnSpc>
-                <a:spcPts val="1620"/>
-              </a:lnSpc>
-              <a:spcAft>
-                <a:spcPts val="300"/>
-              </a:spcAft>
-              <a:buNone/>
-            </a:pPr>
-            <a:r>
-              <a:rPr lang="en-US" sz="1200" i="1" dirty="0">
-                <a:solidFill>
-                  <a:srgbClr val="1C2833"/>
-                </a:solidFill>
-                <a:latin typeface="Arial" pitchFamily="34" charset="0"/>
-                <a:ea typeface="Arial" pitchFamily="34" charset="-122"/>
-                <a:cs typeface="Arial" pitchFamily="34" charset="-120"/>
-              </a:rPr>
-              <a:t>pratyāhāra</a:t>
-            </a:r>
-            <a:pPr algn="l" indent="0" marL="0">
-              <a:lnSpc>
-                <a:spcPts val="1620"/>
-              </a:lnSpc>
-              <a:spcAft>
-                <a:spcPts val="300"/>
-              </a:spcAft>
-              <a:buNone/>
-            </a:pPr>
-            <a:r>
-              <a:rPr lang="en-US" sz="1200" dirty="0">
-                <a:solidFill>
-                  <a:srgbClr val="1C2833"/>
-                </a:solidFill>
-                <a:latin typeface="Arial" pitchFamily="34" charset="0"/>
-                <a:ea typeface="Arial" pitchFamily="34" charset="-122"/>
-                <a:cs typeface="Arial" pitchFamily="34" charset="-120"/>
-              </a:rPr>
-              <a:t> · sense-withdrawal · turning attention away from external sights/sounds</a:t>
-            </a:r>
-            <a:endParaRPr lang="en-US" sz="1200" dirty="0"/>
-          </a:p>
-          <a:p>
-            <a:pPr algn="l" marL="342900" indent="-342900">
-              <a:lnSpc>
-                <a:spcPts val="1620"/>
-              </a:lnSpc>
-              <a:spcAft>
-                <a:spcPts val="300"/>
-              </a:spcAft>
-              <a:buSzPct val="100000"/>
-              <a:buChar char="•"/>
-            </a:pPr>
-            <a:r>
-              <a:rPr lang="en-US" sz="1200" b="1" dirty="0">
-                <a:solidFill>
-                  <a:srgbClr val="1C2833"/>
-                </a:solidFill>
-                <a:latin typeface="Arial" pitchFamily="34" charset="0"/>
-                <a:ea typeface="Arial" pitchFamily="34" charset="-122"/>
-                <a:cs typeface="Arial" pitchFamily="34" charset="-120"/>
-              </a:rPr>
-              <a:t>6</a:t>
-            </a:r>
-            <a:pPr algn="l" indent="0" marL="0">
-              <a:lnSpc>
-                <a:spcPts val="1620"/>
-              </a:lnSpc>
-              <a:spcAft>
-                <a:spcPts val="300"/>
-              </a:spcAft>
-              <a:buNone/>
-            </a:pPr>
-            <a:r>
-              <a:rPr lang="en-US" sz="1200" dirty="0">
-                <a:solidFill>
-                  <a:srgbClr val="1C2833"/>
-                </a:solidFill>
-                <a:latin typeface="Arial" pitchFamily="34" charset="0"/>
-                <a:ea typeface="Arial" pitchFamily="34" charset="-122"/>
-                <a:cs typeface="Arial" pitchFamily="34" charset="-120"/>
-              </a:rPr>
-              <a:t> — </a:t>
-            </a:r>
-            <a:pPr algn="l" indent="0" marL="0">
-              <a:lnSpc>
-                <a:spcPts val="1620"/>
-              </a:lnSpc>
-              <a:spcAft>
-                <a:spcPts val="300"/>
-              </a:spcAft>
-              <a:buNone/>
-            </a:pPr>
-            <a:r>
-              <a:rPr lang="en-US" sz="1200" i="1" dirty="0">
-                <a:solidFill>
-                  <a:srgbClr val="1C2833"/>
-                </a:solidFill>
-                <a:latin typeface="Arial" pitchFamily="34" charset="0"/>
-                <a:ea typeface="Arial" pitchFamily="34" charset="-122"/>
-                <a:cs typeface="Arial" pitchFamily="34" charset="-120"/>
-              </a:rPr>
-              <a:t>dhāraṇā</a:t>
-            </a:r>
-            <a:pPr algn="l" indent="0" marL="0">
-              <a:lnSpc>
-                <a:spcPts val="1620"/>
-              </a:lnSpc>
-              <a:spcAft>
-                <a:spcPts val="300"/>
-              </a:spcAft>
-              <a:buNone/>
-            </a:pPr>
-            <a:r>
-              <a:rPr lang="en-US" sz="1200" dirty="0">
-                <a:solidFill>
-                  <a:srgbClr val="1C2833"/>
-                </a:solidFill>
-                <a:latin typeface="Arial" pitchFamily="34" charset="0"/>
-                <a:ea typeface="Arial" pitchFamily="34" charset="-122"/>
-                <a:cs typeface="Arial" pitchFamily="34" charset="-120"/>
-              </a:rPr>
-              <a:t> · focused attention · holding the mind on one object for 12 seconds</a:t>
-            </a:r>
-            <a:endParaRPr lang="en-US" sz="1200" dirty="0"/>
-          </a:p>
-          <a:p>
-            <a:pPr algn="l" marL="342900" indent="-342900">
-              <a:lnSpc>
-                <a:spcPts val="1620"/>
-              </a:lnSpc>
-              <a:spcAft>
-                <a:spcPts val="300"/>
-              </a:spcAft>
-              <a:buSzPct val="100000"/>
-              <a:buChar char="•"/>
-            </a:pPr>
-            <a:r>
-              <a:rPr lang="en-US" sz="1200" b="1" dirty="0">
-                <a:solidFill>
-                  <a:srgbClr val="1C2833"/>
-                </a:solidFill>
-                <a:latin typeface="Arial" pitchFamily="34" charset="0"/>
-                <a:ea typeface="Arial" pitchFamily="34" charset="-122"/>
-                <a:cs typeface="Arial" pitchFamily="34" charset="-120"/>
-              </a:rPr>
-              <a:t>7</a:t>
-            </a:r>
-            <a:pPr algn="l" indent="0" marL="0">
-              <a:lnSpc>
-                <a:spcPts val="1620"/>
-              </a:lnSpc>
-              <a:spcAft>
-                <a:spcPts val="300"/>
-              </a:spcAft>
-              <a:buNone/>
-            </a:pPr>
-            <a:r>
-              <a:rPr lang="en-US" sz="1200" dirty="0">
-                <a:solidFill>
-                  <a:srgbClr val="1C2833"/>
-                </a:solidFill>
-                <a:latin typeface="Arial" pitchFamily="34" charset="0"/>
-                <a:ea typeface="Arial" pitchFamily="34" charset="-122"/>
-                <a:cs typeface="Arial" pitchFamily="34" charset="-120"/>
-              </a:rPr>
-              <a:t> — </a:t>
-            </a:r>
-            <a:pPr algn="l" indent="0" marL="0">
-              <a:lnSpc>
-                <a:spcPts val="1620"/>
-              </a:lnSpc>
-              <a:spcAft>
-                <a:spcPts val="300"/>
-              </a:spcAft>
-              <a:buNone/>
-            </a:pPr>
-            <a:r>
-              <a:rPr lang="en-US" sz="1200" i="1" dirty="0">
-                <a:solidFill>
-                  <a:srgbClr val="1C2833"/>
-                </a:solidFill>
-                <a:latin typeface="Arial" pitchFamily="34" charset="0"/>
-                <a:ea typeface="Arial" pitchFamily="34" charset="-122"/>
-                <a:cs typeface="Arial" pitchFamily="34" charset="-120"/>
-              </a:rPr>
-              <a:t>dhyāna</a:t>
-            </a:r>
-            <a:pPr algn="l" indent="0" marL="0">
-              <a:lnSpc>
-                <a:spcPts val="1620"/>
-              </a:lnSpc>
-              <a:spcAft>
-                <a:spcPts val="300"/>
-              </a:spcAft>
-              <a:buNone/>
-            </a:pPr>
-            <a:r>
-              <a:rPr lang="en-US" sz="1200" dirty="0">
-                <a:solidFill>
-                  <a:srgbClr val="1C2833"/>
-                </a:solidFill>
-                <a:latin typeface="Arial" pitchFamily="34" charset="0"/>
-                <a:ea typeface="Arial" pitchFamily="34" charset="-122"/>
-                <a:cs typeface="Arial" pitchFamily="34" charset="-120"/>
-              </a:rPr>
-              <a:t> · sustained meditation · unbroken attention for several minutes</a:t>
-            </a:r>
-            <a:endParaRPr lang="en-US" sz="1200" dirty="0"/>
-          </a:p>
-          <a:p>
-            <a:pPr algn="l" marL="342900" indent="-342900">
-              <a:lnSpc>
-                <a:spcPts val="1620"/>
-              </a:lnSpc>
-              <a:spcAft>
-                <a:spcPts val="300"/>
-              </a:spcAft>
-              <a:buSzPct val="100000"/>
-              <a:buChar char="•"/>
-            </a:pPr>
-            <a:r>
-              <a:rPr lang="en-US" sz="1200" b="1" dirty="0">
-                <a:solidFill>
-                  <a:srgbClr val="1C2833"/>
-                </a:solidFill>
-                <a:latin typeface="Arial" pitchFamily="34" charset="0"/>
-                <a:ea typeface="Arial" pitchFamily="34" charset="-122"/>
-                <a:cs typeface="Arial" pitchFamily="34" charset="-120"/>
-              </a:rPr>
-              <a:t>8</a:t>
-            </a:r>
-            <a:pPr algn="l" indent="0" marL="0">
-              <a:lnSpc>
-                <a:spcPts val="1620"/>
-              </a:lnSpc>
-              <a:spcAft>
-                <a:spcPts val="300"/>
-              </a:spcAft>
-              <a:buNone/>
-            </a:pPr>
-            <a:r>
-              <a:rPr lang="en-US" sz="1200" dirty="0">
-                <a:solidFill>
-                  <a:srgbClr val="1C2833"/>
-                </a:solidFill>
-                <a:latin typeface="Arial" pitchFamily="34" charset="0"/>
-                <a:ea typeface="Arial" pitchFamily="34" charset="-122"/>
-                <a:cs typeface="Arial" pitchFamily="34" charset="-120"/>
-              </a:rPr>
-              <a:t> — </a:t>
-            </a:r>
-            <a:pPr algn="l" indent="0" marL="0">
-              <a:lnSpc>
-                <a:spcPts val="1620"/>
-              </a:lnSpc>
-              <a:spcAft>
-                <a:spcPts val="300"/>
-              </a:spcAft>
-              <a:buNone/>
-            </a:pPr>
-            <a:r>
-              <a:rPr lang="en-US" sz="1200" i="1" dirty="0">
-                <a:solidFill>
-                  <a:srgbClr val="1C2833"/>
-                </a:solidFill>
-                <a:latin typeface="Arial" pitchFamily="34" charset="0"/>
-                <a:ea typeface="Arial" pitchFamily="34" charset="-122"/>
-                <a:cs typeface="Arial" pitchFamily="34" charset="-120"/>
-              </a:rPr>
-              <a:t>samādhi</a:t>
-            </a:r>
-            <a:pPr algn="l" indent="0" marL="0">
-              <a:lnSpc>
-                <a:spcPts val="1620"/>
-              </a:lnSpc>
-              <a:spcAft>
-                <a:spcPts val="300"/>
-              </a:spcAft>
-              <a:buNone/>
-            </a:pPr>
-            <a:r>
-              <a:rPr lang="en-US" sz="1200" dirty="0">
-                <a:solidFill>
-                  <a:srgbClr val="1C2833"/>
-                </a:solidFill>
-                <a:latin typeface="Arial" pitchFamily="34" charset="0"/>
-                <a:ea typeface="Arial" pitchFamily="34" charset="-122"/>
-                <a:cs typeface="Arial" pitchFamily="34" charset="-120"/>
-              </a:rPr>
-              <a:t> · absorption · total integration — the final stage</a:t>
-            </a:r>
-            <a:endParaRPr lang="en-US" sz="1200" dirty="0"/>
-          </a:p>
-        </p:txBody>
-      </p:sp>
-      <p:sp>
-        <p:nvSpPr>
-          <p:cNvPr id="7" name="Text 5"/>
-          <p:cNvSpPr/>
-          <p:nvPr/>
-        </p:nvSpPr>
-        <p:spPr>
-          <a:xfrm>
-            <a:off x="634901" y="3646289"/>
-            <a:ext cx="8102798" cy="281880"/>
-          </a:xfrm>
-          <a:prstGeom prst="rect">
-            <a:avLst/>
-          </a:prstGeom>
-          <a:noFill/>
-          <a:ln/>
-        </p:spPr>
-        <p:txBody>
-          <a:bodyPr wrap="square" lIns="0" tIns="0" rIns="0" bIns="0" rtlCol="0" anchor="t"/>
-          <a:lstStyle/>
-          <a:p>
-            <a:pPr algn="l" marL="342900" indent="-342900">
-              <a:lnSpc>
-                <a:spcPts val="1620"/>
-              </a:lnSpc>
-              <a:spcAft>
-                <a:spcPts val="300"/>
-              </a:spcAft>
-              <a:buSzPct val="100000"/>
-              <a:buChar char="•"/>
-            </a:pPr>
-            <a:r>
-              <a:rPr lang="en-US" sz="1200" b="1" dirty="0">
-                <a:solidFill>
-                  <a:srgbClr val="1C2833"/>
-                </a:solidFill>
-                <a:latin typeface="Arial" pitchFamily="34" charset="0"/>
-                <a:ea typeface="Arial" pitchFamily="34" charset="-122"/>
-                <a:cs typeface="Arial" pitchFamily="34" charset="-120"/>
-              </a:rPr>
-              <a:t>Source quote</a:t>
-            </a:r>
-            <a:pPr algn="l" indent="0" marL="0">
-              <a:lnSpc>
-                <a:spcPts val="1620"/>
-              </a:lnSpc>
-              <a:spcAft>
-                <a:spcPts val="300"/>
-              </a:spcAft>
-              <a:buNone/>
-            </a:pPr>
-            <a:r>
-              <a:rPr lang="en-US" sz="1200" dirty="0">
-                <a:solidFill>
-                  <a:srgbClr val="1C2833"/>
-                </a:solidFill>
-                <a:latin typeface="Arial" pitchFamily="34" charset="0"/>
-                <a:ea typeface="Arial" pitchFamily="34" charset="-122"/>
-                <a:cs typeface="Arial" pitchFamily="34" charset="-120"/>
-              </a:rPr>
-              <a:t> (read aloud, don't memorise):</a:t>
-            </a:r>
-            <a:endParaRPr lang="en-US" sz="1200" dirty="0"/>
-          </a:p>
-        </p:txBody>
-      </p:sp>
-      <p:sp>
-        <p:nvSpPr>
-          <p:cNvPr id="8" name="Text 6"/>
-          <p:cNvSpPr/>
-          <p:nvPr/>
-        </p:nvSpPr>
-        <p:spPr>
-          <a:xfrm>
-            <a:off x="406301" y="4017020"/>
-            <a:ext cx="8498026" cy="426541"/>
-          </a:xfrm>
-          <a:prstGeom prst="rect">
-            <a:avLst/>
-          </a:prstGeom>
-          <a:noFill/>
-          <a:ln/>
-        </p:spPr>
-        <p:txBody>
-          <a:bodyPr wrap="square" lIns="0" tIns="0" rIns="0" bIns="0" rtlCol="0" anchor="t"/>
-          <a:lstStyle/>
-          <a:p>
-            <a:pPr algn="l" indent="0" marL="0">
-              <a:lnSpc>
-                <a:spcPts val="1680"/>
-              </a:lnSpc>
-              <a:spcBef>
-                <a:spcPts val="300"/>
-              </a:spcBef>
-              <a:spcAft>
-                <a:spcPts val="300"/>
-              </a:spcAft>
-              <a:buNone/>
-            </a:pPr>
-            <a:r>
-              <a:rPr lang="en-US" sz="1200" dirty="0">
-                <a:solidFill>
-                  <a:srgbClr val="1C2833"/>
-                </a:solidFill>
-                <a:latin typeface="Arial" pitchFamily="34" charset="0"/>
-                <a:ea typeface="Arial" pitchFamily="34" charset="-122"/>
-                <a:cs typeface="Arial" pitchFamily="34" charset="-120"/>
-              </a:rPr>
-              <a:t>&gt; "Yoga is practised in eight different stages: yama, niyama, āsana, prāṇāyāma, pratyāhāra, dhāraṇā, dhyāna, and samādhi."    &gt; — Śrīmad-Bhāgavatam, Canto 3 (purport)</a:t>
-            </a:r>
-            <a:endParaRPr lang="en-US" sz="1200" dirty="0"/>
-          </a:p>
-        </p:txBody>
-      </p:sp>
-      <p:sp>
-        <p:nvSpPr>
-          <p:cNvPr id="9" name="Text 7"/>
-          <p:cNvSpPr/>
-          <p:nvPr/>
-        </p:nvSpPr>
-        <p:spPr>
-          <a:xfrm>
-            <a:off x="406301" y="4519761"/>
-            <a:ext cx="8498026" cy="213271"/>
-          </a:xfrm>
-          <a:prstGeom prst="rect">
-            <a:avLst/>
-          </a:prstGeom>
-          <a:noFill/>
-          <a:ln/>
-        </p:spPr>
-        <p:txBody>
-          <a:bodyPr wrap="square" lIns="0" tIns="0" rIns="0" bIns="0" rtlCol="0" anchor="t"/>
-          <a:lstStyle/>
-          <a:p>
-            <a:pPr algn="l" indent="0" marL="0">
-              <a:lnSpc>
-                <a:spcPts val="1680"/>
-              </a:lnSpc>
-              <a:spcBef>
-                <a:spcPts val="300"/>
-              </a:spcBef>
-              <a:spcAft>
-                <a:spcPts val="300"/>
-              </a:spcAft>
-              <a:buNone/>
-            </a:pPr>
-            <a:r>
-              <a:rPr lang="en-US" sz="1200" dirty="0">
-                <a:solidFill>
-                  <a:srgbClr val="1C2833"/>
-                </a:solidFill>
-                <a:latin typeface="Arial" pitchFamily="34" charset="0"/>
-                <a:ea typeface="Arial" pitchFamily="34" charset="-122"/>
-                <a:cs typeface="Arial" pitchFamily="34" charset="-120"/>
-              </a:rPr>
-              <a:t>&gt; "The Bhagavad-gītā addresses all eight limbs of rāja-yoga." &gt; — </a:t>
-            </a:r>
-            <a:pPr algn="l" indent="0" marL="0">
-              <a:lnSpc>
-                <a:spcPts val="1680"/>
-              </a:lnSpc>
-              <a:spcBef>
-                <a:spcPts val="300"/>
-              </a:spcBef>
-              <a:spcAft>
-                <a:spcPts val="300"/>
-              </a:spcAft>
-              <a:buNone/>
-            </a:pPr>
-            <a:r>
-              <a:rPr lang="en-US" sz="1200" i="1" dirty="0">
-                <a:solidFill>
-                  <a:srgbClr val="1C2833"/>
-                </a:solidFill>
-                <a:latin typeface="Arial" pitchFamily="34" charset="0"/>
-                <a:ea typeface="Arial" pitchFamily="34" charset="-122"/>
-                <a:cs typeface="Arial" pitchFamily="34" charset="-120"/>
-              </a:rPr>
-              <a:t>Veda, Secrets from the East</a:t>
-            </a:r>
-            <a:pPr algn="l" indent="0" marL="0">
-              <a:lnSpc>
-                <a:spcPts val="1680"/>
-              </a:lnSpc>
-              <a:spcBef>
-                <a:spcPts val="300"/>
-              </a:spcBef>
-              <a:spcAft>
-                <a:spcPts val="300"/>
-              </a:spcAft>
-              <a:buNone/>
-            </a:pPr>
-            <a:r>
-              <a:rPr lang="en-US" sz="1200" dirty="0">
-                <a:solidFill>
-                  <a:srgbClr val="1C2833"/>
-                </a:solidFill>
-                <a:latin typeface="Arial" pitchFamily="34" charset="0"/>
-                <a:ea typeface="Arial" pitchFamily="34" charset="-122"/>
-                <a:cs typeface="Arial" pitchFamily="34" charset="-120"/>
-              </a:rPr>
-              <a:t> (Prabhupāda)</a:t>
-            </a:r>
-            <a:endParaRPr lang="en-US" sz="1200" dirty="0"/>
-          </a:p>
-        </p:txBody>
-      </p:sp>
-      <p:sp>
-        <p:nvSpPr>
-          <p:cNvPr id="10" name="Text 8"/>
-          <p:cNvSpPr/>
-          <p:nvPr/>
-        </p:nvSpPr>
-        <p:spPr>
-          <a:xfrm>
-            <a:off x="634901" y="4821882"/>
-            <a:ext cx="8102798" cy="281880"/>
-          </a:xfrm>
-          <a:prstGeom prst="rect">
-            <a:avLst/>
-          </a:prstGeom>
-          <a:noFill/>
-          <a:ln/>
-        </p:spPr>
-        <p:txBody>
-          <a:bodyPr wrap="square" lIns="0" tIns="0" rIns="0" bIns="0" rtlCol="0" anchor="t"/>
-          <a:lstStyle/>
-          <a:p>
-            <a:pPr algn="l" marL="342900" indent="-342900">
-              <a:lnSpc>
-                <a:spcPts val="1620"/>
-              </a:lnSpc>
-              <a:spcAft>
-                <a:spcPts val="300"/>
-              </a:spcAft>
-              <a:buSzPct val="100000"/>
-              <a:buChar char="•"/>
-            </a:pPr>
-            <a:r>
-              <a:rPr lang="en-US" sz="1200" b="1" dirty="0">
-                <a:solidFill>
-                  <a:srgbClr val="1C2833"/>
-                </a:solidFill>
-                <a:latin typeface="Arial" pitchFamily="34" charset="0"/>
-                <a:ea typeface="Arial" pitchFamily="34" charset="-122"/>
-                <a:cs typeface="Arial" pitchFamily="34" charset="-120"/>
-              </a:rPr>
-              <a:t>Patterns to notice (write on board):</a:t>
-            </a:r>
-            <a:endParaRPr lang="en-US" sz="1200" dirty="0"/>
-          </a:p>
-        </p:txBody>
-      </p:sp>
-      <p:sp>
-        <p:nvSpPr>
-          <p:cNvPr id="11" name="Text 9"/>
-          <p:cNvSpPr/>
-          <p:nvPr/>
-        </p:nvSpPr>
-        <p:spPr>
-          <a:xfrm>
-            <a:off x="406301" y="5192613"/>
-            <a:ext cx="8498026" cy="426541"/>
-          </a:xfrm>
-          <a:prstGeom prst="rect">
-            <a:avLst/>
-          </a:prstGeom>
-          <a:noFill/>
-          <a:ln/>
-        </p:spPr>
-        <p:txBody>
-          <a:bodyPr wrap="square" lIns="0" tIns="0" rIns="0" bIns="0" rtlCol="0" anchor="t"/>
-          <a:lstStyle/>
-          <a:p>
-            <a:pPr algn="l" indent="0" marL="0">
-              <a:lnSpc>
-                <a:spcPts val="1680"/>
-              </a:lnSpc>
-              <a:spcBef>
-                <a:spcPts val="300"/>
-              </a:spcBef>
-              <a:spcAft>
-                <a:spcPts val="300"/>
-              </a:spcAft>
-              <a:buNone/>
-            </a:pPr>
-            <a:r>
-              <a:rPr lang="en-US" sz="1200" dirty="0">
-                <a:solidFill>
-                  <a:srgbClr val="1C2833"/>
-                </a:solidFill>
-                <a:latin typeface="Arial" pitchFamily="34" charset="0"/>
-                <a:ea typeface="Arial" pitchFamily="34" charset="-122"/>
-                <a:cs typeface="Arial" pitchFamily="34" charset="-120"/>
-              </a:rPr>
-              <a:t>– Limbs 1–2 are about </a:t>
-            </a:r>
-            <a:pPr algn="l" indent="0" marL="0">
-              <a:lnSpc>
-                <a:spcPts val="1680"/>
-              </a:lnSpc>
-              <a:spcBef>
-                <a:spcPts val="300"/>
-              </a:spcBef>
-              <a:spcAft>
-                <a:spcPts val="300"/>
-              </a:spcAft>
-              <a:buNone/>
-            </a:pPr>
-            <a:r>
-              <a:rPr lang="en-US" sz="1200" b="1" dirty="0">
-                <a:solidFill>
-                  <a:srgbClr val="1C2833"/>
-                </a:solidFill>
-                <a:latin typeface="Arial" pitchFamily="34" charset="0"/>
-                <a:ea typeface="Arial" pitchFamily="34" charset="-122"/>
-                <a:cs typeface="Arial" pitchFamily="34" charset="-120"/>
-              </a:rPr>
-              <a:t>conduct</a:t>
-            </a:r>
-            <a:pPr algn="l" indent="0" marL="0">
-              <a:lnSpc>
-                <a:spcPts val="1680"/>
-              </a:lnSpc>
-              <a:spcBef>
-                <a:spcPts val="300"/>
-              </a:spcBef>
-              <a:spcAft>
-                <a:spcPts val="300"/>
-              </a:spcAft>
-              <a:buNone/>
-            </a:pPr>
-            <a:r>
-              <a:rPr lang="en-US" sz="1200" dirty="0">
-                <a:solidFill>
-                  <a:srgbClr val="1C2833"/>
-                </a:solidFill>
-                <a:latin typeface="Arial" pitchFamily="34" charset="0"/>
-                <a:ea typeface="Arial" pitchFamily="34" charset="-122"/>
-                <a:cs typeface="Arial" pitchFamily="34" charset="-120"/>
-              </a:rPr>
-              <a:t> (how you live). – Limbs 3–4 are about </a:t>
-            </a:r>
-            <a:pPr algn="l" indent="0" marL="0">
-              <a:lnSpc>
-                <a:spcPts val="1680"/>
-              </a:lnSpc>
-              <a:spcBef>
-                <a:spcPts val="300"/>
-              </a:spcBef>
-              <a:spcAft>
-                <a:spcPts val="300"/>
-              </a:spcAft>
-              <a:buNone/>
-            </a:pPr>
-            <a:r>
-              <a:rPr lang="en-US" sz="1200" b="1" dirty="0">
-                <a:solidFill>
-                  <a:srgbClr val="1C2833"/>
-                </a:solidFill>
-                <a:latin typeface="Arial" pitchFamily="34" charset="0"/>
-                <a:ea typeface="Arial" pitchFamily="34" charset="-122"/>
-                <a:cs typeface="Arial" pitchFamily="34" charset="-120"/>
-              </a:rPr>
-              <a:t>the body</a:t>
-            </a:r>
-            <a:pPr algn="l" indent="0" marL="0">
-              <a:lnSpc>
-                <a:spcPts val="1680"/>
-              </a:lnSpc>
-              <a:spcBef>
-                <a:spcPts val="300"/>
-              </a:spcBef>
-              <a:spcAft>
-                <a:spcPts val="300"/>
-              </a:spcAft>
-              <a:buNone/>
-            </a:pPr>
-            <a:r>
-              <a:rPr lang="en-US" sz="1200" dirty="0">
-                <a:solidFill>
-                  <a:srgbClr val="1C2833"/>
-                </a:solidFill>
-                <a:latin typeface="Arial" pitchFamily="34" charset="0"/>
-                <a:ea typeface="Arial" pitchFamily="34" charset="-122"/>
-                <a:cs typeface="Arial" pitchFamily="34" charset="-120"/>
-              </a:rPr>
-              <a:t> (what we practise this module). – Limbs 5–8 are about </a:t>
-            </a:r>
-            <a:pPr algn="l" indent="0" marL="0">
-              <a:lnSpc>
-                <a:spcPts val="1680"/>
-              </a:lnSpc>
-              <a:spcBef>
-                <a:spcPts val="300"/>
-              </a:spcBef>
-              <a:spcAft>
-                <a:spcPts val="300"/>
-              </a:spcAft>
-              <a:buNone/>
-            </a:pPr>
-            <a:r>
-              <a:rPr lang="en-US" sz="1200" b="1" dirty="0">
-                <a:solidFill>
-                  <a:srgbClr val="1C2833"/>
-                </a:solidFill>
-                <a:latin typeface="Arial" pitchFamily="34" charset="0"/>
-                <a:ea typeface="Arial" pitchFamily="34" charset="-122"/>
-                <a:cs typeface="Arial" pitchFamily="34" charset="-120"/>
-              </a:rPr>
-              <a:t>the mind</a:t>
-            </a:r>
-            <a:pPr algn="l" indent="0" marL="0">
-              <a:lnSpc>
-                <a:spcPts val="1680"/>
-              </a:lnSpc>
-              <a:spcBef>
-                <a:spcPts val="300"/>
-              </a:spcBef>
-              <a:spcAft>
-                <a:spcPts val="300"/>
-              </a:spcAft>
-              <a:buNone/>
-            </a:pPr>
-            <a:r>
-              <a:rPr lang="en-US" sz="1200" dirty="0">
-                <a:solidFill>
-                  <a:srgbClr val="1C2833"/>
-                </a:solidFill>
-                <a:latin typeface="Arial" pitchFamily="34" charset="0"/>
-                <a:ea typeface="Arial" pitchFamily="34" charset="-122"/>
-                <a:cs typeface="Arial" pitchFamily="34" charset="-120"/>
-              </a:rPr>
-              <a:t>.</a:t>
-            </a:r>
-            <a:endParaRPr lang="en-US" sz="1200" dirty="0"/>
-          </a:p>
-        </p:txBody>
-      </p:sp>
-      <p:sp>
-        <p:nvSpPr>
-          <p:cNvPr id="12" name="Text 10"/>
-          <p:cNvSpPr/>
-          <p:nvPr/>
-        </p:nvSpPr>
-        <p:spPr>
-          <a:xfrm>
-            <a:off x="634901" y="5708005"/>
-            <a:ext cx="8102798" cy="281880"/>
-          </a:xfrm>
-          <a:prstGeom prst="rect">
-            <a:avLst/>
-          </a:prstGeom>
-          <a:noFill/>
-          <a:ln/>
-        </p:spPr>
-        <p:txBody>
-          <a:bodyPr wrap="square" lIns="0" tIns="0" rIns="0" bIns="0" rtlCol="0" anchor="t"/>
-          <a:lstStyle/>
-          <a:p>
-            <a:pPr algn="l" marL="342900" indent="-342900">
-              <a:lnSpc>
-                <a:spcPts val="1620"/>
-              </a:lnSpc>
-              <a:spcAft>
-                <a:spcPts val="300"/>
-              </a:spcAft>
-              <a:buSzPct val="100000"/>
-              <a:buChar char="•"/>
-            </a:pPr>
-            <a:r>
-              <a:rPr lang="en-US" sz="1200" i="1" dirty="0">
-                <a:solidFill>
-                  <a:srgbClr val="1C2833"/>
-                </a:solidFill>
-                <a:latin typeface="Arial" pitchFamily="34" charset="0"/>
-                <a:ea typeface="Arial" pitchFamily="34" charset="-122"/>
-                <a:cs typeface="Arial" pitchFamily="34" charset="-120"/>
-              </a:rPr>
-              <a:t>"Why does Patañjali put 'living ethically' BEFORE 'posture'? Why not start with the easy physical stuff?"</a:t>
-            </a:r>
-            <a:endParaRPr lang="en-US" sz="1200" dirty="0"/>
-          </a:p>
-        </p:txBody>
-      </p:sp>
-      <p:sp>
-        <p:nvSpPr>
-          <p:cNvPr id="13" name="Text 11"/>
-          <p:cNvSpPr/>
-          <p:nvPr/>
-        </p:nvSpPr>
-        <p:spPr>
-          <a:xfrm>
-            <a:off x="406301" y="6078736"/>
-            <a:ext cx="8498026" cy="426541"/>
-          </a:xfrm>
-          <a:prstGeom prst="rect">
-            <a:avLst/>
-          </a:prstGeom>
-          <a:noFill/>
-          <a:ln/>
-        </p:spPr>
-        <p:txBody>
-          <a:bodyPr wrap="square" lIns="0" tIns="0" rIns="0" bIns="0" rtlCol="0" anchor="t"/>
-          <a:lstStyle/>
-          <a:p>
-            <a:pPr algn="l" indent="0" marL="0">
-              <a:lnSpc>
-                <a:spcPts val="1680"/>
-              </a:lnSpc>
-              <a:spcBef>
-                <a:spcPts val="300"/>
-              </a:spcBef>
-              <a:spcAft>
-                <a:spcPts val="300"/>
-              </a:spcAft>
-              <a:buNone/>
-            </a:pPr>
-            <a:r>
-              <a:rPr lang="en-US" sz="1200" dirty="0">
-                <a:solidFill>
-                  <a:srgbClr val="1C2833"/>
-                </a:solidFill>
-                <a:latin typeface="Arial" pitchFamily="34" charset="0"/>
-                <a:ea typeface="Arial" pitchFamily="34" charset="-122"/>
-                <a:cs typeface="Arial" pitchFamily="34" charset="-120"/>
-              </a:rPr>
-              <a:t>– Take 2 student answers.    – Reinforce: the tradition says a turbulent inner life makes meditation impossible, so you have to settle the outer life first. (At Middle band that's a sufficient gloss.)</a:t>
-            </a:r>
-            <a:endParaRPr lang="en-US" sz="1200" dirty="0"/>
-          </a:p>
-        </p:txBody>
-      </p:sp>
-      <p:sp>
-        <p:nvSpPr>
-          <p:cNvPr id="14" name="Text 12"/>
-          <p:cNvSpPr/>
-          <p:nvPr/>
-        </p:nvSpPr>
-        <p:spPr>
-          <a:xfrm>
-            <a:off x="406301" y="6657677"/>
+            <a:off x="406301" y="4434929"/>
             <a:ext cx="8498026" cy="213271"/>
           </a:xfrm>
           <a:prstGeom prst="rect">
@@ -7358,7 +8552,7 @@
                 <a:ea typeface="Georgia" pitchFamily="34" charset="-122"/>
                 <a:cs typeface="Georgia" pitchFamily="34" charset="-120"/>
               </a:rPr>
-              <a:t>Practice (15 min) — Tāḍāsana + introduction to vṛkṣāsana</a:t>
+              <a:t>Core (15 min) — The eight limbs</a:t>
             </a:r>
             <a:endParaRPr lang="en-US" sz="1800" dirty="0"/>
           </a:p>
@@ -7372,8 +8566,8 @@
         </p:nvSpPr>
         <p:spPr>
           <a:xfrm>
-            <a:off x="406301" y="870942"/>
-            <a:ext cx="8498026" cy="853083"/>
+            <a:off x="634901" y="883593"/>
+            <a:ext cx="8102798" cy="281880"/>
           </a:xfrm>
           <a:prstGeom prst="rect">
             <a:avLst/>
@@ -7385,6 +8579,72 @@
           <a:bodyPr wrap="square" lIns="0" tIns="0" rIns="0" bIns="0" rtlCol="0" anchor="t"/>
           <a:lstStyle/>
           <a:p>
+            <a:pPr algn="l" marL="342900" indent="-342900">
+              <a:lnSpc>
+                <a:spcPts val="1620"/>
+              </a:lnSpc>
+              <a:spcAft>
+                <a:spcPts val="300"/>
+              </a:spcAft>
+              <a:buSzPct val="100000"/>
+              <a:buChar char="•"/>
+            </a:pPr>
+            <a:r>
+              <a:rPr lang="en-US" sz="1200" b="1" dirty="0">
+                <a:solidFill>
+                  <a:srgbClr val="1C2833"/>
+                </a:solidFill>
+                <a:latin typeface="Arial" pitchFamily="34" charset="0"/>
+                <a:ea typeface="Arial" pitchFamily="34" charset="-122"/>
+                <a:cs typeface="Arial" pitchFamily="34" charset="-120"/>
+              </a:rPr>
+              <a:t>Reveal the eight-limb chart.</a:t>
+            </a:r>
+            <a:pPr algn="l" indent="0" marL="0">
+              <a:lnSpc>
+                <a:spcPts val="1620"/>
+              </a:lnSpc>
+              <a:spcAft>
+                <a:spcPts val="300"/>
+              </a:spcAft>
+              <a:buNone/>
+            </a:pPr>
+            <a:r>
+              <a:rPr lang="en-US" sz="1200" dirty="0">
+                <a:solidFill>
+                  <a:srgbClr val="1C2833"/>
+                </a:solidFill>
+                <a:latin typeface="Arial" pitchFamily="34" charset="0"/>
+                <a:ea typeface="Arial" pitchFamily="34" charset="-122"/>
+                <a:cs typeface="Arial" pitchFamily="34" charset="-120"/>
+              </a:rPr>
+              <a:t> Walk through each limb with a one-line gloss:</a:t>
+            </a:r>
+            <a:endParaRPr lang="en-US" sz="1200" dirty="0"/>
+          </a:p>
+        </p:txBody>
+      </p:sp>
+      <p:sp>
+        <p:nvSpPr>
+          <p:cNvPr id="5" name="Text 3"/>
+          <p:cNvSpPr/>
+          <p:nvPr/>
+        </p:nvSpPr>
+        <p:spPr>
+          <a:xfrm>
+            <a:off x="406301" y="1254323"/>
+            <a:ext cx="8498026" cy="213271"/>
+          </a:xfrm>
+          <a:prstGeom prst="rect">
+            <a:avLst/>
+          </a:prstGeom>
+          <a:noFill/>
+          <a:ln/>
+        </p:spPr>
+        <p:txBody>
+          <a:bodyPr wrap="square" lIns="0" tIns="0" rIns="0" bIns="0" rtlCol="0" anchor="t"/>
+          <a:lstStyle/>
+          <a:p>
             <a:pPr algn="l" indent="0" marL="0">
               <a:lnSpc>
                 <a:spcPts val="1680"/>
@@ -7398,61 +8658,15 @@
               <a:buNone/>
             </a:pPr>
             <a:r>
-              <a:rPr lang="en-US" sz="1200" dirty="0">
-                <a:solidFill>
-                  <a:srgbClr val="1C2833"/>
-                </a:solidFill>
-                <a:latin typeface="Arial" pitchFamily="34" charset="0"/>
-                <a:ea typeface="Arial" pitchFamily="34" charset="-122"/>
-                <a:cs typeface="Arial" pitchFamily="34" charset="-120"/>
-              </a:rPr>
-              <a:t>– Tāḍāsana, 3 holds of 30 sec each. – Now: </a:t>
-            </a:r>
-            <a:pPr algn="l" indent="0" marL="0">
-              <a:lnSpc>
-                <a:spcPts val="1680"/>
-              </a:lnSpc>
-              <a:spcBef>
-                <a:spcPts val="300"/>
-              </a:spcBef>
-              <a:spcAft>
-                <a:spcPts val="300"/>
-              </a:spcAft>
-              <a:buNone/>
-            </a:pPr>
-            <a:r>
-              <a:rPr lang="en-US" sz="1200" b="1" dirty="0">
-                <a:solidFill>
-                  <a:srgbClr val="1C2833"/>
-                </a:solidFill>
-                <a:latin typeface="Arial" pitchFamily="34" charset="0"/>
-                <a:ea typeface="Arial" pitchFamily="34" charset="-122"/>
-                <a:cs typeface="Arial" pitchFamily="34" charset="-120"/>
-              </a:rPr>
-              <a:t>vṛkṣāsana (tree posture).</a:t>
-            </a:r>
-            <a:pPr algn="l" indent="0" marL="0">
-              <a:lnSpc>
-                <a:spcPts val="1680"/>
-              </a:lnSpc>
-              <a:spcBef>
-                <a:spcPts val="300"/>
-              </a:spcBef>
-              <a:spcAft>
-                <a:spcPts val="300"/>
-              </a:spcAft>
-              <a:buNone/>
-            </a:pPr>
-            <a:r>
-              <a:rPr lang="en-US" sz="1200" dirty="0">
-                <a:solidFill>
-                  <a:srgbClr val="1C2833"/>
-                </a:solidFill>
-                <a:latin typeface="Arial" pitchFamily="34" charset="0"/>
-                <a:ea typeface="Arial" pitchFamily="34" charset="-122"/>
-                <a:cs typeface="Arial" pitchFamily="34" charset="-120"/>
-              </a:rPr>
-              <a:t> – Stand in tāḍāsana. – Shift weight onto the left foot. – Place the right foot's sole against the inside of the left calf (NOT the side of the knee). – Hands at heart centre, or raised above the head. – Gaze fixed on one spot on the wall ahead. – Hold for 20 seconds. Switch sides. – Wobbling is normal. Falling is information, not failure.</a:t>
+              <a:rPr lang="en-US" sz="1200" i="1" dirty="0">
+                <a:solidFill>
+                  <a:srgbClr val="1C2833"/>
+                </a:solidFill>
+                <a:latin typeface="Arial" pitchFamily="34" charset="0"/>
+                <a:ea typeface="Arial" pitchFamily="34" charset="-122"/>
+                <a:cs typeface="Arial" pitchFamily="34" charset="-120"/>
+              </a:rPr>
+              <a:t>Each row: # · Sanskrit · Meaning · Example.</a:t>
             </a:r>
             <a:endParaRPr lang="en-US" sz="1200" dirty="0"/>
           </a:p>
@@ -7460,7 +8674,7 @@
       </p:sp>
       <p:sp>
         <p:nvSpPr>
-          <p:cNvPr id="5" name="Text 3"/>
+          <p:cNvPr id="6" name="Text 4"/>
           <p:cNvSpPr/>
           <p:nvPr/>
         </p:nvSpPr>
@@ -7610,7 +8824,7 @@
                 <a:ea typeface="Georgia" pitchFamily="34" charset="-122"/>
                 <a:cs typeface="Georgia" pitchFamily="34" charset="-120"/>
               </a:rPr>
-              <a:t>Exit ticket (8 min)</a:t>
+              <a:t>Core (15 min) — The eight limbs (cont.)</a:t>
             </a:r>
             <a:endParaRPr lang="en-US" sz="1800" dirty="0"/>
           </a:p>
@@ -7624,8 +8838,8 @@
         </p:nvSpPr>
         <p:spPr>
           <a:xfrm>
-            <a:off x="406301" y="870942"/>
-            <a:ext cx="8498026" cy="222796"/>
+            <a:off x="634901" y="883593"/>
+            <a:ext cx="8102798" cy="1500783"/>
           </a:xfrm>
           <a:prstGeom prst="rect">
             <a:avLst/>
@@ -7637,13 +8851,31 @@
           <a:bodyPr wrap="square" lIns="0" tIns="0" rIns="0" bIns="0" rtlCol="0" anchor="t"/>
           <a:lstStyle/>
           <a:p>
-            <a:pPr algn="l" indent="0" marL="0">
-              <a:lnSpc>
-                <a:spcPts val="1680"/>
-              </a:lnSpc>
-              <a:spcBef>
-                <a:spcPts val="300"/>
-              </a:spcBef>
+            <a:pPr algn="l" marL="342900" indent="-342900">
+              <a:lnSpc>
+                <a:spcPts val="1620"/>
+              </a:lnSpc>
+              <a:spcAft>
+                <a:spcPts val="300"/>
+              </a:spcAft>
+              <a:buSzPct val="100000"/>
+              <a:buChar char="•"/>
+            </a:pPr>
+            <a:r>
+              <a:rPr lang="en-US" sz="1200" b="1" dirty="0">
+                <a:solidFill>
+                  <a:srgbClr val="1C2833"/>
+                </a:solidFill>
+                <a:latin typeface="Arial" pitchFamily="34" charset="0"/>
+                <a:ea typeface="Arial" pitchFamily="34" charset="-122"/>
+                <a:cs typeface="Arial" pitchFamily="34" charset="-120"/>
+              </a:rPr>
+              <a:t>1</a:t>
+            </a:r>
+            <a:pPr algn="l" indent="0" marL="0">
+              <a:lnSpc>
+                <a:spcPts val="1620"/>
+              </a:lnSpc>
               <a:spcAft>
                 <a:spcPts val="300"/>
               </a:spcAft>
@@ -7658,15 +8890,32 @@
                 <a:ea typeface="Arial" pitchFamily="34" charset="-122"/>
                 <a:cs typeface="Arial" pitchFamily="34" charset="-120"/>
               </a:rPr>
-              <a:t>– Worksheet: students match each of the 8 limbs to a description. – See </a:t>
-            </a:r>
-            <a:pPr algn="l" indent="0" marL="0">
-              <a:lnSpc>
-                <a:spcPts val="1680"/>
-              </a:lnSpc>
-              <a:spcBef>
-                <a:spcPts val="300"/>
-              </a:spcBef>
+              <a:t> — </a:t>
+            </a:r>
+            <a:pPr algn="l" indent="0" marL="0">
+              <a:lnSpc>
+                <a:spcPts val="1620"/>
+              </a:lnSpc>
+              <a:spcAft>
+                <a:spcPts val="300"/>
+              </a:spcAft>
+              <a:buNone/>
+            </a:pPr>
+            <a:r>
+              <a:rPr lang="en-US" sz="1200" i="1" dirty="0">
+                <a:solidFill>
+                  <a:srgbClr val="1C2833"/>
+                </a:solidFill>
+                <a:latin typeface="Arial" pitchFamily="34" charset="0"/>
+                <a:ea typeface="Arial" pitchFamily="34" charset="-122"/>
+                <a:cs typeface="Arial" pitchFamily="34" charset="-120"/>
+              </a:rPr>
+              <a:t>yama</a:t>
+            </a:r>
+            <a:pPr algn="l" indent="0" marL="0">
+              <a:lnSpc>
+                <a:spcPts val="1620"/>
+              </a:lnSpc>
               <a:spcAft>
                 <a:spcPts val="300"/>
               </a:spcAft>
@@ -7681,15 +8930,32 @@
                 <a:ea typeface="Arial" pitchFamily="34" charset="-122"/>
                 <a:cs typeface="Arial" pitchFamily="34" charset="-120"/>
               </a:rPr>
-              <a:t>quizzes/formative.md</a:t>
-            </a:r>
-            <a:pPr algn="l" indent="0" marL="0">
-              <a:lnSpc>
-                <a:spcPts val="1680"/>
-              </a:lnSpc>
-              <a:spcBef>
-                <a:spcPts val="300"/>
-              </a:spcBef>
+              <a:t> · restraints · non-harming (</a:t>
+            </a:r>
+            <a:pPr algn="l" indent="0" marL="0">
+              <a:lnSpc>
+                <a:spcPts val="1620"/>
+              </a:lnSpc>
+              <a:spcAft>
+                <a:spcPts val="300"/>
+              </a:spcAft>
+              <a:buNone/>
+            </a:pPr>
+            <a:r>
+              <a:rPr lang="en-US" sz="1200" i="1" dirty="0">
+                <a:solidFill>
+                  <a:srgbClr val="1C2833"/>
+                </a:solidFill>
+                <a:latin typeface="Arial" pitchFamily="34" charset="0"/>
+                <a:ea typeface="Arial" pitchFamily="34" charset="-122"/>
+                <a:cs typeface="Arial" pitchFamily="34" charset="-120"/>
+              </a:rPr>
+              <a:t>ahiṁsā</a:t>
+            </a:r>
+            <a:pPr algn="l" indent="0" marL="0">
+              <a:lnSpc>
+                <a:spcPts val="1620"/>
+              </a:lnSpc>
               <a:spcAft>
                 <a:spcPts val="300"/>
               </a:spcAft>
@@ -7704,7 +8970,547 @@
                 <a:ea typeface="Arial" pitchFamily="34" charset="-122"/>
                 <a:cs typeface="Arial" pitchFamily="34" charset="-120"/>
               </a:rPr>
-              <a:t> Part A.</a:t>
+              <a:t>), truthfulness (</a:t>
+            </a:r>
+            <a:pPr algn="l" indent="0" marL="0">
+              <a:lnSpc>
+                <a:spcPts val="1620"/>
+              </a:lnSpc>
+              <a:spcAft>
+                <a:spcPts val="300"/>
+              </a:spcAft>
+              <a:buNone/>
+            </a:pPr>
+            <a:r>
+              <a:rPr lang="en-US" sz="1200" i="1" dirty="0">
+                <a:solidFill>
+                  <a:srgbClr val="1C2833"/>
+                </a:solidFill>
+                <a:latin typeface="Arial" pitchFamily="34" charset="0"/>
+                <a:ea typeface="Arial" pitchFamily="34" charset="-122"/>
+                <a:cs typeface="Arial" pitchFamily="34" charset="-120"/>
+              </a:rPr>
+              <a:t>satya</a:t>
+            </a:r>
+            <a:pPr algn="l" indent="0" marL="0">
+              <a:lnSpc>
+                <a:spcPts val="1620"/>
+              </a:lnSpc>
+              <a:spcAft>
+                <a:spcPts val="300"/>
+              </a:spcAft>
+              <a:buNone/>
+            </a:pPr>
+            <a:r>
+              <a:rPr lang="en-US" sz="1200" dirty="0">
+                <a:solidFill>
+                  <a:srgbClr val="1C2833"/>
+                </a:solidFill>
+                <a:latin typeface="Arial" pitchFamily="34" charset="0"/>
+                <a:ea typeface="Arial" pitchFamily="34" charset="-122"/>
+                <a:cs typeface="Arial" pitchFamily="34" charset="-120"/>
+              </a:rPr>
+              <a:t>)</a:t>
+            </a:r>
+            <a:endParaRPr lang="en-US" sz="1200" dirty="0"/>
+          </a:p>
+          <a:p>
+            <a:pPr algn="l" marL="342900" indent="-342900">
+              <a:lnSpc>
+                <a:spcPts val="1620"/>
+              </a:lnSpc>
+              <a:spcAft>
+                <a:spcPts val="300"/>
+              </a:spcAft>
+              <a:buSzPct val="100000"/>
+              <a:buChar char="•"/>
+            </a:pPr>
+            <a:r>
+              <a:rPr lang="en-US" sz="1200" b="1" dirty="0">
+                <a:solidFill>
+                  <a:srgbClr val="1C2833"/>
+                </a:solidFill>
+                <a:latin typeface="Arial" pitchFamily="34" charset="0"/>
+                <a:ea typeface="Arial" pitchFamily="34" charset="-122"/>
+                <a:cs typeface="Arial" pitchFamily="34" charset="-120"/>
+              </a:rPr>
+              <a:t>2</a:t>
+            </a:r>
+            <a:pPr algn="l" indent="0" marL="0">
+              <a:lnSpc>
+                <a:spcPts val="1620"/>
+              </a:lnSpc>
+              <a:spcAft>
+                <a:spcPts val="300"/>
+              </a:spcAft>
+              <a:buNone/>
+            </a:pPr>
+            <a:r>
+              <a:rPr lang="en-US" sz="1200" dirty="0">
+                <a:solidFill>
+                  <a:srgbClr val="1C2833"/>
+                </a:solidFill>
+                <a:latin typeface="Arial" pitchFamily="34" charset="0"/>
+                <a:ea typeface="Arial" pitchFamily="34" charset="-122"/>
+                <a:cs typeface="Arial" pitchFamily="34" charset="-120"/>
+              </a:rPr>
+              <a:t> — </a:t>
+            </a:r>
+            <a:pPr algn="l" indent="0" marL="0">
+              <a:lnSpc>
+                <a:spcPts val="1620"/>
+              </a:lnSpc>
+              <a:spcAft>
+                <a:spcPts val="300"/>
+              </a:spcAft>
+              <a:buNone/>
+            </a:pPr>
+            <a:r>
+              <a:rPr lang="en-US" sz="1200" i="1" dirty="0">
+                <a:solidFill>
+                  <a:srgbClr val="1C2833"/>
+                </a:solidFill>
+                <a:latin typeface="Arial" pitchFamily="34" charset="0"/>
+                <a:ea typeface="Arial" pitchFamily="34" charset="-122"/>
+                <a:cs typeface="Arial" pitchFamily="34" charset="-120"/>
+              </a:rPr>
+              <a:t>niyama</a:t>
+            </a:r>
+            <a:pPr algn="l" indent="0" marL="0">
+              <a:lnSpc>
+                <a:spcPts val="1620"/>
+              </a:lnSpc>
+              <a:spcAft>
+                <a:spcPts val="300"/>
+              </a:spcAft>
+              <a:buNone/>
+            </a:pPr>
+            <a:r>
+              <a:rPr lang="en-US" sz="1200" dirty="0">
+                <a:solidFill>
+                  <a:srgbClr val="1C2833"/>
+                </a:solidFill>
+                <a:latin typeface="Arial" pitchFamily="34" charset="0"/>
+                <a:ea typeface="Arial" pitchFamily="34" charset="-122"/>
+                <a:cs typeface="Arial" pitchFamily="34" charset="-120"/>
+              </a:rPr>
+              <a:t> · observances · cleanliness (</a:t>
+            </a:r>
+            <a:pPr algn="l" indent="0" marL="0">
+              <a:lnSpc>
+                <a:spcPts val="1620"/>
+              </a:lnSpc>
+              <a:spcAft>
+                <a:spcPts val="300"/>
+              </a:spcAft>
+              <a:buNone/>
+            </a:pPr>
+            <a:r>
+              <a:rPr lang="en-US" sz="1200" i="1" dirty="0">
+                <a:solidFill>
+                  <a:srgbClr val="1C2833"/>
+                </a:solidFill>
+                <a:latin typeface="Arial" pitchFamily="34" charset="0"/>
+                <a:ea typeface="Arial" pitchFamily="34" charset="-122"/>
+                <a:cs typeface="Arial" pitchFamily="34" charset="-120"/>
+              </a:rPr>
+              <a:t>śauca</a:t>
+            </a:r>
+            <a:pPr algn="l" indent="0" marL="0">
+              <a:lnSpc>
+                <a:spcPts val="1620"/>
+              </a:lnSpc>
+              <a:spcAft>
+                <a:spcPts val="300"/>
+              </a:spcAft>
+              <a:buNone/>
+            </a:pPr>
+            <a:r>
+              <a:rPr lang="en-US" sz="1200" dirty="0">
+                <a:solidFill>
+                  <a:srgbClr val="1C2833"/>
+                </a:solidFill>
+                <a:latin typeface="Arial" pitchFamily="34" charset="0"/>
+                <a:ea typeface="Arial" pitchFamily="34" charset="-122"/>
+                <a:cs typeface="Arial" pitchFamily="34" charset="-120"/>
+              </a:rPr>
+              <a:t>), self-study (</a:t>
+            </a:r>
+            <a:pPr algn="l" indent="0" marL="0">
+              <a:lnSpc>
+                <a:spcPts val="1620"/>
+              </a:lnSpc>
+              <a:spcAft>
+                <a:spcPts val="300"/>
+              </a:spcAft>
+              <a:buNone/>
+            </a:pPr>
+            <a:r>
+              <a:rPr lang="en-US" sz="1200" i="1" dirty="0">
+                <a:solidFill>
+                  <a:srgbClr val="1C2833"/>
+                </a:solidFill>
+                <a:latin typeface="Arial" pitchFamily="34" charset="0"/>
+                <a:ea typeface="Arial" pitchFamily="34" charset="-122"/>
+                <a:cs typeface="Arial" pitchFamily="34" charset="-120"/>
+              </a:rPr>
+              <a:t>svādhyāya</a:t>
+            </a:r>
+            <a:pPr algn="l" indent="0" marL="0">
+              <a:lnSpc>
+                <a:spcPts val="1620"/>
+              </a:lnSpc>
+              <a:spcAft>
+                <a:spcPts val="300"/>
+              </a:spcAft>
+              <a:buNone/>
+            </a:pPr>
+            <a:r>
+              <a:rPr lang="en-US" sz="1200" dirty="0">
+                <a:solidFill>
+                  <a:srgbClr val="1C2833"/>
+                </a:solidFill>
+                <a:latin typeface="Arial" pitchFamily="34" charset="0"/>
+                <a:ea typeface="Arial" pitchFamily="34" charset="-122"/>
+                <a:cs typeface="Arial" pitchFamily="34" charset="-120"/>
+              </a:rPr>
+              <a:t>)</a:t>
+            </a:r>
+            <a:endParaRPr lang="en-US" sz="1200" dirty="0"/>
+          </a:p>
+          <a:p>
+            <a:pPr algn="l" marL="342900" indent="-342900">
+              <a:lnSpc>
+                <a:spcPts val="1620"/>
+              </a:lnSpc>
+              <a:spcAft>
+                <a:spcPts val="300"/>
+              </a:spcAft>
+              <a:buSzPct val="100000"/>
+              <a:buChar char="•"/>
+            </a:pPr>
+            <a:r>
+              <a:rPr lang="en-US" sz="1200" b="1" dirty="0">
+                <a:solidFill>
+                  <a:srgbClr val="1C2833"/>
+                </a:solidFill>
+                <a:latin typeface="Arial" pitchFamily="34" charset="0"/>
+                <a:ea typeface="Arial" pitchFamily="34" charset="-122"/>
+                <a:cs typeface="Arial" pitchFamily="34" charset="-120"/>
+              </a:rPr>
+              <a:t>3</a:t>
+            </a:r>
+            <a:pPr algn="l" indent="0" marL="0">
+              <a:lnSpc>
+                <a:spcPts val="1620"/>
+              </a:lnSpc>
+              <a:spcAft>
+                <a:spcPts val="300"/>
+              </a:spcAft>
+              <a:buNone/>
+            </a:pPr>
+            <a:r>
+              <a:rPr lang="en-US" sz="1200" dirty="0">
+                <a:solidFill>
+                  <a:srgbClr val="1C2833"/>
+                </a:solidFill>
+                <a:latin typeface="Arial" pitchFamily="34" charset="0"/>
+                <a:ea typeface="Arial" pitchFamily="34" charset="-122"/>
+                <a:cs typeface="Arial" pitchFamily="34" charset="-120"/>
+              </a:rPr>
+              <a:t> — </a:t>
+            </a:r>
+            <a:pPr algn="l" indent="0" marL="0">
+              <a:lnSpc>
+                <a:spcPts val="1620"/>
+              </a:lnSpc>
+              <a:spcAft>
+                <a:spcPts val="300"/>
+              </a:spcAft>
+              <a:buNone/>
+            </a:pPr>
+            <a:r>
+              <a:rPr lang="en-US" sz="1200" i="1" dirty="0">
+                <a:solidFill>
+                  <a:srgbClr val="1C2833"/>
+                </a:solidFill>
+                <a:latin typeface="Arial" pitchFamily="34" charset="0"/>
+                <a:ea typeface="Arial" pitchFamily="34" charset="-122"/>
+                <a:cs typeface="Arial" pitchFamily="34" charset="-120"/>
+              </a:rPr>
+              <a:t>āsana</a:t>
+            </a:r>
+            <a:pPr algn="l" indent="0" marL="0">
+              <a:lnSpc>
+                <a:spcPts val="1620"/>
+              </a:lnSpc>
+              <a:spcAft>
+                <a:spcPts val="300"/>
+              </a:spcAft>
+              <a:buNone/>
+            </a:pPr>
+            <a:r>
+              <a:rPr lang="en-US" sz="1200" dirty="0">
+                <a:solidFill>
+                  <a:srgbClr val="1C2833"/>
+                </a:solidFill>
+                <a:latin typeface="Arial" pitchFamily="34" charset="0"/>
+                <a:ea typeface="Arial" pitchFamily="34" charset="-122"/>
+                <a:cs typeface="Arial" pitchFamily="34" charset="-120"/>
+              </a:rPr>
+              <a:t> · posture · tāḍāsana, vṛkṣāsana — what we're learning</a:t>
+            </a:r>
+            <a:endParaRPr lang="en-US" sz="1200" dirty="0"/>
+          </a:p>
+          <a:p>
+            <a:pPr algn="l" marL="342900" indent="-342900">
+              <a:lnSpc>
+                <a:spcPts val="1620"/>
+              </a:lnSpc>
+              <a:spcAft>
+                <a:spcPts val="300"/>
+              </a:spcAft>
+              <a:buSzPct val="100000"/>
+              <a:buChar char="•"/>
+            </a:pPr>
+            <a:r>
+              <a:rPr lang="en-US" sz="1200" b="1" dirty="0">
+                <a:solidFill>
+                  <a:srgbClr val="1C2833"/>
+                </a:solidFill>
+                <a:latin typeface="Arial" pitchFamily="34" charset="0"/>
+                <a:ea typeface="Arial" pitchFamily="34" charset="-122"/>
+                <a:cs typeface="Arial" pitchFamily="34" charset="-120"/>
+              </a:rPr>
+              <a:t>4</a:t>
+            </a:r>
+            <a:pPr algn="l" indent="0" marL="0">
+              <a:lnSpc>
+                <a:spcPts val="1620"/>
+              </a:lnSpc>
+              <a:spcAft>
+                <a:spcPts val="300"/>
+              </a:spcAft>
+              <a:buNone/>
+            </a:pPr>
+            <a:r>
+              <a:rPr lang="en-US" sz="1200" dirty="0">
+                <a:solidFill>
+                  <a:srgbClr val="1C2833"/>
+                </a:solidFill>
+                <a:latin typeface="Arial" pitchFamily="34" charset="0"/>
+                <a:ea typeface="Arial" pitchFamily="34" charset="-122"/>
+                <a:cs typeface="Arial" pitchFamily="34" charset="-120"/>
+              </a:rPr>
+              <a:t> — </a:t>
+            </a:r>
+            <a:pPr algn="l" indent="0" marL="0">
+              <a:lnSpc>
+                <a:spcPts val="1620"/>
+              </a:lnSpc>
+              <a:spcAft>
+                <a:spcPts val="300"/>
+              </a:spcAft>
+              <a:buNone/>
+            </a:pPr>
+            <a:r>
+              <a:rPr lang="en-US" sz="1200" i="1" dirty="0">
+                <a:solidFill>
+                  <a:srgbClr val="1C2833"/>
+                </a:solidFill>
+                <a:latin typeface="Arial" pitchFamily="34" charset="0"/>
+                <a:ea typeface="Arial" pitchFamily="34" charset="-122"/>
+                <a:cs typeface="Arial" pitchFamily="34" charset="-120"/>
+              </a:rPr>
+              <a:t>prāṇāyāma</a:t>
+            </a:r>
+            <a:pPr algn="l" indent="0" marL="0">
+              <a:lnSpc>
+                <a:spcPts val="1620"/>
+              </a:lnSpc>
+              <a:spcAft>
+                <a:spcPts val="300"/>
+              </a:spcAft>
+              <a:buNone/>
+            </a:pPr>
+            <a:r>
+              <a:rPr lang="en-US" sz="1200" dirty="0">
+                <a:solidFill>
+                  <a:srgbClr val="1C2833"/>
+                </a:solidFill>
+                <a:latin typeface="Arial" pitchFamily="34" charset="0"/>
+                <a:ea typeface="Arial" pitchFamily="34" charset="-122"/>
+                <a:cs typeface="Arial" pitchFamily="34" charset="-120"/>
+              </a:rPr>
+              <a:t> · breath regulation · natural-breath observation</a:t>
+            </a:r>
+            <a:endParaRPr lang="en-US" sz="1200" dirty="0"/>
+          </a:p>
+          <a:p>
+            <a:pPr algn="l" marL="342900" indent="-342900">
+              <a:lnSpc>
+                <a:spcPts val="1620"/>
+              </a:lnSpc>
+              <a:spcAft>
+                <a:spcPts val="300"/>
+              </a:spcAft>
+              <a:buSzPct val="100000"/>
+              <a:buChar char="•"/>
+            </a:pPr>
+            <a:r>
+              <a:rPr lang="en-US" sz="1200" b="1" dirty="0">
+                <a:solidFill>
+                  <a:srgbClr val="1C2833"/>
+                </a:solidFill>
+                <a:latin typeface="Arial" pitchFamily="34" charset="0"/>
+                <a:ea typeface="Arial" pitchFamily="34" charset="-122"/>
+                <a:cs typeface="Arial" pitchFamily="34" charset="-120"/>
+              </a:rPr>
+              <a:t>5</a:t>
+            </a:r>
+            <a:pPr algn="l" indent="0" marL="0">
+              <a:lnSpc>
+                <a:spcPts val="1620"/>
+              </a:lnSpc>
+              <a:spcAft>
+                <a:spcPts val="300"/>
+              </a:spcAft>
+              <a:buNone/>
+            </a:pPr>
+            <a:r>
+              <a:rPr lang="en-US" sz="1200" dirty="0">
+                <a:solidFill>
+                  <a:srgbClr val="1C2833"/>
+                </a:solidFill>
+                <a:latin typeface="Arial" pitchFamily="34" charset="0"/>
+                <a:ea typeface="Arial" pitchFamily="34" charset="-122"/>
+                <a:cs typeface="Arial" pitchFamily="34" charset="-120"/>
+              </a:rPr>
+              <a:t> — </a:t>
+            </a:r>
+            <a:pPr algn="l" indent="0" marL="0">
+              <a:lnSpc>
+                <a:spcPts val="1620"/>
+              </a:lnSpc>
+              <a:spcAft>
+                <a:spcPts val="300"/>
+              </a:spcAft>
+              <a:buNone/>
+            </a:pPr>
+            <a:r>
+              <a:rPr lang="en-US" sz="1200" i="1" dirty="0">
+                <a:solidFill>
+                  <a:srgbClr val="1C2833"/>
+                </a:solidFill>
+                <a:latin typeface="Arial" pitchFamily="34" charset="0"/>
+                <a:ea typeface="Arial" pitchFamily="34" charset="-122"/>
+                <a:cs typeface="Arial" pitchFamily="34" charset="-120"/>
+              </a:rPr>
+              <a:t>pratyāhāra</a:t>
+            </a:r>
+            <a:pPr algn="l" indent="0" marL="0">
+              <a:lnSpc>
+                <a:spcPts val="1620"/>
+              </a:lnSpc>
+              <a:spcAft>
+                <a:spcPts val="300"/>
+              </a:spcAft>
+              <a:buNone/>
+            </a:pPr>
+            <a:r>
+              <a:rPr lang="en-US" sz="1200" dirty="0">
+                <a:solidFill>
+                  <a:srgbClr val="1C2833"/>
+                </a:solidFill>
+                <a:latin typeface="Arial" pitchFamily="34" charset="0"/>
+                <a:ea typeface="Arial" pitchFamily="34" charset="-122"/>
+                <a:cs typeface="Arial" pitchFamily="34" charset="-120"/>
+              </a:rPr>
+              <a:t> · sense-withdrawal · turning attention away from external sights/sounds</a:t>
+            </a:r>
+            <a:endParaRPr lang="en-US" sz="1200" dirty="0"/>
+          </a:p>
+          <a:p>
+            <a:pPr algn="l" marL="342900" indent="-342900">
+              <a:lnSpc>
+                <a:spcPts val="1620"/>
+              </a:lnSpc>
+              <a:spcAft>
+                <a:spcPts val="300"/>
+              </a:spcAft>
+              <a:buSzPct val="100000"/>
+              <a:buChar char="•"/>
+            </a:pPr>
+            <a:r>
+              <a:rPr lang="en-US" sz="1200" b="1" dirty="0">
+                <a:solidFill>
+                  <a:srgbClr val="1C2833"/>
+                </a:solidFill>
+                <a:latin typeface="Arial" pitchFamily="34" charset="0"/>
+                <a:ea typeface="Arial" pitchFamily="34" charset="-122"/>
+                <a:cs typeface="Arial" pitchFamily="34" charset="-120"/>
+              </a:rPr>
+              <a:t>6</a:t>
+            </a:r>
+            <a:pPr algn="l" indent="0" marL="0">
+              <a:lnSpc>
+                <a:spcPts val="1620"/>
+              </a:lnSpc>
+              <a:spcAft>
+                <a:spcPts val="300"/>
+              </a:spcAft>
+              <a:buNone/>
+            </a:pPr>
+            <a:r>
+              <a:rPr lang="en-US" sz="1200" dirty="0">
+                <a:solidFill>
+                  <a:srgbClr val="1C2833"/>
+                </a:solidFill>
+                <a:latin typeface="Arial" pitchFamily="34" charset="0"/>
+                <a:ea typeface="Arial" pitchFamily="34" charset="-122"/>
+                <a:cs typeface="Arial" pitchFamily="34" charset="-120"/>
+              </a:rPr>
+              <a:t> — </a:t>
+            </a:r>
+            <a:pPr algn="l" indent="0" marL="0">
+              <a:lnSpc>
+                <a:spcPts val="1620"/>
+              </a:lnSpc>
+              <a:spcAft>
+                <a:spcPts val="300"/>
+              </a:spcAft>
+              <a:buNone/>
+            </a:pPr>
+            <a:r>
+              <a:rPr lang="en-US" sz="1200" i="1" dirty="0">
+                <a:solidFill>
+                  <a:srgbClr val="1C2833"/>
+                </a:solidFill>
+                <a:latin typeface="Arial" pitchFamily="34" charset="0"/>
+                <a:ea typeface="Arial" pitchFamily="34" charset="-122"/>
+                <a:cs typeface="Arial" pitchFamily="34" charset="-120"/>
+              </a:rPr>
+              <a:t>dhāraṇā</a:t>
+            </a:r>
+            <a:pPr algn="l" indent="0" marL="0">
+              <a:lnSpc>
+                <a:spcPts val="1620"/>
+              </a:lnSpc>
+              <a:spcAft>
+                <a:spcPts val="300"/>
+              </a:spcAft>
+              <a:buNone/>
+            </a:pPr>
+            <a:r>
+              <a:rPr lang="en-US" sz="1200" dirty="0">
+                <a:solidFill>
+                  <a:srgbClr val="1C2833"/>
+                </a:solidFill>
+                <a:latin typeface="Arial" pitchFamily="34" charset="0"/>
+                <a:ea typeface="Arial" pitchFamily="34" charset="-122"/>
+                <a:cs typeface="Arial" pitchFamily="34" charset="-120"/>
+              </a:rPr>
+              <a:t> · focused attention · holding the mind on one object for 12 seconds</a:t>
             </a:r>
             <a:endParaRPr lang="en-US" sz="1200" dirty="0"/>
           </a:p>
@@ -7862,7 +9668,7 @@
                 <a:ea typeface="Georgia" pitchFamily="34" charset="-122"/>
                 <a:cs typeface="Georgia" pitchFamily="34" charset="-120"/>
               </a:rPr>
-              <a:t>Wrap-up (5 min)</a:t>
+              <a:t>Core (15 min) — The eight limbs (cont.)</a:t>
             </a:r>
             <a:endParaRPr lang="en-US" sz="1800" dirty="0"/>
           </a:p>
@@ -7876,8 +9682,8 @@
         </p:nvSpPr>
         <p:spPr>
           <a:xfrm>
-            <a:off x="406301" y="870942"/>
-            <a:ext cx="8498026" cy="639812"/>
+            <a:off x="634901" y="883593"/>
+            <a:ext cx="8102798" cy="525661"/>
           </a:xfrm>
           <a:prstGeom prst="rect">
             <a:avLst/>
@@ -7889,13 +9695,31 @@
           <a:bodyPr wrap="square" lIns="0" tIns="0" rIns="0" bIns="0" rtlCol="0" anchor="t"/>
           <a:lstStyle/>
           <a:p>
-            <a:pPr algn="l" indent="0" marL="0">
-              <a:lnSpc>
-                <a:spcPts val="1680"/>
-              </a:lnSpc>
-              <a:spcBef>
-                <a:spcPts val="300"/>
-              </a:spcBef>
+            <a:pPr algn="l" marL="342900" indent="-342900">
+              <a:lnSpc>
+                <a:spcPts val="1620"/>
+              </a:lnSpc>
+              <a:spcAft>
+                <a:spcPts val="300"/>
+              </a:spcAft>
+              <a:buSzPct val="100000"/>
+              <a:buChar char="•"/>
+            </a:pPr>
+            <a:r>
+              <a:rPr lang="en-US" sz="1200" b="1" dirty="0">
+                <a:solidFill>
+                  <a:srgbClr val="1C2833"/>
+                </a:solidFill>
+                <a:latin typeface="Arial" pitchFamily="34" charset="0"/>
+                <a:ea typeface="Arial" pitchFamily="34" charset="-122"/>
+                <a:cs typeface="Arial" pitchFamily="34" charset="-120"/>
+              </a:rPr>
+              <a:t>7</a:t>
+            </a:r>
+            <a:pPr algn="l" indent="0" marL="0">
+              <a:lnSpc>
+                <a:spcPts val="1620"/>
+              </a:lnSpc>
               <a:spcAft>
                 <a:spcPts val="300"/>
               </a:spcAft>
@@ -7910,15 +9734,12 @@
                 <a:ea typeface="Arial" pitchFamily="34" charset="-122"/>
                 <a:cs typeface="Arial" pitchFamily="34" charset="-120"/>
               </a:rPr>
-              <a:t>– Three-question recap: – Which limb is posture? </a:t>
-            </a:r>
-            <a:pPr algn="l" indent="0" marL="0">
-              <a:lnSpc>
-                <a:spcPts val="1680"/>
-              </a:lnSpc>
-              <a:spcBef>
-                <a:spcPts val="300"/>
-              </a:spcBef>
+              <a:t> — </a:t>
+            </a:r>
+            <a:pPr algn="l" indent="0" marL="0">
+              <a:lnSpc>
+                <a:spcPts val="1620"/>
+              </a:lnSpc>
               <a:spcAft>
                 <a:spcPts val="300"/>
               </a:spcAft>
@@ -7933,15 +9754,12 @@
                 <a:ea typeface="Arial" pitchFamily="34" charset="-122"/>
                 <a:cs typeface="Arial" pitchFamily="34" charset="-120"/>
               </a:rPr>
-              <a:t>(3rd — āsana.)</a:t>
-            </a:r>
-            <a:pPr algn="l" indent="0" marL="0">
-              <a:lnSpc>
-                <a:spcPts val="1680"/>
-              </a:lnSpc>
-              <a:spcBef>
-                <a:spcPts val="300"/>
-              </a:spcBef>
+              <a:t>dhyāna</a:t>
+            </a:r>
+            <a:pPr algn="l" indent="0" marL="0">
+              <a:lnSpc>
+                <a:spcPts val="1620"/>
+              </a:lnSpc>
               <a:spcAft>
                 <a:spcPts val="300"/>
               </a:spcAft>
@@ -7956,15 +9774,56 @@
                 <a:ea typeface="Arial" pitchFamily="34" charset="-122"/>
                 <a:cs typeface="Arial" pitchFamily="34" charset="-120"/>
               </a:rPr>
-              <a:t> – Which limb is breath? </a:t>
-            </a:r>
-            <a:pPr algn="l" indent="0" marL="0">
-              <a:lnSpc>
-                <a:spcPts val="1680"/>
-              </a:lnSpc>
-              <a:spcBef>
-                <a:spcPts val="300"/>
-              </a:spcBef>
+              <a:t> · sustained meditation · unbroken attention for several minutes</a:t>
+            </a:r>
+            <a:endParaRPr lang="en-US" sz="1200" dirty="0"/>
+          </a:p>
+          <a:p>
+            <a:pPr algn="l" marL="342900" indent="-342900">
+              <a:lnSpc>
+                <a:spcPts val="1620"/>
+              </a:lnSpc>
+              <a:spcAft>
+                <a:spcPts val="300"/>
+              </a:spcAft>
+              <a:buSzPct val="100000"/>
+              <a:buChar char="•"/>
+            </a:pPr>
+            <a:r>
+              <a:rPr lang="en-US" sz="1200" b="1" dirty="0">
+                <a:solidFill>
+                  <a:srgbClr val="1C2833"/>
+                </a:solidFill>
+                <a:latin typeface="Arial" pitchFamily="34" charset="0"/>
+                <a:ea typeface="Arial" pitchFamily="34" charset="-122"/>
+                <a:cs typeface="Arial" pitchFamily="34" charset="-120"/>
+              </a:rPr>
+              <a:t>8</a:t>
+            </a:r>
+            <a:pPr algn="l" indent="0" marL="0">
+              <a:lnSpc>
+                <a:spcPts val="1620"/>
+              </a:lnSpc>
+              <a:spcAft>
+                <a:spcPts val="300"/>
+              </a:spcAft>
+              <a:buNone/>
+            </a:pPr>
+            <a:r>
+              <a:rPr lang="en-US" sz="1200" dirty="0">
+                <a:solidFill>
+                  <a:srgbClr val="1C2833"/>
+                </a:solidFill>
+                <a:latin typeface="Arial" pitchFamily="34" charset="0"/>
+                <a:ea typeface="Arial" pitchFamily="34" charset="-122"/>
+                <a:cs typeface="Arial" pitchFamily="34" charset="-120"/>
+              </a:rPr>
+              <a:t> — </a:t>
+            </a:r>
+            <a:pPr algn="l" indent="0" marL="0">
+              <a:lnSpc>
+                <a:spcPts val="1620"/>
+              </a:lnSpc>
               <a:spcAft>
                 <a:spcPts val="300"/>
               </a:spcAft>
@@ -7979,15 +9838,12 @@
                 <a:ea typeface="Arial" pitchFamily="34" charset="-122"/>
                 <a:cs typeface="Arial" pitchFamily="34" charset="-120"/>
               </a:rPr>
-              <a:t>(4th — prāṇāyāma.)</a:t>
-            </a:r>
-            <a:pPr algn="l" indent="0" marL="0">
-              <a:lnSpc>
-                <a:spcPts val="1680"/>
-              </a:lnSpc>
-              <a:spcBef>
-                <a:spcPts val="300"/>
-              </a:spcBef>
+              <a:t>samādhi</a:t>
+            </a:r>
+            <a:pPr algn="l" indent="0" marL="0">
+              <a:lnSpc>
+                <a:spcPts val="1620"/>
+              </a:lnSpc>
               <a:spcAft>
                 <a:spcPts val="300"/>
               </a:spcAft>
@@ -8002,38 +9858,58 @@
                 <a:ea typeface="Arial" pitchFamily="34" charset="-122"/>
                 <a:cs typeface="Arial" pitchFamily="34" charset="-120"/>
               </a:rPr>
-              <a:t> – What comes LAST? </a:t>
-            </a:r>
-            <a:pPr algn="l" indent="0" marL="0">
-              <a:lnSpc>
-                <a:spcPts val="1680"/>
-              </a:lnSpc>
-              <a:spcBef>
-                <a:spcPts val="300"/>
-              </a:spcBef>
-              <a:spcAft>
-                <a:spcPts val="300"/>
-              </a:spcAft>
-              <a:buNone/>
-            </a:pPr>
-            <a:r>
-              <a:rPr lang="en-US" sz="1200" i="1" dirty="0">
-                <a:solidFill>
-                  <a:srgbClr val="1C2833"/>
-                </a:solidFill>
-                <a:latin typeface="Arial" pitchFamily="34" charset="0"/>
-                <a:ea typeface="Arial" pitchFamily="34" charset="-122"/>
-                <a:cs typeface="Arial" pitchFamily="34" charset="-120"/>
-              </a:rPr>
-              <a:t>(8th — samādhi.)</a:t>
-            </a:r>
-            <a:pPr algn="l" indent="0" marL="0">
-              <a:lnSpc>
-                <a:spcPts val="1680"/>
-              </a:lnSpc>
-              <a:spcBef>
-                <a:spcPts val="300"/>
-              </a:spcBef>
+              <a:t> · absorption · total integration — the final stage</a:t>
+            </a:r>
+            <a:endParaRPr lang="en-US" sz="1200" dirty="0"/>
+          </a:p>
+        </p:txBody>
+      </p:sp>
+      <p:sp>
+        <p:nvSpPr>
+          <p:cNvPr id="5" name="Text 3"/>
+          <p:cNvSpPr/>
+          <p:nvPr/>
+        </p:nvSpPr>
+        <p:spPr>
+          <a:xfrm>
+            <a:off x="634901" y="1510754"/>
+            <a:ext cx="8102798" cy="281880"/>
+          </a:xfrm>
+          <a:prstGeom prst="rect">
+            <a:avLst/>
+          </a:prstGeom>
+          <a:noFill/>
+          <a:ln/>
+        </p:spPr>
+        <p:txBody>
+          <a:bodyPr wrap="square" lIns="0" tIns="0" rIns="0" bIns="0" rtlCol="0" anchor="t"/>
+          <a:lstStyle/>
+          <a:p>
+            <a:pPr algn="l" marL="342900" indent="-342900">
+              <a:lnSpc>
+                <a:spcPts val="1620"/>
+              </a:lnSpc>
+              <a:spcAft>
+                <a:spcPts val="300"/>
+              </a:spcAft>
+              <a:buSzPct val="100000"/>
+              <a:buChar char="•"/>
+            </a:pPr>
+            <a:r>
+              <a:rPr lang="en-US" sz="1200" b="1" dirty="0">
+                <a:solidFill>
+                  <a:srgbClr val="1C2833"/>
+                </a:solidFill>
+                <a:latin typeface="Arial" pitchFamily="34" charset="0"/>
+                <a:ea typeface="Arial" pitchFamily="34" charset="-122"/>
+                <a:cs typeface="Arial" pitchFamily="34" charset="-120"/>
+              </a:rPr>
+              <a:t>Source quote</a:t>
+            </a:r>
+            <a:pPr algn="l" indent="0" marL="0">
+              <a:lnSpc>
+                <a:spcPts val="1620"/>
+              </a:lnSpc>
               <a:spcAft>
                 <a:spcPts val="300"/>
               </a:spcAft>
@@ -8048,30 +9924,7 @@
                 <a:ea typeface="Arial" pitchFamily="34" charset="-122"/>
                 <a:cs typeface="Arial" pitchFamily="34" charset="-120"/>
               </a:rPr>
-              <a:t> – Preview Day 3: </a:t>
-            </a:r>
-            <a:pPr algn="l" indent="0" marL="0">
-              <a:lnSpc>
-                <a:spcPts val="1680"/>
-              </a:lnSpc>
-              <a:spcBef>
-                <a:spcPts val="300"/>
-              </a:spcBef>
-              <a:spcAft>
-                <a:spcPts val="300"/>
-              </a:spcAft>
-              <a:buNone/>
-            </a:pPr>
-            <a:r>
-              <a:rPr lang="en-US" sz="1200" i="1" dirty="0">
-                <a:solidFill>
-                  <a:srgbClr val="1C2833"/>
-                </a:solidFill>
-                <a:latin typeface="Arial" pitchFamily="34" charset="0"/>
-                <a:ea typeface="Arial" pitchFamily="34" charset="-122"/>
-                <a:cs typeface="Arial" pitchFamily="34" charset="-120"/>
-              </a:rPr>
-              <a:t>"Tomorrow — five foundational āsanas, including the tree we tried today."</a:t>
+              <a:t> (read aloud, don't memorise):</a:t>
             </a:r>
             <a:endParaRPr lang="en-US" sz="1200" dirty="0"/>
           </a:p>
@@ -8079,7 +9932,7 @@
       </p:sp>
       <p:sp>
         <p:nvSpPr>
-          <p:cNvPr id="5" name="Text 3"/>
+          <p:cNvPr id="6" name="Text 4"/>
           <p:cNvSpPr/>
           <p:nvPr/>
         </p:nvSpPr>
